--- a/assets/finance/D15_FI_III_Duration_Convexity.pptx
+++ b/assets/finance/D15_FI_III_Duration_Convexity.pptx
@@ -1196,7 +1196,12 @@
           <a:p>
             <a:r>
               <a:rPr lang="en-US" dirty="0"/>
-              <a:t/>
+              <a:t>ANGLE — The maths-heaviest morning of the course. Set the tone: every number on every slide is computable by hand.
+•  Two hours, four sections, thirteen worked examples — say so up front
+•  Warn them: calculators out, this deck is not a spectator sport
+•  One promise: by lunch they can price a 100 bp move on any book
+•  Pace target — 3 min on cover + agenda + objectives, then straight in
+NEXT — Roadmap, then the three places a bond return actually comes from.</a:t>
             </a:r>
             <a:endParaRPr lang="en-US" dirty="0"/>
           </a:p>
@@ -1284,7 +1289,14 @@
           <a:p>
             <a:r>
               <a:rPr lang="en-US" dirty="0"/>
-              <a:t/>
+              <a:t>ANGLE — MacDur is a weighted AVERAGE TIME, measured in years. Everything else in this section is derived from it — get the units right here or nothing downstream works.
+•  Stress "weights sum to 1" — they are shares of the full (dirty) price, so this is a genuine average
+•  Units trap: the Σ gives PERIODS. Divide by m to get years. Semi-annual bond → divide by 2
+•  Zero-coupon: one cash flow, weight 1.0, MacDur = maturity exactly. Use it as the anchor case
+•  Perpetual: (1+r)/r — no maturity at all, yet a finite duration. That surprises people, let it
+•  Second use of MacDur, from §1: it is also the horizon that neutralises rate risk. Same number, two jobs
+FROM THE DESK — Nobody on a desk quotes Macaulay duration. It survives because it is the only duration with an intuitive unit — time — and because it is what an ALM team matches against liabilities. Everything a trader quotes is downstream of it.
+NEXT — Compute it once, properly, on the bond we will use all morning.</a:t>
             </a:r>
             <a:endParaRPr lang="en-US" dirty="0"/>
           </a:p>
@@ -1372,7 +1384,14 @@
           <a:p>
             <a:r>
               <a:rPr lang="en-US" dirty="0"/>
-              <a:t/>
+              <a:t>ANGLE — Do this one on the board, slowly. It is the only time all morning they see every weight — after this the number just appears.
+•  Bond is at par, so PV of each cash flow IS its weight (×100). Point that shortcut out
+•  Period 10 carries 86.7% of the price — that single row supplies 8.669 of the 9.320
+•  Sum the t×weight column, get 9.3203 PERIODS. Pause. Ask for the annualised figure before revealing 4.66
+•  The ÷2 is the single most-failed step in this whole deck. Make them say it
+•  Contrast row 4: 6% coupon → 4.393y. Higher coupon pulls weight forward, duration falls
+ASK THE ROOM — A 5-year zero at the same yield — what is its Macaulay duration? Why is it longer than 4.66?
+NEXT — Weighted average time is not yet a price sensitivity. One division fixes that.</a:t>
             </a:r>
             <a:endParaRPr lang="en-US" dirty="0"/>
           </a:p>
@@ -1460,7 +1479,14 @@
           <a:p>
             <a:r>
               <a:rPr lang="en-US" dirty="0"/>
-              <a:t/>
+              <a:t>ANGLE — Two things happen in one line and students routinely do only one of them: divide by (1 + r per period), THEN divide by m.
+•  Write the denominator wrong on purpose first — 9.3203 / 1.032 — and let them catch it. r is PER PERIOD, 1.6%
+•  Result 9.17351 is still in periods. Divide by 2 → 4.58676 years. Two divisions, two different reasons
+•  Sign convention, drill it: ModDur is +4.587. The price change is −4.587 × Δy. Never a negative duration
+•  Interpretation in words: "a 1% rise in yield costs about 4.59% of full price"
+•  Note the symmetry in steps 3 and 4: ±80 bp gives ∓3.67%. Flag it as WRONG — real bonds are not symmetric. That is §3
+FROM THE DESK — When a risk system says "duration 4.59" it almost always means modified, annualised, on full price. But it can also mean effective, or key-rate-summed, or the OAS-model number. Ask which before you trade off it — two systems reporting "duration" on the same bond can disagree by 5%.
+NEXT — MacDur is not always available. Bump the yield instead and read the slope directly.</a:t>
             </a:r>
             <a:endParaRPr lang="en-US" dirty="0"/>
           </a:p>
@@ -1548,7 +1574,14 @@
           <a:p>
             <a:r>
               <a:rPr lang="en-US" dirty="0"/>
-              <a:t/>
+              <a:t>ANGLE — Same number, no Macaulay duration required. This is the method that survives when cash flows stop being certain — and the template for effective duration in §4.
+•  Point at the geometry: PV− and PV+ are two points on the price curve; the formula is rise over run
+•  Note the shape of it — DIFFERENCE of the two prices, divided by 2 × Δy × PV_0. Convexity will reuse the SUM
+•  The bump is on the bond's own YTM here. In §4 the same shape reappears with a CURVE shift. Foreshadow it
+•  Why it matters: callables, MBS and defaultable bonds have no clean MacDur, so this is the only route
+•  Smaller bump = better approximation, for yield duration. That stops being true for option models in §4
+FROM THE DESK — This is literally what a risk system does overnight: reprice the book at ±1 bp and difference it. Nobody is summing t×weight columns — they are running the pricer twice.
+NEXT — A percentage is not a P&amp;L. Multiply by the position.</a:t>
             </a:r>
             <a:endParaRPr lang="en-US" dirty="0"/>
           </a:p>
@@ -1636,7 +1669,15 @@
           <a:p>
             <a:r>
               <a:rPr lang="en-US" dirty="0"/>
-              <a:t/>
+              <a:t>ANGLE — The moment duration stops being an exam statistic and becomes a P&amp;L number the desk head recognises.
+•  Note the settlement adjustment: 57 days in, PV_full is 100.504 and AnnModDur has fallen to 4.43092
+•  Duration DECAYS as the coupon period elapses — that is the t/T effect, we formalise it two slides on
+•  MoneyDur = 445.3M looks absurd until you remember it is per 1.00 of yield, i.e. 100%
+•  Divide by 100 for a 1% move, by 10,000 for a basis point — that is the whole of PVBP
+•  Units discipline: MoneyDur takes the unit of whatever PV_full you fed it. Say it, then say it again
+FROM THE DESK — US desks say dollar duration, European desks say money duration, and risk reports often show "DV01" which is the same thing scaled to one basis point. Same quantity, three names, and the first thing to check on a new system is which scaling it uses.
+ASK THE ROOM — The position is USD 100M par but money duration is USD 445M. Is the investor levered?
+NEXT — Desks do not quote risk per 1% move. They quote it per basis point.</a:t>
             </a:r>
             <a:endParaRPr lang="en-US" dirty="0"/>
           </a:p>
@@ -1724,7 +1765,14 @@
           <a:p>
             <a:r>
               <a:rPr lang="en-US" dirty="0"/>
-              <a:t/>
+              <a:t>ANGLE — PVBP is the only duration measure that gets quoted out loud on a trading floor. It is also the one where the units bite hardest.
+•  Default unit: per 100 of PAR, per 1 basis point. Say both halves — students drop one or the other
+•  Cross-check against money duration: 445.32 × 0.0001 = 0.0445. Same number, two routes
+•  Note the bump is ±1 bp here, not ±5 bp — the definition is anchored to one basis point
+•  Scaling to the position is a division by 100, not a multiplication. Do it on the board
+•  Order of magnitude to memorise: ~USD 450 per bp per USD 1M of a 5-year bond
+FROM THE DESK — Risk limits on a rates desk are set in DV01, not notional — "you are running 250k of DV01" tells you the loss on a 1 bp move, whatever the instruments are. It is also the natural unit for hedging: match the DV01, not the notional, when you offset a bond with a future.
+NEXT — You now have all four measures. Next: what actually drives the number.</a:t>
             </a:r>
             <a:endParaRPr lang="en-US" dirty="0"/>
           </a:p>
@@ -1812,7 +1860,15 @@
           <a:p>
             <a:r>
               <a:rPr lang="en-US" dirty="0"/>
-              <a:t/>
+              <a:t>ANGLE — Four drivers, three of which are memorisable rules and one of which (t/T) is the reason a duration number goes stale within a week.
+•  Common thread for coupon and yield: both change how much WEIGHT sits on the final par payment
+•  Lower coupon or lower yield → fatter weight at maturity → longer duration. Everything else follows
+•  Maturity is the only one with an exception — flag the asterisk and let them read the callout
+•  The exception needs c well below r AND a very long N. Rare, but it is examinable
+•  Footnote: the saw-tooth. Duration drifts down inside a coupon period and jumps on the coupon date
+FROM THE DESK — The t/T effect is why "our duration is 4.6" is only true on the day it was struck. On a hedged book you rebalance on coupon dates precisely because the duration jumps back up — the hedge ratio that was right on Friday is wrong on Monday.
+ASK THE ROOM — Two 30-year bonds, one at a 2% coupon, one at 8%, both yielding 5%. Which one hurts more if rates rise 50 bp?
+NEXT — Put those three rules on one chart.</a:t>
             </a:r>
             <a:endParaRPr lang="en-US" dirty="0"/>
           </a:p>
@@ -1900,7 +1956,14 @@
           <a:p>
             <a:r>
               <a:rPr lang="en-US" dirty="0"/>
-              <a:t/>
+              <a:t>ANGLE — One picture for all three rules — and the shape that explains why the long end of a curve is where the risk lives.
+•  Read it vertically first: at any maturity, 3% sits above 5% sits above 8%. That is the coupon rule
+•  Read it horizontally: every curve rises, but with a decaying slope — the 5th year adds more than the 25th
+•  Say why: adding maturity only adds cash flows whose present value is already small
+•  The ceiling: modified duration of a perpetuity is 1/r = 20y at a 5% yield. Nothing plain-vanilla goes above it here
+•  Do NOT claim 21 — that is the Macaulay ceiling, (1+r)/r. This chart is modified
+FROM THE DESK — This shape is why duration extension gets expensive: to add 2 years of duration at the front you buy a couple of years of maturity, at the back you buy fifteen. It is also why 30-year issuance is the cheapest way for a treasurer to sell a lot of duration to the market.
+NEXT — Same three rules, now in dollars, on three real bonds.</a:t>
             </a:r>
             <a:endParaRPr lang="en-US" dirty="0"/>
           </a:p>
@@ -1988,7 +2051,15 @@
           <a:p>
             <a:r>
               <a:rPr lang="en-US" dirty="0"/>
-              <a:t/>
+              <a:t>ANGLE — Everything from §2 lands on one page, in currency, on positions of identical par. Same money in, wildly different risk.
+•  Set it up: USD 30M PAR in each, same currency, so nothing but the bond features differs
+•  Walk one column end to end — full price → ModDur → PVBP → market value → money duration → loss
+•  Make them do the last step: 437.054 × 0.01 × 300,000. The /100 scaling is the trap, see the footnote
+•  The Australian is a 1-year zero: duration 0.737 ≈ its maturity. Ties back to the zero-coupon rule
+•  CFA's own comparison: the BRWA loss is already ~6× the Australian, before you even reach Romania
+FROM THE DESK — This is a risk report. Nobody sizes a bond book by notional; they size it by contribution to portfolio DV01. USD 30M of the Romanian is not "the same trade" as USD 30M of the Australian — it is roughly twenty-four of them.
+ASK THE ROOM — You must cut 20% of the portfolio DV01 and can only sell one line. Which, and how much of it?
+NEXT — Every number so far assumed the price-yield line is straight. It is not. Section 3.</a:t>
             </a:r>
             <a:endParaRPr lang="en-US" dirty="0"/>
           </a:p>
@@ -2076,7 +2147,12 @@
           <a:p>
             <a:r>
               <a:rPr lang="en-US" dirty="0"/>
-              <a:t/>
+              <a:t>ANGLE — Divider. Duration was the first derivative. This section is the second — and the correction is always in the investor's favour, which is exactly why it is not free.
+•  ~30 minutes, seven content slides
+•  Frame it as an error-correction section, not a new topic
+•  Preview the punchline: 12 bp of error at 100 bp on a 5-year bond; far more on a 30-year
+•  Portfolio duration and convexity close the section — that is where the parallel-shift assumption gets named
+NEXT — Why the straight line is wrong.</a:t>
             </a:r>
             <a:endParaRPr lang="en-US" dirty="0"/>
           </a:p>
@@ -2164,7 +2240,12 @@
           <a:p>
             <a:r>
               <a:rPr lang="en-US" dirty="0"/>
-              <a:t/>
+              <a:t>ANGLE — The four sections are one escalator: risk → measure it → correct the measure → measure it when the formula breaks.
+•  §1 asks WHY rates hurt; §2 puts a number on it; §3 fixes the number; §4 handles bonds the number cannot describe
+•  Flag the through-line bond: BRWA appears in all four sections — same issuer, different question
+•  Say the trap out loud now: there are six "durations" and they are not interchangeable
+•  Timing — 30 / 40 / 30 / 20 minutes across the four sections
+NEXT — Objectives, then §1.</a:t>
             </a:r>
             <a:endParaRPr lang="en-US" dirty="0"/>
           </a:p>
@@ -2252,7 +2333,15 @@
           <a:p>
             <a:r>
               <a:rPr lang="en-US" dirty="0"/>
-              <a:t/>
+              <a:t>ANGLE — Duration is a tangent line to a curved function. Every error it makes points the same way — and that direction favours the bondholder.
+•  Draw it: convex curve, straight tangent touching at today's yield. The gap IS the convexity term
+•  Rates fall → true price is ABOVE the line → duration UNDER-states the gain
+•  Rates rise → true price is ABOVE the line again → duration OVER-states the loss
+•  So the correction is positive in both directions. That asymmetry is the "value" of convexity
+•  Footnote is the exam point: equal duration, more convexity wins both ways — so you pay for it in yield
+FROM THE DESK — Convexity is a real position, not a footnote. Long-dated receivers and mortgage hedgers trade it explicitly, and in a violent rate move the convexity of a book explains more of the P&amp;L than the duration does. The other side of that: in a quiet year you pay for convexity in carry and get nothing back.
+ASK THE ROOM — If convexity is good in both directions, why does anyone ever sell it?
+NEXT — Put a number on the gap.</a:t>
             </a:r>
             <a:endParaRPr lang="en-US" dirty="0"/>
           </a:p>
@@ -2340,7 +2429,14 @@
           <a:p>
             <a:r>
               <a:rPr lang="en-US" dirty="0"/>
-              <a:t/>
+              <a:t>ANGLE — Two formulas, one shape. Approximate duration used the DIFFERENCE of PV− and PV+; convexity uses their SUM. Point at that and the second formula stops being scary.
+•  Equation 1 is just a Taylor expansion truncated at the second term — say it, then move on
+•  The ½ is not decoration: it is the 1/2! from the Taylor series. Dropping it is a classic slip
+•  Δy is SQUARED, so the adjustment is positive whichever way rates move. Reinforce from the last slide
+•  Annualisation: convexity in periods ÷ m², not ÷ m. Duration ÷ 2, convexity ÷ 4 for a semi-annual bond
+•  Three drivers below are the SAME three as duration — plus dispersion, in the footnote
+FROM THE DESK — The m² is the single most common error when someone builds their own convexity in a spreadsheet: duration comes out right, convexity comes out four times too big, and the price estimate looks fine at 10 bp and absurd at 200.
+NEXT — Now watch the correction close a 12 bp gap.</a:t>
             </a:r>
             <a:endParaRPr lang="en-US" dirty="0"/>
           </a:p>
@@ -2428,7 +2524,15 @@
           <a:p>
             <a:r>
               <a:rPr lang="en-US" dirty="0"/>
-              <a:t/>
+              <a:t>ANGLE — The payoff slide of the section: a 50× reduction in error for one extra term. Make them see the two rows side by side.
+•  Read the +100 bp row across: exact −4.468, duration says −4.587, adjusted says −4.466
+•  Now read the −100 bp row: exact +4.710, duration STILL says 4.587 — the same number both ways
+•  That symmetry is the tell. Duration cannot know which way rates went; convexity can
+•  The adjustment is +12.1 bp in BOTH rows: it reduces the estimated loss and increases the estimated gain
+•  Residual error 0.23 bp — that is the third-order term, and nobody at Level I cares about it
+FROM THE DESK — On a 5-year bond at 100 bp, 12 bp of error is a rounding difference. On a 30-year book at 200 bp it is percentage points of NAV — and it is always in the same direction, so it does not average out over a year.
+ASK THE ROOM — Duration alone gives the same magnitude up and down. Which of the two estimates is it wrong about by more?
+NEXT — Same correction, now in currency.</a:t>
             </a:r>
             <a:endParaRPr lang="en-US" dirty="0"/>
           </a:p>
@@ -2516,7 +2620,14 @@
           <a:p>
             <a:r>
               <a:rPr lang="en-US" dirty="0"/>
-              <a:t/>
+              <a:t>ANGLE — Percent errors become P&amp;L errors. USD 119k of over-stated loss on a USD 100M position — that is the size of the mistake duration alone makes.
+•  MoneyCon = AnnConvexity × PV_full. Exactly the same move as MoneyDur, one line up
+•  Note the units again: convexity has no unit, so MoneyCon carries the currency of PV_full
+•  Duration-only estimate: −4,586,759. Actual: −4,467,884. Gap: 118,875 of phantom loss
+•  Convexity leg puts +121,195 back. Residual error 2,320 on a USD 100M position
+•  Ask them to redo it at −100 bp before you show it: actual +4,710,348, estimate +4,707,953
+FROM THE DESK — If your P&amp;L attribution shows a consistent unexplained residual on rate moves, the first place to look is a missing convexity term — the sign is a giveaway, because it is always the same way round.
+NEXT — Now scale up the maturity and watch that "small correction" stop being small.</a:t>
             </a:r>
             <a:endParaRPr lang="en-US" dirty="0"/>
           </a:p>
@@ -2604,7 +2715,14 @@
           <a:p>
             <a:r>
               <a:rPr lang="en-US" dirty="0"/>
-              <a:t/>
+              <a:t>ANGLE — Convexity does not scale with duration — it scales with duration SQUARED. That is why the long end behaves differently in kind, not just in degree.
+•  Maturity 6× longer, duration only 3.5× larger, convexity 15× larger. Say those three numbers in order
+•  Reason: the convexity column weights by t × (t+1), so it grows roughly with T²
+•  Last column is the diagnostic: convexity per unit of duration goes from 5.3 to 23.2
+•  Callout: on the Romanian, the convexity adjustment is 1.85% of price — bigger than most people's whole P&amp;L target
+•  Note the Romanian has a HIGHER coupon and yield, which should shorten it — maturity still wins by miles
+FROM THE DESK — This is the barbell trade in one table: two short bonds plus one long bond can match the duration of a bullet portfolio while carrying far more convexity. You outperform on any large move in either direction — and pay for it in yield every day nothing happens.
+NEXT — Combine bonds and you need portfolio-level numbers.</a:t>
             </a:r>
             <a:endParaRPr lang="en-US" dirty="0"/>
           </a:p>
@@ -2692,7 +2810,15 @@
           <a:p>
             <a:r>
               <a:rPr lang="en-US" dirty="0"/>
-              <a:t/>
+              <a:t>ANGLE — The arithmetic takes ten seconds. The assumption hidden inside it is what the rest of the deck spends its time attacking.
+•  Weights are MARKET VALUE, never par and never face. Equal par here gives 50.50 / 49.50, not 50/50
+•  Same weights apply to convexity — one weighting scheme, two statistics
+•  Note how the Romanian dominates: half the market value, but 77% of the portfolio duration (7.874 of 10.190)
+•  Name the limitation out loud: this number is only right for a PARALLEL shift
+•  Real curves steepen, flatten and twist. A bear steepener would hurt this book far more than −9.21%
+FROM THE DESK — Every fixed-income factsheet you will read quotes a single portfolio duration computed exactly this way. It is a perfectly good summary and a terrible risk model — which is why the same desk also runs key rate durations, and why §4 exists.
+ASK THE ROOM — Which bond would you sell to cut portfolio duration by 2, and how much of it?
+NEXT — One more worked example, then curve-based measures.</a:t>
             </a:r>
             <a:endParaRPr lang="en-US" dirty="0"/>
           </a:p>
@@ -2780,7 +2906,14 @@
           <a:p>
             <a:r>
               <a:rPr lang="en-US" dirty="0"/>
-              <a:t/>
+              <a:t>ANGLE — The whole §3 toolkit on one position, in both units — and a reminder that the two legs must be added in the SAME unit before you quote a total.
+•  Watch the double negative in the duration leg: −8.376 × (−0.01) is POSITIVE. Half the room gets this wrong
+•  Convexity leg is positive too — Δy is squared, so the sign of the move never reaches it
+•  Percent route: 8.376% + 0.409% = 8.785%. Currency route: 4.188M + 0.204M = 4.392M. Same answer
+•  Have them check: 8.785% × GBP 50M = GBP 4.392M. If the two routes disagree, a unit slipped
+•  40 bp of the estimate comes from convexity — on this size, GBP 204k
+FROM THE DESK — Position sizing and stop-losses get set off the duration number alone, which quietly biases the stop too tight on a rally and too loose on a sell-off. On a long-duration book that bias is worth real money over a year.
+NEXT — Everything so far assumed the cash flows are known. Section 4 breaks that.</a:t>
             </a:r>
             <a:endParaRPr lang="en-US" dirty="0"/>
           </a:p>
@@ -2868,7 +3001,12 @@
           <a:p>
             <a:r>
               <a:rPr lang="en-US" dirty="0"/>
-              <a:t/>
+              <a:t>ANGLE — Divider. Three assumptions get dismantled here: that cash flows are certain, that the curve moves in parallel, and that spreads are independent of benchmark yields.
+•  ~20 minutes, six content slides — pace it, this is the last block before lunch
+•  Map the three fixes: effective duration (uncertain cash flows), key rate (non-parallel), empirical (spread correlation)
+•  Every formula here is a re-skin of one they already know — say so, it lowers the wall
+•  The examinable line: bonds with embedded options need EFFECTIVE duration, always
+NEXT — Why yield duration breaks first.</a:t>
             </a:r>
             <a:endParaRPr lang="en-US" dirty="0"/>
           </a:p>
@@ -2956,7 +3094,15 @@
           <a:p>
             <a:r>
               <a:rPr lang="en-US" dirty="0"/>
-              <a:t/>
+              <a:t>ANGLE — One structural point in three costumes: whenever somebody else can change your cash flows, a yield-based duration is measuring a bond that does not exist.
+•  Start from the failure, not the fix: the cash flow schedule is a function of rates, so the YTM is not a single number
+•  Callable — issuer owns the option, exercises when rates FALL, upside truncated
+•  Putable — investor owns the option, exercises when rates RISE, downside truncated, convexity stays POSITIVE
+•  MBS — prepayment is a call option written by the investor to every homeowner in the pool
+•  Common consequence: effective duration is always LOWER than the comparable straight bond, on the side where the option bites
+FROM THE DESK — The whole US mortgage market is a giant short-convexity position held by investors, and the hedging of it is why 10-year swap rates can accelerate in one direction — convexity hedgers are forced to sell duration into a sell-off. That is a market-structure fact, not a textbook one.
+ASK THE ROOM — Putable bond, rates spike 300 bp. Whose option is in the money, and what does that do to the price floor?
+NEXT — So we shift the CURVE instead of the yield.</a:t>
             </a:r>
             <a:endParaRPr lang="en-US" dirty="0"/>
           </a:p>
@@ -3044,7 +3190,14 @@
           <a:p>
             <a:r>
               <a:rPr lang="en-US" dirty="0"/>
-              <a:t/>
+              <a:t>ANGLE — Same two formulas as §2 and §3 with one substitution: Δy becomes ΔCurve. The substitution is small; what it buys is enormous.
+•  Put them side by side on the board with approximate ModDur and ApproxCon — identical shape
+•  Only two things change: the denominator bump is a CURVE shift, and PV± come from a model, not a price formula
+•  The model inputs matter: call schedule, credit spread assumption, rate volatility. Hold those fixed, move only the curve
+•  Counter-intuitive point from the source: a SMALLER curve bump does not necessarily improve accuracy here
+•  Read the callout — even a plain vanilla bond gives EffDur ≠ ModDur, see the footnote for the actual numbers
+FROM THE DESK — The number your risk system reports for a callable is only as good as the vol surface behind the option model. Two banks quoting effective duration on the same bond will differ, and the difference is a volatility disagreement, not a maths error.
+NEXT — Run it on a real callable and watch convexity go negative.</a:t>
             </a:r>
             <a:endParaRPr lang="en-US" dirty="0"/>
           </a:p>
@@ -3132,7 +3285,12 @@
           <a:p>
             <a:r>
               <a:rPr lang="en-US" dirty="0"/>
-              <a:t/>
+              <a:t>ANGLE — Six objectives, but objective 6 is the one that survives the exam: knowing WHICH duration to reach for.
+•  Read 2 and 6 aloud; skim the rest — do not narrate the slide
+•  Objective 4 is where the money is: convexity in currency, not just percent
+•  Objective 5 carries the trap — market-value weights, and the parallel-shift assumption hiding inside
+•  Tell them the exam tests 2 and 3 arithmetically, 6 conceptually
+NEXT — Section 1 — where does a bond return actually come from?</a:t>
             </a:r>
             <a:endParaRPr lang="en-US" dirty="0"/>
           </a:p>
@@ -3220,7 +3378,15 @@
           <a:p>
             <a:r>
               <a:rPr lang="en-US" dirty="0"/>
-              <a:t/>
+              <a:t>ANGLE — Negative convexity is the one sign flip in the whole deck — and it inverts everything §3 taught them about convexity being a gift.
+•  Do the EffDur first: 3.841 / 0.5053 = 7.601. Nothing new, it is the approximate-duration formula
+•  Then EffCon. Force them to look at the numerator: 201.941 − 202.120 = −0.179. NEGATIVE
+•  What negative means physically: the average of the up and down prices is BELOW today's price
+•  Translation: the bond loses more on a sell-off than it gains on an identical rally
+•  Read the footnote figures: −9.03% vs +6.17% on ±100 bp. That is the whole recommendation
+FROM THE DESK — This is what "the bond is called away just as it was about to work" looks like on a risk screen, before it happens. The issuer holds the option and prices it into the coupon — you are being paid for the negative convexity, so the question is never "is it bad" but "is the spread pickup enough".
+ASK THE ROOM — The PM only screens on duration. What does she own, and what does she think she owns?
+NEXT — One duration number for the whole curve is still too blunt. Break it apart by tenor.</a:t>
             </a:r>
             <a:endParaRPr lang="en-US" dirty="0"/>
           </a:p>
@@ -3308,7 +3474,14 @@
           <a:p>
             <a:r>
               <a:rPr lang="en-US" dirty="0"/>
-              <a:t/>
+              <a:t>ANGLE — Effective duration answers "what if the whole curve moves". Key rate duration answers the question anyone actually has: "what if only the long end moves".
+•  Mechanically identical to effective duration — bump ONE point on the curve, hold the rest, reprice
+•  Each of these three bonds is a zero, so its whole duration sits at a single tenor. That is why the individual columns are clean
+•  Portfolio column: weight × duration. 1.990 × 35.7% = 0.711. Do that one live
+•  The sum identity, Σ KRD = EffDur, is the check: 0.711 + 1.675 + 2.981 ≈ 5.368 (unrounded)
+•  Weights are market value again — equal PAR, unequal weights, see the footnote
+FROM THE DESK — Key rate durations are how a real portfolio expresses a curve view without taking a directional rates bet: match the index duration overall, but run +0.3 at the 2y and −0.3 at the 30y. Parallel moves wash out; a steepening pays.
+NEXT — Put a steepening scenario through it.</a:t>
             </a:r>
             <a:endParaRPr lang="en-US" dirty="0"/>
           </a:p>
@@ -3396,7 +3569,14 @@
           <a:p>
             <a:r>
               <a:rPr lang="en-US" dirty="0"/>
-              <a:t/>
+              <a:t>ANGLE — The trap on this slide is the exam answer, not the arithmetic: the curve rises at EVERY tenor, so the answer is not "rotate", it is "get out of both".
+•  Have them compute both lines before you reveal anything — 30 seconds, it is one multiplication each
+•  Then ask "so which do we sell?" and let the room say Bond B. Then show the CFA answer: both
+•  Why both: every point on the forecast curve is HIGHER. There is no tenor that pays here
+•  Bond B is worse only because 3.953 × 200 bp beats 2.702 × 150 bp — two effects compounding
+•  Contrast with §3: a portfolio duration would have applied ONE shift to both and mis-ranked them
+FROM THE DESK — A real desk would express this as a curve trade rather than a liquidation — short the 10y point, keep the 5y — but that is a relative-value view, and it only exists because you can see the exposures tenor by tenor.
+NEXT — Last problem: even the right duration is the wrong number when spreads move against the benchmark.</a:t>
             </a:r>
             <a:endParaRPr lang="en-US" dirty="0"/>
           </a:p>
@@ -3484,7 +3664,15 @@
           <a:p>
             <a:r>
               <a:rPr lang="en-US" dirty="0"/>
-              <a:t/>
+              <a:t>ANGLE — Every duration measure so far assumes benchmark yields and credit spreads are independent. In a crisis they are strongly NEGATIVELY correlated — and that is exactly when you need the number.
+•  Set up the mechanism: flight to quality → Treasuries rally AND credit spreads widen, simultaneously
+•  The high-yield bond therefore does NOT rally the way analytical duration says it should
+•  Empirical duration is a regression on realised returns, so it picks that relationship up automatically
+•  Rule of thumb: government bond → the two measures agree. Deep high yield → empirical is far lower
+•  Name the caveats: which factors, how long a window, and does the regime still hold
+FROM THE DESK — Push it far enough and the empirical duration of a stressed CCC bond goes to zero or negative — it trades like equity, not like a bond. That is when a duration-hedged credit book discovers its hedge was the position.
+ASK THE ROOM — You are long high-yield and short Treasury futures as a duration hedge. What happens to you in March 2020?
+NEXT — Recap — the whole duration family on one page.</a:t>
             </a:r>
             <a:endParaRPr lang="en-US" dirty="0"/>
           </a:p>
@@ -3572,7 +3760,14 @@
           <a:p>
             <a:r>
               <a:rPr lang="en-US" dirty="0"/>
-              <a:t/>
+              <a:t>ANGLE — Close on the decision tree, not the formulas: option-free → yield duration; embedded options → effective; curve view → key rate; credit in stress → empirical.
+•  Do not re-teach — read four of the eight and let them photograph the slide
+•  Force the two units answers: MacDur in years, ModDur in % per unit yield, PVBP in currency per bp
+•  Repeat the two error traps one last time: the ÷m on annualising, and the sign on −ModDur × Δy
+•  Say what carries into Deck 16: spread duration is the same machinery pointed at credit spreads
+•  Leave 5 minutes for questions — this deck always generates them
+FROM THE DESK — 2022 is the exam question nobody set: books whose duration was measured to three decimals and never felt. The number was right; the tolerance for it was not.
+NEXT — Deck 16 — credit risk and securitisation.</a:t>
             </a:r>
             <a:endParaRPr lang="en-US" dirty="0"/>
           </a:p>
@@ -3660,7 +3855,11 @@
           <a:p>
             <a:r>
               <a:rPr lang="en-US" dirty="0"/>
-              <a:t/>
+              <a:t>ANGLE — Divider. Before any formula, they must feel that two investors in the SAME bond can want opposite things from rates.
+•  ~30 minutes for this section, four content slides
+•  One-line set-up: "same bond, three investors, three different fears"
+•  Do not define duration yet — let it fall out of the horizon story
+NEXT — Start with the return decomposition.</a:t>
             </a:r>
             <a:endParaRPr lang="en-US" dirty="0"/>
           </a:p>
@@ -3748,7 +3947,15 @@
           <a:p>
             <a:r>
               <a:rPr lang="en-US" dirty="0"/>
-              <a:t/>
+              <a:t>ANGLE — Three sources, and only two of them are exposed to rates — but they are exposed in OPPOSITE directions. That tension is the whole section.
+•  Cover the formula first: it is just an IRR on total ending cash vs price paid
+•  Source 1 (the coupons themselves) is a credit question, not a rates question — park it
+•  Sources 2 and 3 both move with rates and they fight each other. Write ↑ and ↓ on the board
+•  Horizon yield ≠ YTM unless coupons reinvest at YTM AND you sell on the constant-yield trajectory
+•  Land it: interest rate risk is not "rates up = bad" — it depends entirely on when you need the money
+FROM THE DESK — Reinvestment risk is the leg that quietly disappears from most classroom models and most pitch books. In a real ALM or insurance book it is the dominant risk, because the liabilities run 20 years and the coupons have to be put somewhere every six months.
+ASK THE ROOM — Rates jump 100 bp tomorrow. Who in this room is happy — the pension fund or the hedge fund with a three-month view?
+NEXT — Take the extreme case first: hold to maturity, no sale, no price risk at all.</a:t>
             </a:r>
             <a:endParaRPr lang="en-US" dirty="0"/>
           </a:p>
@@ -3836,7 +4043,14 @@
           <a:p>
             <a:r>
               <a:rPr lang="en-US" dirty="0"/>
-              <a:t/>
+              <a:t>ANGLE — Buy-and-hold does not remove interest rate risk. It removes ONE of the two — and doubles your bet on the other.
+•  Set it up: VFO holds 10 years, so redemption is always 100. Only the FV of coupons moves
+•  Walk the +100 bp column live on the calculator: FV(7.2%, 10, 6.2) = 86.475
+•  Note the asymmetry: +23 bp of gain on the way up, −22 bp of pain on the way down
+•  Ask them to name the risk VFO still carries — reinvestment, and nothing else
+•  Footnote is worth 20 seconds: 20.493 of the 82.493 is interest-on-interest, not coupons
+FROM THE DESK — "Held to maturity so we are fine" is the most expensive sentence in fixed income. It is true for the redemption amount and false for everything you do with the coupons — which is exactly why insurers hedge reinvestment risk with forward-starting swaps.
+NEXT — Now change one thing only — the horizon — and the sign of the answer flips.</a:t>
             </a:r>
             <a:endParaRPr lang="en-US" dirty="0"/>
           </a:p>
@@ -3924,7 +4138,14 @@
           <a:p>
             <a:r>
               <a:rPr lang="en-US" dirty="0"/>
-              <a:t/>
+              <a:t>ANGLE — Same bond, same rate move, opposite outcome — because Baywhite has to sell into the price it created.
+•  Put VFO and Baywhite side by side on the board: +100 bp gives 6.43% vs 5.28%
+•  Force the comparison of magnitudes: reinvestment gain 0.406 vs capital loss 4.737 — 12× bigger
+•  Why? Four years of coupon interest-on-interest cannot outrun six years of remaining discounting
+•  Then flip it: −100 bp gives Baywhite 7.16%, better than the stable case. Price risk cuts both ways
+•  Do NOT say "duration" yet — but they should already be feeling that a horizon exists where these cancel
+ASK THE ROOM — At what horizon would the reinvestment gain exactly cancel the capital loss? Take a guess before we compute it.
+NEXT — That horizon has a name and a number. Meet the duration gap.</a:t>
             </a:r>
             <a:endParaRPr lang="en-US" dirty="0"/>
           </a:p>
@@ -4012,7 +4233,14 @@
           <a:p>
             <a:r>
               <a:rPr lang="en-US" dirty="0"/>
-              <a:t/>
+              <a:t>ANGLE — Macaulay duration is not introduced here as a formula — it is introduced as the ANSWER to the question the last two slides posed.
+•  Reveal: the BRWA bond has MacDur 7.7429y. Hightest chose 8y and got 6.20 / 6.24 / 6.17 across all three scenarios
+•  Sign rule, say it twice: gap POSITIVE (short horizon) → price risk → fear rising rates
+•  Gap NEGATIVE (long horizon) → reinvestment risk → fear falling rates
+•  Note it decays: as time passes BOTH horizon and MacDur fall, so the gap does not stay put
+•  Immunisation is a one-shot, one-parallel-shift result — flag the caveat now, revisit in §3
+FROM THE DESK — Every liability-driven mandate you will ever see is this slide industrialised. The pension fund does not want a view on rates; it wants duration gap ≈ 0 against its liability cash flows, and it rebalances quarterly because the gap drifts.
+NEXT — So we need to actually compute MacDur. Section 2.</a:t>
             </a:r>
             <a:endParaRPr lang="en-US" dirty="0"/>
           </a:p>
@@ -4100,7 +4328,12 @@
           <a:p>
             <a:r>
               <a:rPr lang="en-US" dirty="0"/>
-              <a:t/>
+              <a:t>ANGLE — Divider. The longest section — nine slides, four duration measures, one chain of conversions.
+•  Draw the chain on the board NOW and leave it up: MacDur → ModDur → MoneyDur → PVBP
+•  Each arrow is one operation: ÷(1+r), ×PV_full, ×0.0001
+•  Units change at every arrow: years → % per unit yield → currency → currency per bp
+•  ~40 minutes. Calculators out from here.
+NEXT — Start at the left of the chain — Macaulay.</a:t>
             </a:r>
             <a:endParaRPr lang="en-US" dirty="0"/>
           </a:p>
@@ -4938,7 +5171,7 @@
                 <a:ea typeface="Calibri" pitchFamily="34" charset="-122"/>
                 <a:cs typeface="Calibri" pitchFamily="34" charset="-120"/>
               </a:rPr>
-              <a:t>Source: CFA Institute, Curriculum Vol 6, Learning Module 10, §3 / Learning Module 11, §1, pp. 248–266.</a:t>
+              <a:t>Source: CFA Institute, Curriculum Vol 6, Learning Module 10, §4 "Macaulay Duration", Equation 2, pp. 251–255; zero-coupon and perpetual duration, Learning Module 11 §3, pp. 279–280.</a:t>
             </a:r>
             <a:endParaRPr lang="en-US" sz="750" dirty="0"/>
           </a:p>
@@ -5042,7 +5275,24 @@
                 <a:ea typeface="Consolas" pitchFamily="34" charset="-122"/>
                 <a:cs typeface="Consolas" pitchFamily="34" charset="-120"/>
               </a:rPr>
-              <a:t>MacDur  =  Σ  t × [ PV(CF_t) / PV_full ]           Annualised MacDur  =  MacDur / m</a:t>
+              <a:t>MacDur  =  Σ  t × [ PV(CF_t) / PV_full ]</a:t>
+            </a:r>
+            <a:endParaRPr lang="en-US" sz="1800" dirty="0"/>
+          </a:p>
+          <a:p>
+            <a:pPr algn="ctr" indent="0" marL="0">
+              <a:buNone/>
+            </a:pPr>
+            <a:r>
+              <a:rPr lang="en-US" sz="1800" b="1" dirty="0">
+                <a:solidFill>
+                  <a:srgbClr val="FFFFFF"/>
+                </a:solidFill>
+                <a:latin typeface="Consolas" pitchFamily="34" charset="0"/>
+                <a:ea typeface="Consolas" pitchFamily="34" charset="-122"/>
+                <a:cs typeface="Consolas" pitchFamily="34" charset="-120"/>
+              </a:rPr>
+              <a:t>Annualised MacDur  =  MacDur / m</a:t>
             </a:r>
             <a:endParaRPr lang="en-US" sz="1800" dirty="0"/>
           </a:p>
@@ -5084,7 +5334,7 @@
                 <a:ea typeface="Calibri" pitchFamily="34" charset="-122"/>
                 <a:cs typeface="Calibri" pitchFamily="34" charset="-120"/>
               </a:rPr>
-              <a:t>where: t = time to each cash flow in periods; PV(CF_t) = present value of that cash flow; PV_full = dirty price; m = coupon periods per year.</a:t>
+              <a:t>where: t = time to each cash flow, in periods; PV_full = full (dirty) price; m = coupon periods per year.</a:t>
             </a:r>
             <a:endParaRPr lang="en-US" sz="1100" dirty="0"/>
           </a:p>
@@ -5098,8 +5348,8 @@
         </p:nvSpPr>
         <p:spPr>
           <a:xfrm>
-            <a:off x="320040" y="2194560"/>
-            <a:ext cx="4160520" cy="2103120"/>
+            <a:off x="320040" y="2286000"/>
+            <a:ext cx="4160520" cy="2011680"/>
           </a:xfrm>
           <a:prstGeom prst="rect">
             <a:avLst/>
@@ -5118,8 +5368,8 @@
         </p:nvSpPr>
         <p:spPr>
           <a:xfrm>
-            <a:off x="320040" y="2194560"/>
-            <a:ext cx="73152" cy="2103120"/>
+            <a:off x="320040" y="2286000"/>
+            <a:ext cx="73152" cy="2011680"/>
           </a:xfrm>
           <a:prstGeom prst="rect">
             <a:avLst/>
@@ -5138,7 +5388,7 @@
         </p:nvSpPr>
         <p:spPr>
           <a:xfrm>
-            <a:off x="457200" y="2240280"/>
+            <a:off x="457200" y="2331720"/>
             <a:ext cx="3931920" cy="256032"/>
           </a:xfrm>
           <a:prstGeom prst="rect">
@@ -5180,8 +5430,8 @@
         </p:nvSpPr>
         <p:spPr>
           <a:xfrm>
-            <a:off x="457200" y="2514600"/>
-            <a:ext cx="3931920" cy="1737360"/>
+            <a:off x="457200" y="2606040"/>
+            <a:ext cx="3931920" cy="1645920"/>
           </a:xfrm>
           <a:prstGeom prst="rect">
             <a:avLst/>
@@ -5245,8 +5495,8 @@
         </p:nvSpPr>
         <p:spPr>
           <a:xfrm>
-            <a:off x="4663440" y="2194560"/>
-            <a:ext cx="4160520" cy="2103120"/>
+            <a:off x="4663440" y="2286000"/>
+            <a:ext cx="4160520" cy="2011680"/>
           </a:xfrm>
           <a:prstGeom prst="rect">
             <a:avLst/>
@@ -5265,8 +5515,8 @@
         </p:nvSpPr>
         <p:spPr>
           <a:xfrm>
-            <a:off x="4663440" y="2194560"/>
-            <a:ext cx="73152" cy="2103120"/>
+            <a:off x="4663440" y="2286000"/>
+            <a:ext cx="73152" cy="2011680"/>
           </a:xfrm>
           <a:prstGeom prst="rect">
             <a:avLst/>
@@ -5285,7 +5535,7 @@
         </p:nvSpPr>
         <p:spPr>
           <a:xfrm>
-            <a:off x="4800600" y="2240280"/>
+            <a:off x="4800600" y="2331720"/>
             <a:ext cx="3931920" cy="256032"/>
           </a:xfrm>
           <a:prstGeom prst="rect">
@@ -5327,8 +5577,8 @@
         </p:nvSpPr>
         <p:spPr>
           <a:xfrm>
-            <a:off x="4800600" y="2514600"/>
-            <a:ext cx="3931920" cy="1737360"/>
+            <a:off x="4800600" y="2606040"/>
+            <a:ext cx="3931920" cy="1645920"/>
           </a:xfrm>
           <a:prstGeom prst="rect">
             <a:avLst/>
@@ -5561,6 +5811,46 @@
         </p:nvSpPr>
         <p:spPr>
           <a:xfrm>
+            <a:off x="320040" y="4471416"/>
+            <a:ext cx="8503920" cy="192024"/>
+          </a:xfrm>
+          <a:prstGeom prst="rect">
+            <a:avLst/>
+          </a:prstGeom>
+          <a:noFill/>
+          <a:ln/>
+        </p:spPr>
+        <p:txBody>
+          <a:bodyPr wrap="square" lIns="254" tIns="254" rIns="254" bIns="254" rtlCol="0" anchor="t"/>
+          <a:lstStyle/>
+          <a:p>
+            <a:pPr indent="0" marL="0">
+              <a:buNone/>
+            </a:pPr>
+            <a:r>
+              <a:rPr lang="en-US" sz="1000" dirty="0">
+                <a:solidFill>
+                  <a:srgbClr val="6B7A8D"/>
+                </a:solidFill>
+                <a:latin typeface="Calibri" pitchFamily="34" charset="0"/>
+                <a:ea typeface="Calibri" pitchFamily="34" charset="-122"/>
+                <a:cs typeface="Calibri" pitchFamily="34" charset="-120"/>
+              </a:rPr>
+              <a:t>¹ Coupon effect, same bond otherwise: a 5y par bond with a 6.0% semi-annual coupon has MacDur 4.393y. Higher coupon, shorter duration.
+</a:t>
+            </a:r>
+            <a:endParaRPr lang="en-US" sz="1000" dirty="0"/>
+          </a:p>
+        </p:txBody>
+      </p:sp>
+      <p:sp>
+        <p:nvSpPr>
+          <p:cNvPr id="8" name="Text 6"/>
+          <p:cNvSpPr txBox="1"/>
+          <p:nvPr/>
+        </p:nvSpPr>
+        <p:spPr>
+          <a:xfrm>
             <a:off x="320040" y="4663440"/>
             <a:ext cx="8503920" cy="201168"/>
           </a:xfrm>
@@ -5589,7 +5879,7 @@
                 <a:ea typeface="Calibri" pitchFamily="34" charset="-122"/>
                 <a:cs typeface="Calibri" pitchFamily="34" charset="-120"/>
               </a:rPr>
-              <a:t>Source: CFA Institute, Curriculum Vol 6, Learning Module 11, Example 1, pp. 267–269.</a:t>
+              <a:t>Source: CFA Institute, Curriculum Vol 6, Learning Module 11, Example 1 "Modified Duration for the BRWA Bond", pp. 268–269.</a:t>
             </a:r>
             <a:endParaRPr lang="en-US" sz="750" dirty="0"/>
           </a:p>
@@ -5597,7 +5887,7 @@
       </p:sp>
       <p:sp>
         <p:nvSpPr>
-          <p:cNvPr id="8" name="Text 6"/>
+          <p:cNvPr id="9" name="Text 7"/>
           <p:cNvSpPr txBox="1"/>
           <p:nvPr/>
         </p:nvSpPr>
@@ -6680,14 +6970,14 @@
       </p:graphicFrame>
       <p:sp>
         <p:nvSpPr>
-          <p:cNvPr id="10" name="Shape 7"/>
+          <p:cNvPr id="11" name="Shape 8"/>
           <p:cNvSpPr/>
           <p:nvPr/>
         </p:nvSpPr>
         <p:spPr>
           <a:xfrm>
-            <a:off x="320040" y="2743200"/>
-            <a:ext cx="8503920" cy="1554480"/>
+            <a:off x="320040" y="2331720"/>
+            <a:ext cx="8503920" cy="1965960"/>
           </a:xfrm>
           <a:prstGeom prst="rect">
             <a:avLst/>
@@ -6705,13 +6995,13 @@
       </p:sp>
       <p:sp>
         <p:nvSpPr>
-          <p:cNvPr id="11" name="Text 8"/>
+          <p:cNvPr id="12" name="Text 9"/>
           <p:cNvSpPr txBox="1"/>
           <p:nvPr/>
         </p:nvSpPr>
         <p:spPr>
           <a:xfrm>
-            <a:off x="457200" y="2788920"/>
+            <a:off x="457200" y="2377440"/>
             <a:ext cx="8229600" cy="256032"/>
           </a:xfrm>
           <a:prstGeom prst="rect">
@@ -6747,13 +7037,13 @@
       </p:sp>
       <p:sp>
         <p:nvSpPr>
-          <p:cNvPr id="12" name="Text 9"/>
+          <p:cNvPr id="13" name="Text 10"/>
           <p:cNvSpPr txBox="1"/>
           <p:nvPr/>
         </p:nvSpPr>
         <p:spPr>
           <a:xfrm>
-            <a:off x="457200" y="3081528"/>
+            <a:off x="457200" y="2670048"/>
             <a:ext cx="8229600" cy="457200"/>
           </a:xfrm>
           <a:prstGeom prst="rect">
@@ -6789,14 +7079,14 @@
       </p:sp>
       <p:sp>
         <p:nvSpPr>
-          <p:cNvPr id="13" name="Text 10"/>
+          <p:cNvPr id="14" name="Text 11"/>
           <p:cNvSpPr txBox="1"/>
           <p:nvPr/>
         </p:nvSpPr>
         <p:spPr>
           <a:xfrm>
-            <a:off x="457200" y="3593592"/>
-            <a:ext cx="8229600" cy="274320"/>
+            <a:off x="457200" y="3182112"/>
+            <a:ext cx="8229600" cy="603504"/>
           </a:xfrm>
           <a:prstGeom prst="rect">
             <a:avLst/>
@@ -6818,7 +7108,7 @@
               <a:buNone/>
             </a:pPr>
             <a:r>
-              <a:rPr lang="en-US" sz="1050" b="1" dirty="0">
+              <a:rPr lang="en-US" sz="1100" b="1" dirty="0">
                 <a:solidFill>
                   <a:srgbClr val="1B2A4A"/>
                 </a:solidFill>
@@ -6835,7 +7125,7 @@
               <a:buNone/>
             </a:pPr>
             <a:r>
-              <a:rPr lang="en-US" sz="1050" dirty="0">
+              <a:rPr lang="en-US" sz="1100" dirty="0">
                 <a:solidFill>
                   <a:srgbClr val="334155"/>
                 </a:solidFill>
@@ -6853,7 +7143,7 @@
               <a:buNone/>
             </a:pPr>
             <a:r>
-              <a:rPr lang="en-US" sz="1050" b="1" dirty="0">
+              <a:rPr lang="en-US" sz="1100" b="1" dirty="0">
                 <a:solidFill>
                   <a:srgbClr val="1B2A4A"/>
                 </a:solidFill>
@@ -6870,7 +7160,7 @@
               <a:buNone/>
             </a:pPr>
             <a:r>
-              <a:rPr lang="en-US" sz="1050" dirty="0">
+              <a:rPr lang="en-US" sz="1100" dirty="0">
                 <a:solidFill>
                   <a:srgbClr val="334155"/>
                 </a:solidFill>
@@ -6888,7 +7178,7 @@
               <a:buNone/>
             </a:pPr>
             <a:r>
-              <a:rPr lang="en-US" sz="1050" b="1" dirty="0">
+              <a:rPr lang="en-US" sz="1100" b="1" dirty="0">
                 <a:solidFill>
                   <a:srgbClr val="1B2A4A"/>
                 </a:solidFill>
@@ -6905,7 +7195,7 @@
               <a:buNone/>
             </a:pPr>
             <a:r>
-              <a:rPr lang="en-US" sz="1050" dirty="0">
+              <a:rPr lang="en-US" sz="1100" dirty="0">
                 <a:solidFill>
                   <a:srgbClr val="334155"/>
                 </a:solidFill>
@@ -6913,15 +7203,15 @@
                 <a:ea typeface="Calibri" pitchFamily="34" charset="-122"/>
                 <a:cs typeface="Calibri" pitchFamily="34" charset="-120"/>
               </a:rPr>
-              <a:t>Sanity check: Macaulay duration of a 5y par bond is always a bit less than 5y — a 6% coupon par bond has MacDur ≈ 4.44y, lower-coupon 3.2% lands a bit higher (as expected).</a:t>
-            </a:r>
-            <a:endParaRPr lang="en-US" sz="1050" dirty="0"/>
-          </a:p>
-        </p:txBody>
-      </p:sp>
-      <p:sp>
-        <p:nvSpPr>
-          <p:cNvPr id="14" name="Shape 11"/>
+              <a:t>Sanity check: MacDur &lt; 5y because 13.3% of the price sits in coupons paid before maturity</a:t>
+            </a:r>
+            <a:endParaRPr lang="en-US" sz="1100" dirty="0"/>
+          </a:p>
+        </p:txBody>
+      </p:sp>
+      <p:sp>
+        <p:nvSpPr>
+          <p:cNvPr id="15" name="Shape 12"/>
           <p:cNvSpPr/>
           <p:nvPr/>
         </p:nvSpPr>
@@ -6941,7 +7231,7 @@
       </p:sp>
       <p:sp>
         <p:nvSpPr>
-          <p:cNvPr id="15" name="Text 12"/>
+          <p:cNvPr id="16" name="Text 13"/>
           <p:cNvSpPr txBox="1"/>
           <p:nvPr/>
         </p:nvSpPr>
@@ -6975,7 +7265,7 @@
                 <a:ea typeface="Consolas" pitchFamily="34" charset="-122"/>
                 <a:cs typeface="Consolas" pitchFamily="34" charset="-120"/>
               </a:rPr>
-              <a:t>Annualised Macaulay duration = 4.66 years.</a:t>
+              <a:t>Annualised Macaulay duration = 4.66 years (9.3203 semi-annual periods ÷ 2).</a:t>
             </a:r>
             <a:endParaRPr lang="en-US" sz="1150" dirty="0"/>
           </a:p>
@@ -7186,7 +7476,7 @@
                 <a:ea typeface="Calibri" pitchFamily="34" charset="-122"/>
                 <a:cs typeface="Calibri" pitchFamily="34" charset="-120"/>
               </a:rPr>
-              <a:t>Source: CFA Institute, Curriculum Vol 6, Learning Module 11, §2 "Modified Duration", pp. 266–272.</a:t>
+              <a:t>Source: CFA Institute, Curriculum Vol 6, Learning Module 11, §2 "Modified Duration", Equations 2–3, pp. 266–270.</a:t>
             </a:r>
             <a:endParaRPr lang="en-US" sz="750" dirty="0"/>
           </a:p>
@@ -7228,7 +7518,7 @@
                 <a:ea typeface="Calibri" pitchFamily="34" charset="-122"/>
                 <a:cs typeface="Calibri" pitchFamily="34" charset="-120"/>
               </a:rPr>
-              <a:t>Negative sign: price and yield move in opposite directions. Linear (tangent) approximation — accurate for small yield moves, off for large ones.</a:t>
+              <a:t>Duration is quoted as a POSITIVE number; the minus sign lives in the price-change formula. Linear (tangent) approximation — accurate for small yield moves, off for large ones.</a:t>
             </a:r>
             <a:endParaRPr lang="en-US" sz="1300" dirty="0"/>
           </a:p>
@@ -7290,7 +7580,24 @@
                 <a:ea typeface="Consolas" pitchFamily="34" charset="-122"/>
                 <a:cs typeface="Consolas" pitchFamily="34" charset="-120"/>
               </a:rPr>
-              <a:t>ModDur  =  MacDur / (1 + r)            %ΔPV_full  ≈  −AnnModDur × Δy</a:t>
+              <a:t>ModDur  =  MacDur / (1 + r)</a:t>
+            </a:r>
+            <a:endParaRPr lang="en-US" sz="1800" dirty="0"/>
+          </a:p>
+          <a:p>
+            <a:pPr algn="ctr" indent="0" marL="0">
+              <a:buNone/>
+            </a:pPr>
+            <a:r>
+              <a:rPr lang="en-US" sz="1800" b="1" dirty="0">
+                <a:solidFill>
+                  <a:srgbClr val="FFFFFF"/>
+                </a:solidFill>
+                <a:latin typeface="Consolas" pitchFamily="34" charset="0"/>
+                <a:ea typeface="Consolas" pitchFamily="34" charset="-122"/>
+                <a:cs typeface="Consolas" pitchFamily="34" charset="-120"/>
+              </a:rPr>
+              <a:t>%ΔPV_full  ≈  −AnnModDur × Δy</a:t>
             </a:r>
             <a:endParaRPr lang="en-US" sz="1800" dirty="0"/>
           </a:p>
@@ -7332,7 +7639,7 @@
                 <a:ea typeface="Calibri" pitchFamily="34" charset="-122"/>
                 <a:cs typeface="Calibri" pitchFamily="34" charset="-120"/>
               </a:rPr>
-              <a:t>where: r = yield per period; Δy = change in annualised YTM (decimal). Linear estimate: doubles the error for larger |Δy| because price-yield curve is convex.</a:t>
+              <a:t>where: r = yield PER PERIOD (0.032/2 = 1.6% here); annualise by dividing by m. The error grows with (Δy)², not with Δy.</a:t>
             </a:r>
             <a:endParaRPr lang="en-US" sz="1100" dirty="0"/>
           </a:p>
@@ -7881,7 +8188,7 @@
                 <a:ea typeface="Calibri" pitchFamily="34" charset="-122"/>
                 <a:cs typeface="Calibri" pitchFamily="34" charset="-120"/>
               </a:rPr>
-              <a:t>Source: CFA Institute, Curriculum Vol 6, Learning Module 11, §2 "Approximate Modified Duration", pp. 270–272.</a:t>
+              <a:t>Source: CFA Institute, Curriculum Vol 6, Learning Module 11, §2 "Approximate Modified Duration", Equation 4 and Example 2, pp. 270–272.</a:t>
             </a:r>
             <a:endParaRPr lang="en-US" sz="750" dirty="0"/>
           </a:p>
@@ -8173,7 +8480,7 @@
               <a:buNone/>
             </a:pPr>
             <a:r>
-              <a:rPr lang="en-US" sz="1100" b="1" dirty="0">
+              <a:rPr lang="en-US" sz="1150" b="1" dirty="0">
                 <a:solidFill>
                   <a:srgbClr val="1B2A4A"/>
                 </a:solidFill>
@@ -8190,7 +8497,7 @@
               <a:buNone/>
             </a:pPr>
             <a:r>
-              <a:rPr lang="en-US" sz="1100" dirty="0">
+              <a:rPr lang="en-US" sz="1150" dirty="0">
                 <a:solidFill>
                   <a:srgbClr val="334155"/>
                 </a:solidFill>
@@ -8208,7 +8515,7 @@
               <a:buNone/>
             </a:pPr>
             <a:r>
-              <a:rPr lang="en-US" sz="1100" b="1" dirty="0">
+              <a:rPr lang="en-US" sz="1150" b="1" dirty="0">
                 <a:solidFill>
                   <a:srgbClr val="1B2A4A"/>
                 </a:solidFill>
@@ -8225,7 +8532,7 @@
               <a:buNone/>
             </a:pPr>
             <a:r>
-              <a:rPr lang="en-US" sz="1100" dirty="0">
+              <a:rPr lang="en-US" sz="1150" dirty="0">
                 <a:solidFill>
                   <a:srgbClr val="334155"/>
                 </a:solidFill>
@@ -8243,7 +8550,7 @@
               <a:buNone/>
             </a:pPr>
             <a:r>
-              <a:rPr lang="en-US" sz="1100" b="1" dirty="0">
+              <a:rPr lang="en-US" sz="1150" b="1" dirty="0">
                 <a:solidFill>
                   <a:srgbClr val="1B2A4A"/>
                 </a:solidFill>
@@ -8260,7 +8567,7 @@
               <a:buNone/>
             </a:pPr>
             <a:r>
-              <a:rPr lang="en-US" sz="1100" dirty="0">
+              <a:rPr lang="en-US" sz="1150" dirty="0">
                 <a:solidFill>
                   <a:srgbClr val="334155"/>
                 </a:solidFill>
@@ -8268,44 +8575,9 @@
                 <a:ea typeface="Calibri" pitchFamily="34" charset="-122"/>
                 <a:cs typeface="Calibri" pitchFamily="34" charset="-120"/>
               </a:rPr>
-              <a:t>AnnModDur ≈ (100.229641 − 99.770965) / (2 × 0.0005 × 100.00)
-</a:t>
-            </a:r>
-            <a:pPr indent="0" marL="0">
-              <a:spcAft>
-                <a:spcPts val="200"/>
-              </a:spcAft>
-              <a:buNone/>
-            </a:pPr>
-            <a:r>
-              <a:rPr lang="en-US" sz="1100" b="1" dirty="0">
-                <a:solidFill>
-                  <a:srgbClr val="1B2A4A"/>
-                </a:solidFill>
-                <a:latin typeface="Calibri" pitchFamily="34" charset="0"/>
-                <a:ea typeface="Calibri" pitchFamily="34" charset="-122"/>
-                <a:cs typeface="Calibri" pitchFamily="34" charset="-120"/>
-              </a:rPr>
-              <a:t>4. </a:t>
-            </a:r>
-            <a:pPr indent="0" marL="0">
-              <a:spcAft>
-                <a:spcPts val="200"/>
-              </a:spcAft>
-              <a:buNone/>
-            </a:pPr>
-            <a:r>
-              <a:rPr lang="en-US" sz="1100" dirty="0">
-                <a:solidFill>
-                  <a:srgbClr val="334155"/>
-                </a:solidFill>
-                <a:latin typeface="Calibri" pitchFamily="34" charset="0"/>
-                <a:ea typeface="Calibri" pitchFamily="34" charset="-122"/>
-                <a:cs typeface="Calibri" pitchFamily="34" charset="-120"/>
-              </a:rPr>
-              <a:t>          = 0.458676 / 0.100000  =  4.58676</a:t>
-            </a:r>
-            <a:endParaRPr lang="en-US" sz="1100" dirty="0"/>
+              <a:t>AnnModDur ≈ (100.229641 − 99.770965) / (2 × 0.0005 × 100.00)  =  0.458676 / 0.100000  =  4.58676</a:t>
+            </a:r>
+            <a:endParaRPr lang="en-US" sz="1150" dirty="0"/>
           </a:p>
         </p:txBody>
       </p:sp>
@@ -8365,7 +8637,7 @@
                 <a:ea typeface="Consolas" pitchFamily="34" charset="-122"/>
                 <a:cs typeface="Consolas" pitchFamily="34" charset="-120"/>
               </a:rPr>
-              <a:t>Approximate AnnModDur = 4.587 — indistinguishable from the exact 4.58675 above.</a:t>
+              <a:t>Approximate AnnModDur = 4.5868 — matches the exact MacDur/(1+r)/m result to four decimals.</a:t>
             </a:r>
             <a:endParaRPr lang="en-US" sz="1150" dirty="0"/>
           </a:p>
@@ -8548,6 +8820,46 @@
         </p:nvSpPr>
         <p:spPr>
           <a:xfrm>
+            <a:off x="320040" y="4471416"/>
+            <a:ext cx="8503920" cy="192024"/>
+          </a:xfrm>
+          <a:prstGeom prst="rect">
+            <a:avLst/>
+          </a:prstGeom>
+          <a:noFill/>
+          <a:ln/>
+        </p:spPr>
+        <p:txBody>
+          <a:bodyPr wrap="square" lIns="254" tIns="254" rIns="254" bIns="254" rtlCol="0" anchor="t"/>
+          <a:lstStyle/>
+          <a:p>
+            <a:pPr indent="0" marL="0">
+              <a:buNone/>
+            </a:pPr>
+            <a:r>
+              <a:rPr lang="en-US" sz="1000" dirty="0">
+                <a:solidFill>
+                  <a:srgbClr val="6B7A8D"/>
+                </a:solidFill>
+                <a:latin typeface="Calibri" pitchFamily="34" charset="0"/>
+                <a:ea typeface="Calibri" pitchFamily="34" charset="-122"/>
+                <a:cs typeface="Calibri" pitchFamily="34" charset="-120"/>
+              </a:rPr>
+              <a:t>¹ MoneyDur inherits the unit of PV_full: 445.32 per 100 of par, or USD 445.3M on the position. Mixing the two is the classic units error.
+</a:t>
+            </a:r>
+            <a:endParaRPr lang="en-US" sz="1000" dirty="0"/>
+          </a:p>
+        </p:txBody>
+      </p:sp>
+      <p:sp>
+        <p:nvSpPr>
+          <p:cNvPr id="8" name="Text 6"/>
+          <p:cNvSpPr txBox="1"/>
+          <p:nvPr/>
+        </p:nvSpPr>
+        <p:spPr>
+          <a:xfrm>
             <a:off x="320040" y="4663440"/>
             <a:ext cx="8503920" cy="201168"/>
           </a:xfrm>
@@ -8576,7 +8888,7 @@
                 <a:ea typeface="Calibri" pitchFamily="34" charset="-122"/>
                 <a:cs typeface="Calibri" pitchFamily="34" charset="-120"/>
               </a:rPr>
-              <a:t>Source: CFA Institute, Curriculum Vol 6, Learning Module 11, §3 "Money Duration", pp. 278–284.</a:t>
+              <a:t>Source: CFA Institute, Curriculum Vol 6, Learning Module 11, §3 "Money Duration and Price Value of a Basis Point", Equations 6–7, p. 278.</a:t>
             </a:r>
             <a:endParaRPr lang="en-US" sz="750" dirty="0"/>
           </a:p>
@@ -8584,7 +8896,7 @@
       </p:sp>
       <p:sp>
         <p:nvSpPr>
-          <p:cNvPr id="8" name="Text 6"/>
+          <p:cNvPr id="9" name="Text 7"/>
           <p:cNvSpPr txBox="1"/>
           <p:nvPr/>
         </p:nvSpPr>
@@ -8626,7 +8938,7 @@
       </p:sp>
       <p:sp>
         <p:nvSpPr>
-          <p:cNvPr id="9" name="Shape 7"/>
+          <p:cNvPr id="10" name="Shape 8"/>
           <p:cNvSpPr/>
           <p:nvPr/>
         </p:nvSpPr>
@@ -8646,7 +8958,7 @@
       </p:sp>
       <p:sp>
         <p:nvSpPr>
-          <p:cNvPr id="10" name="Text 8"/>
+          <p:cNvPr id="11" name="Text 9"/>
           <p:cNvSpPr txBox="1"/>
           <p:nvPr/>
         </p:nvSpPr>
@@ -8680,15 +8992,32 @@
                 <a:ea typeface="Consolas" pitchFamily="34" charset="-122"/>
                 <a:cs typeface="Consolas" pitchFamily="34" charset="-120"/>
               </a:rPr>
-              <a:t>MoneyDur  =  AnnModDur × PV_full            ΔPV_full  ≈  −MoneyDur × Δy</a:t>
+              <a:t>MoneyDur  =  AnnModDur × PV_full</a:t>
             </a:r>
             <a:endParaRPr lang="en-US" sz="1800" dirty="0"/>
           </a:p>
-        </p:txBody>
-      </p:sp>
-      <p:sp>
-        <p:nvSpPr>
-          <p:cNvPr id="11" name="Text 9"/>
+          <a:p>
+            <a:pPr algn="ctr" indent="0" marL="0">
+              <a:buNone/>
+            </a:pPr>
+            <a:r>
+              <a:rPr lang="en-US" sz="1800" b="1" dirty="0">
+                <a:solidFill>
+                  <a:srgbClr val="FFFFFF"/>
+                </a:solidFill>
+                <a:latin typeface="Consolas" pitchFamily="34" charset="0"/>
+                <a:ea typeface="Consolas" pitchFamily="34" charset="-122"/>
+                <a:cs typeface="Consolas" pitchFamily="34" charset="-120"/>
+              </a:rPr>
+              <a:t>ΔPV_full  ≈  −MoneyDur × Δy</a:t>
+            </a:r>
+            <a:endParaRPr lang="en-US" sz="1800" dirty="0"/>
+          </a:p>
+        </p:txBody>
+      </p:sp>
+      <p:sp>
+        <p:nvSpPr>
+          <p:cNvPr id="12" name="Text 10"/>
           <p:cNvSpPr txBox="1"/>
           <p:nvPr/>
         </p:nvSpPr>
@@ -8730,7 +9059,7 @@
       </p:sp>
       <p:sp>
         <p:nvSpPr>
-          <p:cNvPr id="12" name="Shape 10"/>
+          <p:cNvPr id="13" name="Shape 11"/>
           <p:cNvSpPr/>
           <p:nvPr/>
         </p:nvSpPr>
@@ -8755,7 +9084,7 @@
       </p:sp>
       <p:sp>
         <p:nvSpPr>
-          <p:cNvPr id="13" name="Text 11"/>
+          <p:cNvPr id="14" name="Text 12"/>
           <p:cNvSpPr txBox="1"/>
           <p:nvPr/>
         </p:nvSpPr>
@@ -8797,7 +9126,7 @@
       </p:sp>
       <p:sp>
         <p:nvSpPr>
-          <p:cNvPr id="14" name="Text 12"/>
+          <p:cNvPr id="15" name="Text 13"/>
           <p:cNvSpPr txBox="1"/>
           <p:nvPr/>
         </p:nvSpPr>
@@ -8839,7 +9168,7 @@
       </p:sp>
       <p:sp>
         <p:nvSpPr>
-          <p:cNvPr id="15" name="Text 13"/>
+          <p:cNvPr id="16" name="Text 14"/>
           <p:cNvSpPr txBox="1"/>
           <p:nvPr/>
         </p:nvSpPr>
@@ -9006,7 +9335,7 @@
       </p:sp>
       <p:sp>
         <p:nvSpPr>
-          <p:cNvPr id="16" name="Shape 14"/>
+          <p:cNvPr id="17" name="Shape 15"/>
           <p:cNvSpPr/>
           <p:nvPr/>
         </p:nvSpPr>
@@ -9026,7 +9355,7 @@
       </p:sp>
       <p:sp>
         <p:nvSpPr>
-          <p:cNvPr id="17" name="Text 15"/>
+          <p:cNvPr id="18" name="Text 16"/>
           <p:cNvSpPr txBox="1"/>
           <p:nvPr/>
         </p:nvSpPr>
@@ -9268,7 +9597,7 @@
                 <a:ea typeface="Calibri" pitchFamily="34" charset="-122"/>
                 <a:cs typeface="Calibri" pitchFamily="34" charset="-120"/>
               </a:rPr>
-              <a:t>¹ Also called "PV01" and, in the US, "DV01" (dollar value of 1 bp). BPV (basis-point value) is the same as money duration × 0.0001.
+              <a:t>¹ Also called "PV01" and, in the US, "DV01" (dollar value of 1 bp). BPV (basis-point value) is money duration × 0.0001.
 </a:t>
             </a:r>
             <a:endParaRPr lang="en-US" sz="1000" dirty="0"/>
@@ -9311,7 +9640,7 @@
                 <a:ea typeface="Calibri" pitchFamily="34" charset="-122"/>
                 <a:cs typeface="Calibri" pitchFamily="34" charset="-120"/>
               </a:rPr>
-              <a:t>Source: CFA Institute, Curriculum Vol 6, Learning Module 11, §3 "Price Value of a Basis Point", pp. 278–284.</a:t>
+              <a:t>Source: CFA Institute, Curriculum Vol 6, Learning Module 11, §3 "Price Value of a Basis Point", Equation 8, pp. 278–279.</a:t>
             </a:r>
             <a:endParaRPr lang="en-US" sz="750" dirty="0"/>
           </a:p>
@@ -9415,7 +9744,24 @@
                 <a:ea typeface="Consolas" pitchFamily="34" charset="-122"/>
                 <a:cs typeface="Consolas" pitchFamily="34" charset="-120"/>
               </a:rPr>
-              <a:t>PVBP  =  (PV−  −  PV+)  /  2                 where PV± are full prices at YTM ∓ 1 bp</a:t>
+              <a:t>PVBP  =  (PV−  −  PV+)  /  2</a:t>
+            </a:r>
+            <a:endParaRPr lang="en-US" sz="1800" dirty="0"/>
+          </a:p>
+          <a:p>
+            <a:pPr algn="ctr" indent="0" marL="0">
+              <a:buNone/>
+            </a:pPr>
+            <a:r>
+              <a:rPr lang="en-US" sz="1800" b="1" dirty="0">
+                <a:solidFill>
+                  <a:srgbClr val="FFFFFF"/>
+                </a:solidFill>
+                <a:latin typeface="Consolas" pitchFamily="34" charset="0"/>
+                <a:ea typeface="Consolas" pitchFamily="34" charset="-122"/>
+                <a:cs typeface="Consolas" pitchFamily="34" charset="-120"/>
+              </a:rPr>
+              <a:t>where PV± are full prices at YTM ∓ 1 bp</a:t>
             </a:r>
             <a:endParaRPr lang="en-US" sz="1800" dirty="0"/>
           </a:p>
@@ -9698,7 +10044,7 @@
                 <a:ea typeface="Calibri" pitchFamily="34" charset="-122"/>
                 <a:cs typeface="Calibri" pitchFamily="34" charset="-120"/>
               </a:rPr>
-              <a:t>PVBP = (100.548465 − 100.459400) / 2 = 0.044532 per 100 par
+              <a:t>PVBP = (100.548465 − 100.459400) / 2 = 0.044532 per 100 of par
 </a:t>
             </a:r>
             <a:pPr indent="0" marL="0">
@@ -9733,7 +10079,7 @@
                 <a:ea typeface="Calibri" pitchFamily="34" charset="-122"/>
                 <a:cs typeface="Calibri" pitchFamily="34" charset="-120"/>
               </a:rPr>
-              <a:t>On USD 30M par: DV01 ≈ USD 30,000,000 × 0.000445 = USD 13,359</a:t>
+              <a:t>Scale to a position: USD 30M par × 0.044532 / 100 = USD 13,360 per bp</a:t>
             </a:r>
             <a:endParaRPr lang="en-US" sz="1100" dirty="0"/>
           </a:p>
@@ -9795,7 +10141,7 @@
                 <a:ea typeface="Consolas" pitchFamily="34" charset="-122"/>
                 <a:cs typeface="Consolas" pitchFamily="34" charset="-120"/>
               </a:rPr>
-              <a:t>PVBP = 0.0445 per 100 par. A single basis point is worth ~USD 13k on a USD 30M BRWA position.</a:t>
+              <a:t>PVBP = 0.0445 per 100 of par → DV01 ≈ USD 13.4k on a USD 30M par BRWA position.</a:t>
             </a:r>
             <a:endParaRPr lang="en-US" sz="1150" dirty="0"/>
           </a:p>
@@ -9978,6 +10324,46 @@
         </p:nvSpPr>
         <p:spPr>
           <a:xfrm>
+            <a:off x="320040" y="4471416"/>
+            <a:ext cx="8503920" cy="192024"/>
+          </a:xfrm>
+          <a:prstGeom prst="rect">
+            <a:avLst/>
+          </a:prstGeom>
+          <a:noFill/>
+          <a:ln/>
+        </p:spPr>
+        <p:txBody>
+          <a:bodyPr wrap="square" lIns="254" tIns="254" rIns="254" bIns="254" rtlCol="0" anchor="t"/>
+          <a:lstStyle/>
+          <a:p>
+            <a:pPr indent="0" marL="0">
+              <a:buNone/>
+            </a:pPr>
+            <a:r>
+              <a:rPr lang="en-US" sz="1000" dirty="0">
+                <a:solidFill>
+                  <a:srgbClr val="6B7A8D"/>
+                </a:solidFill>
+                <a:latin typeface="Calibri" pitchFamily="34" charset="0"/>
+                <a:ea typeface="Calibri" pitchFamily="34" charset="-122"/>
+                <a:cs typeface="Calibri" pitchFamily="34" charset="-120"/>
+              </a:rPr>
+              <a:t>¹ Duration is not static: it falls smoothly through the coupon period, then jumps up on the coupon date — the "saw-tooth" of LM 11 Exhibit 6, p. 286.
+</a:t>
+            </a:r>
+            <a:endParaRPr lang="en-US" sz="1000" dirty="0"/>
+          </a:p>
+        </p:txBody>
+      </p:sp>
+      <p:sp>
+        <p:nvSpPr>
+          <p:cNvPr id="8" name="Text 6"/>
+          <p:cNvSpPr txBox="1"/>
+          <p:nvPr/>
+        </p:nvSpPr>
+        <p:spPr>
+          <a:xfrm>
             <a:off x="320040" y="4663440"/>
             <a:ext cx="8503920" cy="201168"/>
           </a:xfrm>
@@ -10006,7 +10392,7 @@
                 <a:ea typeface="Calibri" pitchFamily="34" charset="-122"/>
                 <a:cs typeface="Calibri" pitchFamily="34" charset="-120"/>
               </a:rPr>
-              <a:t>Source: CFA Institute, Curriculum Vol 6, Learning Module 11, §4 "Properties of Duration", pp. 284–288.</a:t>
+              <a:t>Source: CFA Institute, Curriculum Vol 6, Learning Module 11, §4 "Properties of Duration", Exhibit 4, pp. 284–286.</a:t>
             </a:r>
             <a:endParaRPr lang="en-US" sz="750" dirty="0"/>
           </a:p>
@@ -10014,7 +10400,7 @@
       </p:sp>
       <p:sp>
         <p:nvSpPr>
-          <p:cNvPr id="8" name="Text 6"/>
+          <p:cNvPr id="9" name="Text 7"/>
           <p:cNvSpPr txBox="1"/>
           <p:nvPr/>
         </p:nvSpPr>
@@ -10077,10 +10463,10 @@
             <a:tbl>
               <a:tblPr/>
               <a:tblGrid>
-                <a:gridCol w="2560320"/>
-                <a:gridCol w="1188720"/>
-                <a:gridCol w="2011680"/>
-                <a:gridCol w="2743200"/>
+                <a:gridCol w="1920240"/>
+                <a:gridCol w="822960"/>
+                <a:gridCol w="1463040"/>
+                <a:gridCol w="4297680"/>
               </a:tblGrid>
               <a:tr h="274320">
                 <a:tc>
@@ -10200,7 +10586,7 @@
                           <a:ea typeface="Trebuchet MS" pitchFamily="34" charset="-122"/>
                           <a:cs typeface="Trebuchet MS" pitchFamily="34" charset="-120"/>
                         </a:rPr>
-                        <a:t>Effect on duration</a:t>
+                        <a:t>Effect</a:t>
                       </a:r>
                       <a:endParaRPr lang="en-US" sz="1100" dirty="0">
                         <a:latin typeface="Trebuchet MS" charset="0"/>
@@ -10452,7 +10838,7 @@
                           <a:ea typeface="Consolas" pitchFamily="34" charset="-122"/>
                           <a:cs typeface="Consolas" pitchFamily="34" charset="-120"/>
                         </a:rPr>
-                        <a:t>Higher early cash flows pull the PV-weighted average time shorter</a:t>
+                        <a:t>Early cash flows pull the average time in</a:t>
                       </a:r>
                       <a:endParaRPr lang="en-US" sz="1100" dirty="0">
                         <a:latin typeface="Consolas" charset="0"/>
@@ -10654,7 +11040,7 @@
                           <a:ea typeface="Consolas" pitchFamily="34" charset="-122"/>
                           <a:cs typeface="Consolas" pitchFamily="34" charset="-120"/>
                         </a:rPr>
-                        <a:t>Higher discount rate deflates distant cash flows more → weights shift to near term</a:t>
+                        <a:t>Distant flows deflate more; weight moves near</a:t>
                       </a:r>
                       <a:endParaRPr lang="en-US" sz="1100" dirty="0">
                         <a:latin typeface="Consolas" charset="0"/>
@@ -10806,7 +11192,7 @@
                           <a:ea typeface="Consolas" pitchFamily="34" charset="-122"/>
                           <a:cs typeface="Consolas" pitchFamily="34" charset="-120"/>
                         </a:rPr>
-                        <a:t>Duration ↑ (par/premium)</a:t>
+                        <a:t>Duration ↑ *</a:t>
                       </a:r>
                       <a:endParaRPr lang="en-US" sz="1100" dirty="0">
                         <a:latin typeface="Consolas" charset="0"/>
@@ -10856,7 +11242,7 @@
                           <a:ea typeface="Consolas" pitchFamily="34" charset="-122"/>
                           <a:cs typeface="Consolas" pitchFamily="34" charset="-120"/>
                         </a:rPr>
-                        <a:t>Longer life = more distant cash flows with meaningful weight (discount bonds can invert at very long T)</a:t>
+                        <a:t>The par payment sits further out</a:t>
                       </a:r>
                       <a:endParaRPr lang="en-US" sz="1100" dirty="0">
                         <a:latin typeface="Consolas" charset="0"/>
@@ -10908,7 +11294,7 @@
                           <a:ea typeface="Calibri" pitchFamily="34" charset="-122"/>
                           <a:cs typeface="Calibri" pitchFamily="34" charset="-120"/>
                         </a:rPr>
-                        <a:t>Time elapsed in coupon period t/T</a:t>
+                        <a:t>Time elapsed, t/T</a:t>
                       </a:r>
                       <a:endParaRPr lang="en-US" sz="1100" dirty="0">
                         <a:latin typeface="Calibri" charset="0"/>
@@ -11058,7 +11444,7 @@
                           <a:ea typeface="Consolas" pitchFamily="34" charset="-122"/>
                           <a:cs typeface="Consolas" pitchFamily="34" charset="-120"/>
                         </a:rPr>
-                        <a:t>Each day closer to the next coupon shortens the weighted average</a:t>
+                        <a:t>Each day, the next coupon is one day closer</a:t>
                       </a:r>
                       <a:endParaRPr lang="en-US" sz="1100" dirty="0">
                         <a:latin typeface="Consolas" charset="0"/>
@@ -11098,14 +11484,14 @@
       </p:graphicFrame>
       <p:sp>
         <p:nvSpPr>
-          <p:cNvPr id="10" name="Shape 7"/>
+          <p:cNvPr id="11" name="Shape 8"/>
           <p:cNvSpPr/>
           <p:nvPr/>
         </p:nvSpPr>
         <p:spPr>
           <a:xfrm>
-            <a:off x="320040" y="3429000"/>
-            <a:ext cx="8503920" cy="914400"/>
+            <a:off x="320040" y="3017520"/>
+            <a:ext cx="8503920" cy="1143000"/>
           </a:xfrm>
           <a:prstGeom prst="rect">
             <a:avLst/>
@@ -11118,14 +11504,14 @@
       </p:sp>
       <p:sp>
         <p:nvSpPr>
-          <p:cNvPr id="11" name="Shape 8"/>
+          <p:cNvPr id="12" name="Shape 9"/>
           <p:cNvSpPr/>
           <p:nvPr/>
         </p:nvSpPr>
         <p:spPr>
           <a:xfrm>
-            <a:off x="320040" y="3429000"/>
-            <a:ext cx="73152" cy="914400"/>
+            <a:off x="320040" y="3017520"/>
+            <a:ext cx="73152" cy="1143000"/>
           </a:xfrm>
           <a:prstGeom prst="rect">
             <a:avLst/>
@@ -11138,13 +11524,13 @@
       </p:sp>
       <p:sp>
         <p:nvSpPr>
-          <p:cNvPr id="12" name="Text 9"/>
+          <p:cNvPr id="13" name="Text 10"/>
           <p:cNvSpPr txBox="1"/>
           <p:nvPr/>
         </p:nvSpPr>
         <p:spPr>
           <a:xfrm>
-            <a:off x="457200" y="3474720"/>
+            <a:off x="457200" y="3063240"/>
             <a:ext cx="8275320" cy="256032"/>
           </a:xfrm>
           <a:prstGeom prst="rect">
@@ -11172,7 +11558,7 @@
                 <a:ea typeface="Trebuchet MS" pitchFamily="34" charset="-122"/>
                 <a:cs typeface="Trebuchet MS" pitchFamily="34" charset="-120"/>
               </a:rPr>
-              <a:t>RANKING RULE OF THUMB</a:t>
+              <a:t>RANKING RULE OF THUMB — AND THE ONE EXCEPTION (*)</a:t>
             </a:r>
             <a:endParaRPr lang="en-US" sz="1100" dirty="0"/>
           </a:p>
@@ -11180,14 +11566,14 @@
       </p:sp>
       <p:sp>
         <p:nvSpPr>
-          <p:cNvPr id="13" name="Text 10"/>
+          <p:cNvPr id="14" name="Text 11"/>
           <p:cNvSpPr txBox="1"/>
           <p:nvPr/>
         </p:nvSpPr>
         <p:spPr>
           <a:xfrm>
-            <a:off x="457200" y="3749040"/>
-            <a:ext cx="8275320" cy="548640"/>
+            <a:off x="457200" y="3337560"/>
+            <a:ext cx="8275320" cy="777240"/>
           </a:xfrm>
           <a:prstGeom prst="rect">
             <a:avLst/>
@@ -11214,7 +11600,7 @@
                 <a:ea typeface="Calibri" pitchFamily="34" charset="-122"/>
                 <a:cs typeface="Calibri" pitchFamily="34" charset="-120"/>
               </a:rPr>
-              <a:t>For two otherwise identical bonds: lower coupon → higher duration; lower yield → higher duration; longer maturity → higher duration (except deep-discount long bonds). Combine these and rank without a calculator.</a:t>
+              <a:t>For two otherwise identical bonds: lower coupon → higher duration; lower yield → higher duration; longer maturity → higher duration. The exception: for a DEEP-DISCOUNT bond (c well below r) at very long maturity, MacDur passes (1+r)/r, peaks, then FALLS — so a 100-year discount bond can carry less rate risk than a 30-year one.</a:t>
             </a:r>
             <a:endParaRPr lang="en-US" sz="1200" dirty="0"/>
           </a:p>
@@ -11425,7 +11811,7 @@
                 <a:ea typeface="Calibri" pitchFamily="34" charset="-122"/>
                 <a:cs typeface="Calibri" pitchFamily="34" charset="-120"/>
               </a:rPr>
-              <a:t>Source: CFA Institute, Curriculum Vol 6, Learning Module 11, Exhibit 5 "Properties of Macaulay Duration", p. 285.</a:t>
+              <a:t>Source: CFA Institute, Curriculum Vol 6, Learning Module 11, Exhibit 5 "Properties of Macaulay Duration", p. 285. Curves computed from the closed-form Macaulay equation, LM 10 Equation 3, p. 254.</a:t>
             </a:r>
             <a:endParaRPr lang="en-US" sz="750" dirty="0"/>
           </a:p>
@@ -11467,7 +11853,7 @@
                 <a:ea typeface="Calibri" pitchFamily="34" charset="-122"/>
                 <a:cs typeface="Calibri" pitchFamily="34" charset="-120"/>
               </a:rPr>
-              <a:t>All three curves share a 5% YTM. Par bond (c = r = 5%) sits between the two. At long maturities the curves asymptote toward (1+r)/r = 21y for 5% YTM.</a:t>
+              <a:t>All three curves share a 5% YTM; the par bond (c = r = 5%) sits between the other two. Plotted in MODIFIED duration, so the long-maturity ceiling is 1/r = 20y, not the Macaulay ceiling (1+r)/r = 21y.</a:t>
             </a:r>
             <a:endParaRPr lang="en-US" sz="1300" dirty="0"/>
           </a:p>
@@ -11481,7 +11867,7 @@
         </p:nvSpPr>
         <p:spPr>
           <a:xfrm>
-            <a:off x="320040" y="1188720"/>
+            <a:off x="320040" y="1170432"/>
             <a:ext cx="8503920" cy="256032"/>
           </a:xfrm>
           <a:prstGeom prst="rect">
@@ -11522,8 +11908,8 @@
           <p:nvPr/>
         </p:nvGraphicFramePr>
         <p:xfrm>
-          <a:off x="320040" y="1463040"/>
-          <a:ext cx="8503920" cy="2468880"/>
+          <a:off x="320040" y="1444752"/>
+          <a:ext cx="8503920" cy="2194560"/>
         </p:xfrm>
         <a:graphic xmlns:a="http://schemas.openxmlformats.org/drawingml/2006/main">
           <a:graphicData uri="http://schemas.openxmlformats.org/drawingml/2006/chart">
@@ -11539,8 +11925,8 @@
         </p:nvSpPr>
         <p:spPr>
           <a:xfrm>
-            <a:off x="320040" y="4069080"/>
-            <a:ext cx="8503920" cy="411480"/>
+            <a:off x="320040" y="3730752"/>
+            <a:ext cx="8503920" cy="658368"/>
           </a:xfrm>
           <a:prstGeom prst="rect">
             <a:avLst/>
@@ -11559,8 +11945,8 @@
         </p:nvSpPr>
         <p:spPr>
           <a:xfrm>
-            <a:off x="320040" y="4069080"/>
-            <a:ext cx="73152" cy="411480"/>
+            <a:off x="320040" y="3730752"/>
+            <a:ext cx="73152" cy="658368"/>
           </a:xfrm>
           <a:prstGeom prst="rect">
             <a:avLst/>
@@ -11579,7 +11965,7 @@
         </p:nvSpPr>
         <p:spPr>
           <a:xfrm>
-            <a:off x="457200" y="4114800"/>
+            <a:off x="457200" y="3776472"/>
             <a:ext cx="8275320" cy="256032"/>
           </a:xfrm>
           <a:prstGeom prst="rect">
@@ -11621,8 +12007,8 @@
         </p:nvSpPr>
         <p:spPr>
           <a:xfrm>
-            <a:off x="457200" y="4389120"/>
-            <a:ext cx="8275320" cy="45720"/>
+            <a:off x="457200" y="4050792"/>
+            <a:ext cx="8275320" cy="292608"/>
           </a:xfrm>
           <a:prstGeom prst="rect">
             <a:avLst/>
@@ -11649,7 +12035,7 @@
                 <a:ea typeface="Calibri" pitchFamily="34" charset="-122"/>
                 <a:cs typeface="Calibri" pitchFamily="34" charset="-120"/>
               </a:rPr>
-              <a:t>At any given maturity, lower-coupon bond sits above — confirming the coupon effect. All three curves converge toward (1+r)/r = 21y as maturity extends.</a:t>
+              <a:t>At every maturity the lower-coupon curve sits above — that is the coupon effect. All three flatten toward the perpetuity ceiling, 1/r = 20 years.</a:t>
             </a:r>
             <a:endParaRPr lang="en-US" sz="1200" dirty="0"/>
           </a:p>
@@ -11832,6 +12218,46 @@
         </p:nvSpPr>
         <p:spPr>
           <a:xfrm>
+            <a:off x="320040" y="4471416"/>
+            <a:ext cx="8503920" cy="192024"/>
+          </a:xfrm>
+          <a:prstGeom prst="rect">
+            <a:avLst/>
+          </a:prstGeom>
+          <a:noFill/>
+          <a:ln/>
+        </p:spPr>
+        <p:txBody>
+          <a:bodyPr wrap="square" lIns="254" tIns="254" rIns="254" bIns="254" rtlCol="0" anchor="t"/>
+          <a:lstStyle/>
+          <a:p>
+            <a:pPr indent="0" marL="0">
+              <a:buNone/>
+            </a:pPr>
+            <a:r>
+              <a:rPr lang="en-US" sz="1000" dirty="0">
+                <a:solidFill>
+                  <a:srgbClr val="6B7A8D"/>
+                </a:solidFill>
+                <a:latin typeface="Calibri" pitchFamily="34" charset="0"/>
+                <a:ea typeface="Calibri" pitchFamily="34" charset="-122"/>
+                <a:cs typeface="Calibri" pitchFamily="34" charset="-120"/>
+              </a:rPr>
+              <a:t>¹ Loss = MoneyDur × Δy × (par / 100): 437.054 × 0.01 × 300,000 = USD 1,311,163. The per-100 scaling is where this calculation usually breaks.
+</a:t>
+            </a:r>
+            <a:endParaRPr lang="en-US" sz="1000" dirty="0"/>
+          </a:p>
+        </p:txBody>
+      </p:sp>
+      <p:sp>
+        <p:nvSpPr>
+          <p:cNvPr id="8" name="Text 6"/>
+          <p:cNvSpPr txBox="1"/>
+          <p:nvPr/>
+        </p:nvSpPr>
+        <p:spPr>
+          <a:xfrm>
             <a:off x="320040" y="4663440"/>
             <a:ext cx="8503920" cy="201168"/>
           </a:xfrm>
@@ -11860,7 +12286,7 @@
                 <a:ea typeface="Calibri" pitchFamily="34" charset="-122"/>
                 <a:cs typeface="Calibri" pitchFamily="34" charset="-120"/>
               </a:rPr>
-              <a:t>Source: CFA Institute, Curriculum Vol 6, Learning Module 11, §3 Question Set, pp. 281–284.</a:t>
+              <a:t>Source: CFA Institute, Curriculum Vol 6, Learning Module 11, §3 Question Set (Chowdhury), pp. 281–284.</a:t>
             </a:r>
             <a:endParaRPr lang="en-US" sz="750" dirty="0"/>
           </a:p>
@@ -11868,7 +12294,7 @@
       </p:sp>
       <p:sp>
         <p:nvSpPr>
-          <p:cNvPr id="8" name="Text 6"/>
+          <p:cNvPr id="9" name="Text 7"/>
           <p:cNvSpPr txBox="1"/>
           <p:nvPr/>
         </p:nvSpPr>
@@ -13356,14 +13782,14 @@
       </p:graphicFrame>
       <p:sp>
         <p:nvSpPr>
-          <p:cNvPr id="10" name="Shape 7"/>
+          <p:cNvPr id="11" name="Shape 8"/>
           <p:cNvSpPr/>
           <p:nvPr/>
         </p:nvSpPr>
         <p:spPr>
           <a:xfrm>
             <a:off x="320040" y="3657600"/>
-            <a:ext cx="8503920" cy="777240"/>
+            <a:ext cx="8503920" cy="731520"/>
           </a:xfrm>
           <a:prstGeom prst="rect">
             <a:avLst/>
@@ -13376,14 +13802,14 @@
       </p:sp>
       <p:sp>
         <p:nvSpPr>
-          <p:cNvPr id="11" name="Shape 8"/>
+          <p:cNvPr id="12" name="Shape 9"/>
           <p:cNvSpPr/>
           <p:nvPr/>
         </p:nvSpPr>
         <p:spPr>
           <a:xfrm>
             <a:off x="320040" y="3657600"/>
-            <a:ext cx="73152" cy="777240"/>
+            <a:ext cx="73152" cy="731520"/>
           </a:xfrm>
           <a:prstGeom prst="rect">
             <a:avLst/>
@@ -13396,7 +13822,7 @@
       </p:sp>
       <p:sp>
         <p:nvSpPr>
-          <p:cNvPr id="12" name="Text 9"/>
+          <p:cNvPr id="13" name="Text 10"/>
           <p:cNvSpPr txBox="1"/>
           <p:nvPr/>
         </p:nvSpPr>
@@ -13430,7 +13856,7 @@
                 <a:ea typeface="Trebuchet MS" pitchFamily="34" charset="-122"/>
                 <a:cs typeface="Trebuchet MS" pitchFamily="34" charset="-120"/>
               </a:rPr>
-              <a:t>WHY THE ROMANIAN LOSS IS 24× LARGER</a:t>
+              <a:t>WHY THE ROMANIAN LOSS IS 24× THE AUSTRALIAN</a:t>
             </a:r>
             <a:endParaRPr lang="en-US" sz="1100" dirty="0"/>
           </a:p>
@@ -13438,14 +13864,14 @@
       </p:sp>
       <p:sp>
         <p:nvSpPr>
-          <p:cNvPr id="13" name="Text 10"/>
+          <p:cNvPr id="14" name="Text 11"/>
           <p:cNvSpPr txBox="1"/>
           <p:nvPr/>
         </p:nvSpPr>
         <p:spPr>
           <a:xfrm>
             <a:off x="457200" y="3977640"/>
-            <a:ext cx="8275320" cy="411480"/>
+            <a:ext cx="8275320" cy="365760"/>
           </a:xfrm>
           <a:prstGeom prst="rect">
             <a:avLst/>
@@ -13472,7 +13898,7 @@
                 <a:ea typeface="Calibri" pitchFamily="34" charset="-122"/>
                 <a:cs typeface="Calibri" pitchFamily="34" charset="-120"/>
               </a:rPr>
-              <a:t>MV difference is only ~8%; the driver is modified duration (16.25 vs 0.74). Investor expecting rates to rise would underweight the Romanian; expecting rates to fall, overweight it.</a:t>
+              <a:t>The three positions differ in market value by only ~8%. The loss ratio is 24× because it is driven almost entirely by modified duration (16.25 vs 0.74). Expecting rates to rise, underweight the Romanian; expecting them to fall, overweight it.</a:t>
             </a:r>
             <a:endParaRPr lang="en-US" sz="1200" dirty="0"/>
           </a:p>
@@ -14575,7 +15001,7 @@
                 <a:ea typeface="Calibri" pitchFamily="34" charset="-122"/>
                 <a:cs typeface="Calibri" pitchFamily="34" charset="-120"/>
               </a:rPr>
-              <a:t>callables need effective duration · Viviyu negative convexity · key rate duration for curve shape · empirical vs analytical</a:t>
+              <a:t>callables need effective duration · negative convexity · key rate duration for curve shape · empirical vs analytical</a:t>
             </a:r>
             <a:endParaRPr lang="en-US" sz="1100" dirty="0"/>
           </a:p>
@@ -14758,6 +15184,46 @@
         </p:nvSpPr>
         <p:spPr>
           <a:xfrm>
+            <a:off x="320040" y="4471416"/>
+            <a:ext cx="8503920" cy="192024"/>
+          </a:xfrm>
+          <a:prstGeom prst="rect">
+            <a:avLst/>
+          </a:prstGeom>
+          <a:noFill/>
+          <a:ln/>
+        </p:spPr>
+        <p:txBody>
+          <a:bodyPr wrap="square" lIns="254" tIns="254" rIns="254" bIns="254" rtlCol="0" anchor="t"/>
+          <a:lstStyle/>
+          <a:p>
+            <a:pPr indent="0" marL="0">
+              <a:buNone/>
+            </a:pPr>
+            <a:r>
+              <a:rPr lang="en-US" sz="1000" dirty="0">
+                <a:solidFill>
+                  <a:srgbClr val="6B7A8D"/>
+                </a:solidFill>
+                <a:latin typeface="Calibri" pitchFamily="34" charset="0"/>
+                <a:ea typeface="Calibri" pitchFamily="34" charset="-122"/>
+                <a:cs typeface="Calibri" pitchFamily="34" charset="-120"/>
+              </a:rPr>
+              <a:t>¹ Same price, maturity, YTM and duration: the more convex bond wins in BOTH directions — which is why convexity is priced, not free (Exhibit 3, p. 300).
+</a:t>
+            </a:r>
+            <a:endParaRPr lang="en-US" sz="1000" dirty="0"/>
+          </a:p>
+        </p:txBody>
+      </p:sp>
+      <p:sp>
+        <p:nvSpPr>
+          <p:cNvPr id="8" name="Text 6"/>
+          <p:cNvSpPr txBox="1"/>
+          <p:nvPr/>
+        </p:nvSpPr>
+        <p:spPr>
+          <a:xfrm>
             <a:off x="320040" y="4663440"/>
             <a:ext cx="8503920" cy="201168"/>
           </a:xfrm>
@@ -14786,7 +15252,7 @@
                 <a:ea typeface="Calibri" pitchFamily="34" charset="-122"/>
                 <a:cs typeface="Calibri" pitchFamily="34" charset="-120"/>
               </a:rPr>
-              <a:t>Source: CFA Institute, Curriculum Vol 6, Learning Module 12, §2 "Bond Convexity", pp. 297–303.</a:t>
+              <a:t>Source: CFA Institute, Curriculum Vol 6, Learning Module 12, §2 "Bond Convexity and Convexity Adjustment", Exhibits 1 and 3, pp. 297–300.</a:t>
             </a:r>
             <a:endParaRPr lang="en-US" sz="750" dirty="0"/>
           </a:p>
@@ -14794,7 +15260,7 @@
       </p:sp>
       <p:sp>
         <p:nvSpPr>
-          <p:cNvPr id="8" name="Text 6"/>
+          <p:cNvPr id="9" name="Text 7"/>
           <p:cNvSpPr txBox="1"/>
           <p:nvPr/>
         </p:nvSpPr>
@@ -14836,14 +15302,14 @@
       </p:sp>
       <p:sp>
         <p:nvSpPr>
-          <p:cNvPr id="9" name="Shape 7"/>
+          <p:cNvPr id="10" name="Shape 8"/>
           <p:cNvSpPr/>
           <p:nvPr/>
         </p:nvSpPr>
         <p:spPr>
           <a:xfrm>
             <a:off x="320040" y="1188720"/>
-            <a:ext cx="4160520" cy="3108960"/>
+            <a:ext cx="4160520" cy="1965960"/>
           </a:xfrm>
           <a:prstGeom prst="rect">
             <a:avLst/>
@@ -14856,14 +15322,14 @@
       </p:sp>
       <p:sp>
         <p:nvSpPr>
-          <p:cNvPr id="10" name="Shape 8"/>
+          <p:cNvPr id="11" name="Shape 9"/>
           <p:cNvSpPr/>
           <p:nvPr/>
         </p:nvSpPr>
         <p:spPr>
           <a:xfrm>
             <a:off x="320040" y="1188720"/>
-            <a:ext cx="73152" cy="3108960"/>
+            <a:ext cx="73152" cy="1965960"/>
           </a:xfrm>
           <a:prstGeom prst="rect">
             <a:avLst/>
@@ -14876,7 +15342,7 @@
       </p:sp>
       <p:sp>
         <p:nvSpPr>
-          <p:cNvPr id="11" name="Text 9"/>
+          <p:cNvPr id="12" name="Text 10"/>
           <p:cNvSpPr txBox="1"/>
           <p:nvPr/>
         </p:nvSpPr>
@@ -14918,14 +15384,14 @@
       </p:sp>
       <p:sp>
         <p:nvSpPr>
-          <p:cNvPr id="12" name="Text 10"/>
+          <p:cNvPr id="13" name="Text 11"/>
           <p:cNvSpPr txBox="1"/>
           <p:nvPr/>
         </p:nvSpPr>
         <p:spPr>
           <a:xfrm>
             <a:off x="457200" y="1508760"/>
-            <a:ext cx="3931920" cy="2743200"/>
+            <a:ext cx="3931920" cy="1600200"/>
           </a:xfrm>
           <a:prstGeom prst="rect">
             <a:avLst/>
@@ -14983,14 +15449,14 @@
       </p:sp>
       <p:sp>
         <p:nvSpPr>
-          <p:cNvPr id="13" name="Shape 11"/>
+          <p:cNvPr id="14" name="Shape 12"/>
           <p:cNvSpPr/>
           <p:nvPr/>
         </p:nvSpPr>
         <p:spPr>
           <a:xfrm>
             <a:off x="4663440" y="1188720"/>
-            <a:ext cx="4160520" cy="3108960"/>
+            <a:ext cx="4160520" cy="1965960"/>
           </a:xfrm>
           <a:prstGeom prst="rect">
             <a:avLst/>
@@ -15003,14 +15469,14 @@
       </p:sp>
       <p:sp>
         <p:nvSpPr>
-          <p:cNvPr id="14" name="Shape 12"/>
+          <p:cNvPr id="15" name="Shape 13"/>
           <p:cNvSpPr/>
           <p:nvPr/>
         </p:nvSpPr>
         <p:spPr>
           <a:xfrm>
             <a:off x="4663440" y="1188720"/>
-            <a:ext cx="73152" cy="3108960"/>
+            <a:ext cx="73152" cy="1965960"/>
           </a:xfrm>
           <a:prstGeom prst="rect">
             <a:avLst/>
@@ -15023,7 +15489,7 @@
       </p:sp>
       <p:sp>
         <p:nvSpPr>
-          <p:cNvPr id="15" name="Text 13"/>
+          <p:cNvPr id="16" name="Text 14"/>
           <p:cNvSpPr txBox="1"/>
           <p:nvPr/>
         </p:nvSpPr>
@@ -15065,14 +15531,14 @@
       </p:sp>
       <p:sp>
         <p:nvSpPr>
-          <p:cNvPr id="16" name="Text 14"/>
+          <p:cNvPr id="17" name="Text 15"/>
           <p:cNvSpPr txBox="1"/>
           <p:nvPr/>
         </p:nvSpPr>
         <p:spPr>
           <a:xfrm>
             <a:off x="4800600" y="1508760"/>
-            <a:ext cx="3931920" cy="2743200"/>
+            <a:ext cx="3931920" cy="1600200"/>
           </a:xfrm>
           <a:prstGeom prst="rect">
             <a:avLst/>
@@ -15130,14 +15596,14 @@
       </p:sp>
       <p:sp>
         <p:nvSpPr>
-          <p:cNvPr id="17" name="Shape 15"/>
+          <p:cNvPr id="18" name="Shape 16"/>
           <p:cNvSpPr/>
           <p:nvPr/>
         </p:nvSpPr>
         <p:spPr>
           <a:xfrm>
-            <a:off x="320040" y="4389120"/>
-            <a:ext cx="8503920" cy="0"/>
+            <a:off x="320040" y="3246120"/>
+            <a:ext cx="8503920" cy="1097280"/>
           </a:xfrm>
           <a:prstGeom prst="rect">
             <a:avLst/>
@@ -15150,14 +15616,14 @@
       </p:sp>
       <p:sp>
         <p:nvSpPr>
-          <p:cNvPr id="18" name="Shape 16"/>
+          <p:cNvPr id="19" name="Shape 17"/>
           <p:cNvSpPr/>
           <p:nvPr/>
         </p:nvSpPr>
         <p:spPr>
           <a:xfrm>
-            <a:off x="320040" y="4389120"/>
-            <a:ext cx="73152" cy="0"/>
+            <a:off x="320040" y="3246120"/>
+            <a:ext cx="73152" cy="1097280"/>
           </a:xfrm>
           <a:prstGeom prst="rect">
             <a:avLst/>
@@ -15167,6 +15633,90 @@
           </a:solidFill>
           <a:ln/>
         </p:spPr>
+      </p:sp>
+      <p:sp>
+        <p:nvSpPr>
+          <p:cNvPr id="20" name="Text 18"/>
+          <p:cNvSpPr txBox="1"/>
+          <p:nvPr/>
+        </p:nvSpPr>
+        <p:spPr>
+          <a:xfrm>
+            <a:off x="457200" y="3291840"/>
+            <a:ext cx="8275320" cy="256032"/>
+          </a:xfrm>
+          <a:prstGeom prst="rect">
+            <a:avLst/>
+          </a:prstGeom>
+          <a:noFill/>
+          <a:ln/>
+        </p:spPr>
+        <p:txBody>
+          <a:bodyPr wrap="square" lIns="508" tIns="508" rIns="508" bIns="508" rtlCol="0" anchor="ctr">
+            <a:normAutofit/>
+            <a:spAutoFit/>
+          </a:bodyPr>
+          <a:lstStyle/>
+          <a:p>
+            <a:pPr algn="l" indent="0" marL="0">
+              <a:buNone/>
+            </a:pPr>
+            <a:r>
+              <a:rPr lang="en-US" sz="1100" b="1" spc="400" kern="0" dirty="0">
+                <a:solidFill>
+                  <a:srgbClr val="E8600A"/>
+                </a:solidFill>
+                <a:latin typeface="Trebuchet MS" pitchFamily="34" charset="0"/>
+                <a:ea typeface="Trebuchet MS" pitchFamily="34" charset="-122"/>
+                <a:cs typeface="Trebuchet MS" pitchFamily="34" charset="-120"/>
+              </a:rPr>
+              <a:t>WHICH WAY DOES DURATION GET IT WRONG? ALWAYS THE SAME WAY</a:t>
+            </a:r>
+            <a:endParaRPr lang="en-US" sz="1100" dirty="0"/>
+          </a:p>
+        </p:txBody>
+      </p:sp>
+      <p:sp>
+        <p:nvSpPr>
+          <p:cNvPr id="21" name="Text 19"/>
+          <p:cNvSpPr txBox="1"/>
+          <p:nvPr/>
+        </p:nvSpPr>
+        <p:spPr>
+          <a:xfrm>
+            <a:off x="457200" y="3566160"/>
+            <a:ext cx="8275320" cy="731520"/>
+          </a:xfrm>
+          <a:prstGeom prst="rect">
+            <a:avLst/>
+          </a:prstGeom>
+          <a:noFill/>
+          <a:ln/>
+        </p:spPr>
+        <p:txBody>
+          <a:bodyPr wrap="square" lIns="508" tIns="508" rIns="508" bIns="508" rtlCol="0" anchor="t">
+            <a:normAutofit/>
+            <a:spAutoFit/>
+          </a:bodyPr>
+          <a:lstStyle/>
+          <a:p>
+            <a:pPr algn="l" indent="0" marL="0">
+              <a:buNone/>
+            </a:pPr>
+            <a:r>
+              <a:rPr lang="en-US" sz="1200" dirty="0">
+                <a:solidFill>
+                  <a:srgbClr val="334155"/>
+                </a:solidFill>
+                <a:latin typeface="Calibri" pitchFamily="34" charset="0"/>
+                <a:ea typeface="Calibri" pitchFamily="34" charset="-122"/>
+                <a:cs typeface="Calibri" pitchFamily="34" charset="-120"/>
+              </a:rPr>
+              <a:t>Rates FALL — the true price sits ABOVE the tangent line, so duration UNDER-states the gain. Rates RISE — the true price sits ABOVE the tangent line again, so duration OVER-states the loss. Both errors favour the holder of an option-free bond, and both are corrected by the SAME positive term, ½ × Convexity × (Δy)².</a:t>
+            </a:r>
+            <a:endParaRPr lang="en-US" sz="1200" dirty="0"/>
+          </a:p>
+        </p:txBody>
       </p:sp>
     </p:spTree>
   </p:cSld>
@@ -15345,6 +15895,46 @@
         </p:nvSpPr>
         <p:spPr>
           <a:xfrm>
+            <a:off x="320040" y="4471416"/>
+            <a:ext cx="8503920" cy="192024"/>
+          </a:xfrm>
+          <a:prstGeom prst="rect">
+            <a:avLst/>
+          </a:prstGeom>
+          <a:noFill/>
+          <a:ln/>
+        </p:spPr>
+        <p:txBody>
+          <a:bodyPr wrap="square" lIns="254" tIns="254" rIns="254" bIns="254" rtlCol="0" anchor="t"/>
+          <a:lstStyle/>
+          <a:p>
+            <a:pPr indent="0" marL="0">
+              <a:buNone/>
+            </a:pPr>
+            <a:r>
+              <a:rPr lang="en-US" sz="1000" dirty="0">
+                <a:solidFill>
+                  <a:srgbClr val="6B7A8D"/>
+                </a:solidFill>
+                <a:latin typeface="Calibri" pitchFamily="34" charset="0"/>
+                <a:ea typeface="Calibri" pitchFamily="34" charset="-122"/>
+                <a:cs typeface="Calibri" pitchFamily="34" charset="-120"/>
+              </a:rPr>
+              <a:t>¹ Fourth driver — dispersion: of two bonds with the same duration, the one whose cash flows are more spread out has the higher convexity (LM 12, p. 300).
+</a:t>
+            </a:r>
+            <a:endParaRPr lang="en-US" sz="1000" dirty="0"/>
+          </a:p>
+        </p:txBody>
+      </p:sp>
+      <p:sp>
+        <p:nvSpPr>
+          <p:cNvPr id="8" name="Text 6"/>
+          <p:cNvSpPr txBox="1"/>
+          <p:nvPr/>
+        </p:nvSpPr>
+        <p:spPr>
+          <a:xfrm>
             <a:off x="320040" y="4663440"/>
             <a:ext cx="8503920" cy="201168"/>
           </a:xfrm>
@@ -15373,7 +15963,7 @@
                 <a:ea typeface="Calibri" pitchFamily="34" charset="-122"/>
                 <a:cs typeface="Calibri" pitchFamily="34" charset="-120"/>
               </a:rPr>
-              <a:t>Source: CFA Institute, Curriculum Vol 6, Learning Module 12, Equation 1 &amp; §2, pp. 297–300.</a:t>
+              <a:t>Source: CFA Institute, Curriculum Vol 6, Learning Module 12, §2 Equations 1–2 and Exhibit 2, pp. 298–300.</a:t>
             </a:r>
             <a:endParaRPr lang="en-US" sz="750" dirty="0"/>
           </a:p>
@@ -15381,7 +15971,7 @@
       </p:sp>
       <p:sp>
         <p:nvSpPr>
-          <p:cNvPr id="8" name="Text 6"/>
+          <p:cNvPr id="9" name="Text 7"/>
           <p:cNvSpPr txBox="1"/>
           <p:nvPr/>
         </p:nvSpPr>
@@ -15423,14 +16013,14 @@
       </p:sp>
       <p:sp>
         <p:nvSpPr>
-          <p:cNvPr id="9" name="Shape 7"/>
+          <p:cNvPr id="10" name="Shape 8"/>
           <p:cNvSpPr/>
           <p:nvPr/>
         </p:nvSpPr>
         <p:spPr>
           <a:xfrm>
-            <a:off x="320040" y="1188720"/>
-            <a:ext cx="8503920" cy="731520"/>
+            <a:off x="320040" y="1143000"/>
+            <a:ext cx="8503920" cy="658368"/>
           </a:xfrm>
           <a:prstGeom prst="rect">
             <a:avLst/>
@@ -15443,14 +16033,14 @@
       </p:sp>
       <p:sp>
         <p:nvSpPr>
-          <p:cNvPr id="10" name="Text 8"/>
+          <p:cNvPr id="11" name="Text 9"/>
           <p:cNvSpPr txBox="1"/>
           <p:nvPr/>
         </p:nvSpPr>
         <p:spPr>
           <a:xfrm>
-            <a:off x="411480" y="1188720"/>
-            <a:ext cx="8321040" cy="731520"/>
+            <a:off x="411480" y="1143000"/>
+            <a:ext cx="8321040" cy="658368"/>
           </a:xfrm>
           <a:prstGeom prst="rect">
             <a:avLst/>
@@ -15485,13 +16075,13 @@
       </p:sp>
       <p:sp>
         <p:nvSpPr>
-          <p:cNvPr id="11" name="Text 9"/>
+          <p:cNvPr id="12" name="Text 10"/>
           <p:cNvSpPr txBox="1"/>
           <p:nvPr/>
         </p:nvSpPr>
         <p:spPr>
           <a:xfrm>
-            <a:off x="320040" y="1947672"/>
+            <a:off x="320040" y="1828800"/>
             <a:ext cx="8503920" cy="256032"/>
           </a:xfrm>
           <a:prstGeom prst="rect">
@@ -15519,7 +16109,7 @@
                 <a:ea typeface="Calibri" pitchFamily="34" charset="-122"/>
                 <a:cs typeface="Calibri" pitchFamily="34" charset="-120"/>
               </a:rPr>
-              <a:t>where: Δy = change in annualised YTM (decimal). First term is duration (linear). Second is the convexity adjustment (always ≥ 0 for option-free fixed-rate bonds).</a:t>
+              <a:t>where: Δy = change in annualised YTM, in decimal. First term is duration; the bracket is the convexity adjustment.</a:t>
             </a:r>
             <a:endParaRPr lang="en-US" sz="1100" dirty="0"/>
           </a:p>
@@ -15527,14 +16117,14 @@
       </p:sp>
       <p:sp>
         <p:nvSpPr>
-          <p:cNvPr id="12" name="Shape 10"/>
+          <p:cNvPr id="13" name="Shape 11"/>
           <p:cNvSpPr/>
           <p:nvPr/>
         </p:nvSpPr>
         <p:spPr>
           <a:xfrm>
-            <a:off x="320040" y="2103120"/>
-            <a:ext cx="8503920" cy="731520"/>
+            <a:off x="320040" y="2148840"/>
+            <a:ext cx="8503920" cy="658368"/>
           </a:xfrm>
           <a:prstGeom prst="rect">
             <a:avLst/>
@@ -15547,14 +16137,14 @@
       </p:sp>
       <p:sp>
         <p:nvSpPr>
-          <p:cNvPr id="13" name="Text 11"/>
+          <p:cNvPr id="14" name="Text 12"/>
           <p:cNvSpPr txBox="1"/>
           <p:nvPr/>
         </p:nvSpPr>
         <p:spPr>
           <a:xfrm>
-            <a:off x="411480" y="2103120"/>
-            <a:ext cx="8321040" cy="731520"/>
+            <a:off x="411480" y="2148840"/>
+            <a:ext cx="8321040" cy="658368"/>
           </a:xfrm>
           <a:prstGeom prst="rect">
             <a:avLst/>
@@ -15581,7 +16171,7 @@
                 <a:ea typeface="Consolas" pitchFamily="34" charset="-122"/>
                 <a:cs typeface="Consolas" pitchFamily="34" charset="-120"/>
               </a:rPr>
-              <a:t>AnnConvexity  ≈  [ PV−  +  PV+  −  2 × PV_0 ]  /  [ (Δy)²  ×  PV_0 ]</a:t>
+              <a:t>AnnConvexity  ≈  [ PV− + PV+ − 2×PV_0 ]  /  [ (Δy)² × PV_0 ]</a:t>
             </a:r>
             <a:endParaRPr lang="en-US" sz="1800" dirty="0"/>
           </a:p>
@@ -15589,13 +16179,13 @@
       </p:sp>
       <p:sp>
         <p:nvSpPr>
-          <p:cNvPr id="14" name="Text 12"/>
+          <p:cNvPr id="15" name="Text 13"/>
           <p:cNvSpPr txBox="1"/>
           <p:nvPr/>
         </p:nvSpPr>
         <p:spPr>
           <a:xfrm>
-            <a:off x="320040" y="2862072"/>
+            <a:off x="320040" y="2834640"/>
             <a:ext cx="8503920" cy="256032"/>
           </a:xfrm>
           <a:prstGeom prst="rect">
@@ -15623,7 +16213,7 @@
                 <a:ea typeface="Calibri" pitchFamily="34" charset="-122"/>
                 <a:cs typeface="Calibri" pitchFamily="34" charset="-120"/>
               </a:rPr>
-              <a:t>where: Approximation via the same PV+ / PV− used for approximate modified duration — adds the sum instead of the difference.</a:t>
+              <a:t>where: Same PV+ / PV− inputs as approximate modified duration — this one ADDS them instead of differencing them.</a:t>
             </a:r>
             <a:endParaRPr lang="en-US" sz="1100" dirty="0"/>
           </a:p>
@@ -15631,14 +16221,14 @@
       </p:sp>
       <p:sp>
         <p:nvSpPr>
-          <p:cNvPr id="15" name="Shape 13"/>
+          <p:cNvPr id="16" name="Shape 14"/>
           <p:cNvSpPr/>
           <p:nvPr/>
         </p:nvSpPr>
         <p:spPr>
           <a:xfrm>
-            <a:off x="320040" y="3063240"/>
-            <a:ext cx="2743200" cy="1234440"/>
+            <a:off x="320040" y="3200400"/>
+            <a:ext cx="2743200" cy="1097280"/>
           </a:xfrm>
           <a:prstGeom prst="rect">
             <a:avLst/>
@@ -15651,14 +16241,14 @@
       </p:sp>
       <p:sp>
         <p:nvSpPr>
-          <p:cNvPr id="16" name="Shape 14"/>
+          <p:cNvPr id="17" name="Shape 15"/>
           <p:cNvSpPr/>
           <p:nvPr/>
         </p:nvSpPr>
         <p:spPr>
           <a:xfrm>
-            <a:off x="320040" y="3063240"/>
-            <a:ext cx="73152" cy="1234440"/>
+            <a:off x="320040" y="3200400"/>
+            <a:ext cx="73152" cy="1097280"/>
           </a:xfrm>
           <a:prstGeom prst="rect">
             <a:avLst/>
@@ -15671,13 +16261,13 @@
       </p:sp>
       <p:sp>
         <p:nvSpPr>
-          <p:cNvPr id="17" name="Text 15"/>
+          <p:cNvPr id="18" name="Text 16"/>
           <p:cNvSpPr txBox="1"/>
           <p:nvPr/>
         </p:nvSpPr>
         <p:spPr>
           <a:xfrm>
-            <a:off x="457200" y="3108960"/>
+            <a:off x="457200" y="3246120"/>
             <a:ext cx="2514600" cy="256032"/>
           </a:xfrm>
           <a:prstGeom prst="rect">
@@ -15713,14 +16303,14 @@
       </p:sp>
       <p:sp>
         <p:nvSpPr>
-          <p:cNvPr id="18" name="Text 16"/>
+          <p:cNvPr id="19" name="Text 17"/>
           <p:cNvSpPr txBox="1"/>
           <p:nvPr/>
         </p:nvSpPr>
         <p:spPr>
           <a:xfrm>
-            <a:off x="457200" y="3383280"/>
-            <a:ext cx="2514600" cy="868680"/>
+            <a:off x="457200" y="3520440"/>
+            <a:ext cx="2514600" cy="731520"/>
           </a:xfrm>
           <a:prstGeom prst="rect">
             <a:avLst/>
@@ -15755,14 +16345,14 @@
       </p:sp>
       <p:sp>
         <p:nvSpPr>
-          <p:cNvPr id="19" name="Shape 17"/>
+          <p:cNvPr id="20" name="Shape 18"/>
           <p:cNvSpPr/>
           <p:nvPr/>
         </p:nvSpPr>
         <p:spPr>
           <a:xfrm>
-            <a:off x="3200400" y="3063240"/>
-            <a:ext cx="2743200" cy="1234440"/>
+            <a:off x="3200400" y="3200400"/>
+            <a:ext cx="2743200" cy="1097280"/>
           </a:xfrm>
           <a:prstGeom prst="rect">
             <a:avLst/>
@@ -15775,14 +16365,14 @@
       </p:sp>
       <p:sp>
         <p:nvSpPr>
-          <p:cNvPr id="20" name="Shape 18"/>
+          <p:cNvPr id="21" name="Shape 19"/>
           <p:cNvSpPr/>
           <p:nvPr/>
         </p:nvSpPr>
         <p:spPr>
           <a:xfrm>
-            <a:off x="3200400" y="3063240"/>
-            <a:ext cx="73152" cy="1234440"/>
+            <a:off x="3200400" y="3200400"/>
+            <a:ext cx="73152" cy="1097280"/>
           </a:xfrm>
           <a:prstGeom prst="rect">
             <a:avLst/>
@@ -15795,13 +16385,13 @@
       </p:sp>
       <p:sp>
         <p:nvSpPr>
-          <p:cNvPr id="21" name="Text 19"/>
+          <p:cNvPr id="22" name="Text 20"/>
           <p:cNvSpPr txBox="1"/>
           <p:nvPr/>
         </p:nvSpPr>
         <p:spPr>
           <a:xfrm>
-            <a:off x="3337560" y="3108960"/>
+            <a:off x="3337560" y="3246120"/>
             <a:ext cx="2514600" cy="256032"/>
           </a:xfrm>
           <a:prstGeom prst="rect">
@@ -15837,14 +16427,14 @@
       </p:sp>
       <p:sp>
         <p:nvSpPr>
-          <p:cNvPr id="22" name="Text 20"/>
+          <p:cNvPr id="23" name="Text 21"/>
           <p:cNvSpPr txBox="1"/>
           <p:nvPr/>
         </p:nvSpPr>
         <p:spPr>
           <a:xfrm>
-            <a:off x="3337560" y="3383280"/>
-            <a:ext cx="2514600" cy="868680"/>
+            <a:off x="3337560" y="3520440"/>
+            <a:ext cx="2514600" cy="731520"/>
           </a:xfrm>
           <a:prstGeom prst="rect">
             <a:avLst/>
@@ -15879,14 +16469,14 @@
       </p:sp>
       <p:sp>
         <p:nvSpPr>
-          <p:cNvPr id="23" name="Shape 21"/>
+          <p:cNvPr id="24" name="Shape 22"/>
           <p:cNvSpPr/>
           <p:nvPr/>
         </p:nvSpPr>
         <p:spPr>
           <a:xfrm>
-            <a:off x="6080760" y="3063240"/>
-            <a:ext cx="2743200" cy="1234440"/>
+            <a:off x="6080760" y="3200400"/>
+            <a:ext cx="2743200" cy="1097280"/>
           </a:xfrm>
           <a:prstGeom prst="rect">
             <a:avLst/>
@@ -15899,14 +16489,14 @@
       </p:sp>
       <p:sp>
         <p:nvSpPr>
-          <p:cNvPr id="24" name="Shape 22"/>
+          <p:cNvPr id="25" name="Shape 23"/>
           <p:cNvSpPr/>
           <p:nvPr/>
         </p:nvSpPr>
         <p:spPr>
           <a:xfrm>
-            <a:off x="6080760" y="3063240"/>
-            <a:ext cx="73152" cy="1234440"/>
+            <a:off x="6080760" y="3200400"/>
+            <a:ext cx="73152" cy="1097280"/>
           </a:xfrm>
           <a:prstGeom prst="rect">
             <a:avLst/>
@@ -15919,13 +16509,13 @@
       </p:sp>
       <p:sp>
         <p:nvSpPr>
-          <p:cNvPr id="25" name="Text 23"/>
+          <p:cNvPr id="26" name="Text 24"/>
           <p:cNvSpPr txBox="1"/>
           <p:nvPr/>
         </p:nvSpPr>
         <p:spPr>
           <a:xfrm>
-            <a:off x="6217920" y="3108960"/>
+            <a:off x="6217920" y="3246120"/>
             <a:ext cx="2514600" cy="256032"/>
           </a:xfrm>
           <a:prstGeom prst="rect">
@@ -15961,14 +16551,14 @@
       </p:sp>
       <p:sp>
         <p:nvSpPr>
-          <p:cNvPr id="26" name="Text 24"/>
+          <p:cNvPr id="27" name="Text 25"/>
           <p:cNvSpPr txBox="1"/>
           <p:nvPr/>
         </p:nvSpPr>
         <p:spPr>
           <a:xfrm>
-            <a:off x="6217920" y="3383280"/>
-            <a:ext cx="2514600" cy="868680"/>
+            <a:off x="6217920" y="3520440"/>
+            <a:ext cx="2514600" cy="731520"/>
           </a:xfrm>
           <a:prstGeom prst="rect">
             <a:avLst/>
@@ -16206,7 +16796,7 @@
                 <a:ea typeface="Calibri" pitchFamily="34" charset="-122"/>
                 <a:cs typeface="Calibri" pitchFamily="34" charset="-120"/>
               </a:rPr>
-              <a:t>Source: CFA Institute, Curriculum Vol 6, Learning Module 12, Exhibit 4, pp. 304–305.</a:t>
+              <a:t>Source: CFA Institute, Curriculum Vol 6, Learning Module 12, §3 "Bond Risk and Return Using Duration and Convexity", Exhibit 4, pp. 303–304.</a:t>
             </a:r>
             <a:endParaRPr lang="en-US" sz="750" dirty="0"/>
           </a:p>
@@ -17202,8 +17792,8 @@
         </p:nvSpPr>
         <p:spPr>
           <a:xfrm>
-            <a:off x="320040" y="2468880"/>
-            <a:ext cx="8503920" cy="1828800"/>
+            <a:off x="320040" y="2103120"/>
+            <a:ext cx="8503920" cy="2194560"/>
           </a:xfrm>
           <a:prstGeom prst="rect">
             <a:avLst/>
@@ -17227,7 +17817,7 @@
         </p:nvSpPr>
         <p:spPr>
           <a:xfrm>
-            <a:off x="457200" y="2514600"/>
+            <a:off x="457200" y="2148840"/>
             <a:ext cx="8229600" cy="256032"/>
           </a:xfrm>
           <a:prstGeom prst="rect">
@@ -17269,7 +17859,7 @@
         </p:nvSpPr>
         <p:spPr>
           <a:xfrm>
-            <a:off x="457200" y="2807208"/>
+            <a:off x="457200" y="2441448"/>
             <a:ext cx="8229600" cy="457200"/>
           </a:xfrm>
           <a:prstGeom prst="rect">
@@ -17311,8 +17901,8 @@
         </p:nvSpPr>
         <p:spPr>
           <a:xfrm>
-            <a:off x="457200" y="3319272"/>
-            <a:ext cx="8229600" cy="466344"/>
+            <a:off x="457200" y="2953512"/>
+            <a:ext cx="8229600" cy="832104"/>
           </a:xfrm>
           <a:prstGeom prst="rect">
             <a:avLst/>
@@ -17334,7 +17924,7 @@
               <a:buNone/>
             </a:pPr>
             <a:r>
-              <a:rPr lang="en-US" sz="1050" b="1" dirty="0">
+              <a:rPr lang="en-US" sz="1150" b="1" dirty="0">
                 <a:solidFill>
                   <a:srgbClr val="1B2A4A"/>
                 </a:solidFill>
@@ -17351,7 +17941,7 @@
               <a:buNone/>
             </a:pPr>
             <a:r>
-              <a:rPr lang="en-US" sz="1050" dirty="0">
+              <a:rPr lang="en-US" sz="1150" dirty="0">
                 <a:solidFill>
                   <a:srgbClr val="334155"/>
                 </a:solidFill>
@@ -17369,7 +17959,7 @@
               <a:buNone/>
             </a:pPr>
             <a:r>
-              <a:rPr lang="en-US" sz="1050" b="1" dirty="0">
+              <a:rPr lang="en-US" sz="1150" b="1" dirty="0">
                 <a:solidFill>
                   <a:srgbClr val="1B2A4A"/>
                 </a:solidFill>
@@ -17386,7 +17976,7 @@
               <a:buNone/>
             </a:pPr>
             <a:r>
-              <a:rPr lang="en-US" sz="1050" dirty="0">
+              <a:rPr lang="en-US" sz="1150" dirty="0">
                 <a:solidFill>
                   <a:srgbClr val="334155"/>
                 </a:solidFill>
@@ -17404,7 +17994,7 @@
               <a:buNone/>
             </a:pPr>
             <a:r>
-              <a:rPr lang="en-US" sz="1050" b="1" dirty="0">
+              <a:rPr lang="en-US" sz="1150" b="1" dirty="0">
                 <a:solidFill>
                   <a:srgbClr val="1B2A4A"/>
                 </a:solidFill>
@@ -17421,7 +18011,7 @@
               <a:buNone/>
             </a:pPr>
             <a:r>
-              <a:rPr lang="en-US" sz="1050" dirty="0">
+              <a:rPr lang="en-US" sz="1150" dirty="0">
                 <a:solidFill>
                   <a:srgbClr val="334155"/>
                 </a:solidFill>
@@ -17439,7 +18029,7 @@
               <a:buNone/>
             </a:pPr>
             <a:r>
-              <a:rPr lang="en-US" sz="1050" b="1" dirty="0">
+              <a:rPr lang="en-US" sz="1150" b="1" dirty="0">
                 <a:solidFill>
                   <a:srgbClr val="1B2A4A"/>
                 </a:solidFill>
@@ -17456,7 +18046,7 @@
               <a:buNone/>
             </a:pPr>
             <a:r>
-              <a:rPr lang="en-US" sz="1050" dirty="0">
+              <a:rPr lang="en-US" sz="1150" dirty="0">
                 <a:solidFill>
                   <a:srgbClr val="334155"/>
                 </a:solidFill>
@@ -17466,7 +18056,7 @@
               </a:rPr>
               <a:t>Exact (PRICE function at 4.20% YTM): 95.53212 → −4.468% → error only 0.2 bp</a:t>
             </a:r>
-            <a:endParaRPr lang="en-US" sz="1050" dirty="0"/>
+            <a:endParaRPr lang="en-US" sz="1150" dirty="0"/>
           </a:p>
         </p:txBody>
       </p:sp>
@@ -17737,7 +18327,7 @@
                 <a:ea typeface="Calibri" pitchFamily="34" charset="-122"/>
                 <a:cs typeface="Calibri" pitchFamily="34" charset="-120"/>
               </a:rPr>
-              <a:t>Source: CFA Institute, Curriculum Vol 6, Learning Module 12, Equations 3–4, pp. 304–305.</a:t>
+              <a:t>Source: CFA Institute, Curriculum Vol 6, Learning Module 12, §3 Equations 3–4 and Exhibit 5, pp. 304–305.</a:t>
             </a:r>
             <a:endParaRPr lang="en-US" sz="750" dirty="0"/>
           </a:p>
@@ -17841,7 +18431,24 @@
                 <a:ea typeface="Consolas" pitchFamily="34" charset="-122"/>
                 <a:cs typeface="Consolas" pitchFamily="34" charset="-120"/>
               </a:rPr>
-              <a:t>MoneyCon  =  AnnConvexity × PV_full             ΔPV_full  ≈  −MoneyDur × Δy  +  ½ × MoneyCon × (Δy)²</a:t>
+              <a:t>MoneyCon  =  AnnConvexity × PV_full</a:t>
+            </a:r>
+            <a:endParaRPr lang="en-US" sz="1800" dirty="0"/>
+          </a:p>
+          <a:p>
+            <a:pPr algn="ctr" indent="0" marL="0">
+              <a:buNone/>
+            </a:pPr>
+            <a:r>
+              <a:rPr lang="en-US" sz="1800" b="1" dirty="0">
+                <a:solidFill>
+                  <a:srgbClr val="FFFFFF"/>
+                </a:solidFill>
+                <a:latin typeface="Consolas" pitchFamily="34" charset="0"/>
+                <a:ea typeface="Consolas" pitchFamily="34" charset="-122"/>
+                <a:cs typeface="Consolas" pitchFamily="34" charset="-120"/>
+              </a:rPr>
+              <a:t>ΔPV_full  ≈  −MoneyDur × Δy  +  ½ × MoneyCon × (Δy)²</a:t>
             </a:r>
             <a:endParaRPr lang="en-US" sz="1800" dirty="0"/>
           </a:p>
@@ -17855,8 +18462,8 @@
         </p:nvSpPr>
         <p:spPr>
           <a:xfrm>
-            <a:off x="320040" y="2240280"/>
-            <a:ext cx="8503920" cy="2057400"/>
+            <a:off x="320040" y="2057400"/>
+            <a:ext cx="8503920" cy="2240280"/>
           </a:xfrm>
           <a:prstGeom prst="rect">
             <a:avLst/>
@@ -17880,7 +18487,7 @@
         </p:nvSpPr>
         <p:spPr>
           <a:xfrm>
-            <a:off x="457200" y="2286000"/>
+            <a:off x="457200" y="2103120"/>
             <a:ext cx="8229600" cy="256032"/>
           </a:xfrm>
           <a:prstGeom prst="rect">
@@ -17922,7 +18529,7 @@
         </p:nvSpPr>
         <p:spPr>
           <a:xfrm>
-            <a:off x="457200" y="2578608"/>
+            <a:off x="457200" y="2395728"/>
             <a:ext cx="8229600" cy="457200"/>
           </a:xfrm>
           <a:prstGeom prst="rect">
@@ -17964,8 +18571,8 @@
         </p:nvSpPr>
         <p:spPr>
           <a:xfrm>
-            <a:off x="457200" y="3090672"/>
-            <a:ext cx="8229600" cy="694944"/>
+            <a:off x="457200" y="2907792"/>
+            <a:ext cx="8229600" cy="877824"/>
           </a:xfrm>
           <a:prstGeom prst="rect">
             <a:avLst/>
@@ -17987,7 +18594,7 @@
               <a:buNone/>
             </a:pPr>
             <a:r>
-              <a:rPr lang="en-US" sz="1050" b="1" dirty="0">
+              <a:rPr lang="en-US" sz="1100" b="1" dirty="0">
                 <a:solidFill>
                   <a:srgbClr val="1B2A4A"/>
                 </a:solidFill>
@@ -18004,7 +18611,7 @@
               <a:buNone/>
             </a:pPr>
             <a:r>
-              <a:rPr lang="en-US" sz="1050" dirty="0">
+              <a:rPr lang="en-US" sz="1100" dirty="0">
                 <a:solidFill>
                   <a:srgbClr val="334155"/>
                 </a:solidFill>
@@ -18022,7 +18629,7 @@
               <a:buNone/>
             </a:pPr>
             <a:r>
-              <a:rPr lang="en-US" sz="1050" b="1" dirty="0">
+              <a:rPr lang="en-US" sz="1100" b="1" dirty="0">
                 <a:solidFill>
                   <a:srgbClr val="1B2A4A"/>
                 </a:solidFill>
@@ -18039,7 +18646,7 @@
               <a:buNone/>
             </a:pPr>
             <a:r>
-              <a:rPr lang="en-US" sz="1050" dirty="0">
+              <a:rPr lang="en-US" sz="1100" dirty="0">
                 <a:solidFill>
                   <a:srgbClr val="334155"/>
                 </a:solidFill>
@@ -18057,7 +18664,7 @@
               <a:buNone/>
             </a:pPr>
             <a:r>
-              <a:rPr lang="en-US" sz="1050" b="1" dirty="0">
+              <a:rPr lang="en-US" sz="1100" b="1" dirty="0">
                 <a:solidFill>
                   <a:srgbClr val="1B2A4A"/>
                 </a:solidFill>
@@ -18074,7 +18681,7 @@
               <a:buNone/>
             </a:pPr>
             <a:r>
-              <a:rPr lang="en-US" sz="1050" dirty="0">
+              <a:rPr lang="en-US" sz="1100" dirty="0">
                 <a:solidFill>
                   <a:srgbClr val="334155"/>
                 </a:solidFill>
@@ -18092,7 +18699,7 @@
               <a:buNone/>
             </a:pPr>
             <a:r>
-              <a:rPr lang="en-US" sz="1050" b="1" dirty="0">
+              <a:rPr lang="en-US" sz="1100" b="1" dirty="0">
                 <a:solidFill>
                   <a:srgbClr val="1B2A4A"/>
                 </a:solidFill>
@@ -18109,7 +18716,7 @@
               <a:buNone/>
             </a:pPr>
             <a:r>
-              <a:rPr lang="en-US" sz="1050" dirty="0">
+              <a:rPr lang="en-US" sz="1100" dirty="0">
                 <a:solidFill>
                   <a:srgbClr val="334155"/>
                 </a:solidFill>
@@ -18127,7 +18734,7 @@
               <a:buNone/>
             </a:pPr>
             <a:r>
-              <a:rPr lang="en-US" sz="1050" b="1" dirty="0">
+              <a:rPr lang="en-US" sz="1100" b="1" dirty="0">
                 <a:solidFill>
                   <a:srgbClr val="1B2A4A"/>
                 </a:solidFill>
@@ -18144,7 +18751,7 @@
               <a:buNone/>
             </a:pPr>
             <a:r>
-              <a:rPr lang="en-US" sz="1050" dirty="0">
+              <a:rPr lang="en-US" sz="1100" dirty="0">
                 <a:solidFill>
                   <a:srgbClr val="334155"/>
                 </a:solidFill>
@@ -18154,7 +18761,7 @@
               </a:rPr>
               <a:t>Net estimate: −USD 4,465,564. Actual price drop: −USD 4,467,884. Error: −USD 2,320.</a:t>
             </a:r>
-            <a:endParaRPr lang="en-US" sz="1050" dirty="0"/>
+            <a:endParaRPr lang="en-US" sz="1100" dirty="0"/>
           </a:p>
         </p:txBody>
       </p:sp>
@@ -18425,7 +19032,7 @@
                 <a:ea typeface="Calibri" pitchFamily="34" charset="-122"/>
                 <a:cs typeface="Calibri" pitchFamily="34" charset="-120"/>
               </a:rPr>
-              <a:t>Source: CFA Institute, Curriculum Vol 6, Learning Module 12, Example 1, pp. 300–301.</a:t>
+              <a:t>Source: CFA Institute, Curriculum Vol 6, Learning Module 12, Example 1 "Duration and Convexity of 30-Year Romanian Bond", pp. 300–301.</a:t>
             </a:r>
             <a:endParaRPr lang="en-US" sz="750" dirty="0"/>
           </a:p>
@@ -18822,7 +19429,7 @@
                           <a:ea typeface="Trebuchet MS" pitchFamily="34" charset="-122"/>
                           <a:cs typeface="Trebuchet MS" pitchFamily="34" charset="-120"/>
                         </a:rPr>
-                        <a:t>Ratio Con / Dur</a:t>
+                        <a:t>Con / Dur</a:t>
                       </a:r>
                       <a:endParaRPr lang="en-US" sz="1100" dirty="0">
                         <a:latin typeface="Trebuchet MS" charset="0"/>
@@ -19924,8 +20531,8 @@
         </p:nvSpPr>
         <p:spPr>
           <a:xfrm>
-            <a:off x="320040" y="3108960"/>
-            <a:ext cx="8503920" cy="1234440"/>
+            <a:off x="320040" y="2697480"/>
+            <a:ext cx="8503920" cy="1417320"/>
           </a:xfrm>
           <a:prstGeom prst="rect">
             <a:avLst/>
@@ -19944,8 +20551,8 @@
         </p:nvSpPr>
         <p:spPr>
           <a:xfrm>
-            <a:off x="320040" y="3108960"/>
-            <a:ext cx="73152" cy="1234440"/>
+            <a:off x="320040" y="2697480"/>
+            <a:ext cx="73152" cy="1417320"/>
           </a:xfrm>
           <a:prstGeom prst="rect">
             <a:avLst/>
@@ -19964,7 +20571,7 @@
         </p:nvSpPr>
         <p:spPr>
           <a:xfrm>
-            <a:off x="457200" y="3154680"/>
+            <a:off x="457200" y="2743200"/>
             <a:ext cx="8275320" cy="256032"/>
           </a:xfrm>
           <a:prstGeom prst="rect">
@@ -20006,8 +20613,8 @@
         </p:nvSpPr>
         <p:spPr>
           <a:xfrm>
-            <a:off x="457200" y="3429000"/>
-            <a:ext cx="8275320" cy="868680"/>
+            <a:off x="457200" y="3017520"/>
+            <a:ext cx="8275320" cy="1051560"/>
           </a:xfrm>
           <a:prstGeom prst="rect">
             <a:avLst/>
@@ -20034,7 +20641,7 @@
                 <a:ea typeface="Calibri" pitchFamily="34" charset="-122"/>
                 <a:cs typeface="Calibri" pitchFamily="34" charset="-120"/>
               </a:rPr>
-              <a:t>A 100 bp yield shift on the Romanian bond is: duration piece −15.91%, convexity piece +1.85%, net −14.06%. The Romanian convexity term is 15× BRWA's — the convexity adjustment is no longer a tiny correction but a material component of the price change. For long-duration books, ignoring convexity is a systematic mis-estimation, not a rounding error.</a:t>
+              <a:t>A 100 bp yield rise on the Romanian bond: duration piece −15.91%, convexity piece +1.85%, net −14.06%. The convexity term is 15× BRWA's — no longer a tiny correction but a material component of the price change. Note that the Romanian carries the HIGHER coupon and the HIGHER yield, both of which shorten duration and cut convexity; its 30-year maturity overwhelms them regardless. For long-duration books, ignoring convexity is a systematic mis-estimation, not a rounding error.</a:t>
             </a:r>
             <a:endParaRPr lang="en-US" sz="1200" dirty="0"/>
           </a:p>
@@ -20242,7 +20849,7 @@
                 <a:ea typeface="Calibri" pitchFamily="34" charset="-122"/>
                 <a:cs typeface="Calibri" pitchFamily="34" charset="-120"/>
               </a:rPr>
-              <a:t>¹ Theoretically correct method is to compute duration from the aggregate portfolio cash flows. MV-weighting is standard practice but baked-in to it is the parallel-shift assumption.
+              <a:t>¹ The theoretically correct method uses the aggregate portfolio cash flows. MV-weighting is standard practice, and the parallel-shift assumption is baked into it.
 </a:t>
             </a:r>
             <a:endParaRPr lang="en-US" sz="1000" dirty="0"/>
@@ -20285,7 +20892,7 @@
                 <a:ea typeface="Calibri" pitchFamily="34" charset="-122"/>
                 <a:cs typeface="Calibri" pitchFamily="34" charset="-120"/>
               </a:rPr>
-              <a:t>Source: CFA Institute, Curriculum Vol 6, Learning Module 12, §4 "Portfolio Duration and Convexity", pp. 307–311.</a:t>
+              <a:t>Source: CFA Institute, Curriculum Vol 6, Learning Module 12, §4 "Portfolio Duration and Convexity", Exhibit 6, pp. 307–308.</a:t>
             </a:r>
             <a:endParaRPr lang="en-US" sz="750" dirty="0"/>
           </a:p>
@@ -20389,7 +20996,24 @@
                 <a:ea typeface="Consolas" pitchFamily="34" charset="-122"/>
                 <a:cs typeface="Consolas" pitchFamily="34" charset="-120"/>
               </a:rPr>
-              <a:t>AnnModDur_port  =  Σᵢ wᵢ · AnnModDurᵢ          AnnConvexity_port  =  Σᵢ wᵢ · AnnConvexityᵢ</a:t>
+              <a:t>AnnModDur_port  =  Σᵢ wᵢ · AnnModDurᵢ</a:t>
+            </a:r>
+            <a:endParaRPr lang="en-US" sz="1800" dirty="0"/>
+          </a:p>
+          <a:p>
+            <a:pPr algn="ctr" indent="0" marL="0">
+              <a:buNone/>
+            </a:pPr>
+            <a:r>
+              <a:rPr lang="en-US" sz="1800" b="1" dirty="0">
+                <a:solidFill>
+                  <a:srgbClr val="FFFFFF"/>
+                </a:solidFill>
+                <a:latin typeface="Consolas" pitchFamily="34" charset="0"/>
+                <a:ea typeface="Consolas" pitchFamily="34" charset="-122"/>
+                <a:cs typeface="Consolas" pitchFamily="34" charset="-120"/>
+              </a:rPr>
+              <a:t>AnnConvexity_port  =  Σᵢ wᵢ · AnnConvexityᵢ</a:t>
             </a:r>
             <a:endParaRPr lang="en-US" sz="1800" dirty="0"/>
           </a:p>
@@ -20498,7 +21122,7 @@
                 <a:ea typeface="Trebuchet MS" pitchFamily="34" charset="-122"/>
                 <a:cs typeface="Trebuchet MS" pitchFamily="34" charset="-120"/>
               </a:rPr>
-              <a:t>WORKED — BRWA + ROMANIAN TWO-BOND PORTFOLIO (USD 100M PAR EACH)</a:t>
+              <a:t>WORKED — BRWA + ROMANIAN TWO-BOND PORTFOLIO (USD 50M PAR EACH)</a:t>
             </a:r>
             <a:endParaRPr lang="en-US" sz="1100" dirty="0"/>
           </a:p>
@@ -20540,7 +21164,7 @@
                 <a:ea typeface="Calibri" pitchFamily="34" charset="-122"/>
                 <a:cs typeface="Calibri" pitchFamily="34" charset="-120"/>
               </a:rPr>
-              <a:t>BRWA MV = USD 50.0M (w = 0.5050), Romanian MV = USD 49.01M (w = 0.4950). Durations and convexities as on the previous slide.</a:t>
+              <a:t>BRWA priced at 100.000 → MV USD 50.00M (w = 0.5050). Romanian priced at 98.022 → MV USD 49.01M (w = 0.4950). Total MV USD 99.01M.</a:t>
             </a:r>
             <a:endParaRPr lang="en-US" sz="1200" dirty="0"/>
           </a:p>
@@ -20707,7 +21331,7 @@
                 <a:ea typeface="Calibri" pitchFamily="34" charset="-122"/>
                 <a:cs typeface="Calibri" pitchFamily="34" charset="-120"/>
               </a:rPr>
-              <a:t>A steepener (short rates up, long rates flat) would hit Romanian harder — MV-weighted duration understates this scenario.</a:t>
+              <a:t>Equal PAR does not mean equal weight: the weights above are MARKET values, and they differ by 1 pt</a:t>
             </a:r>
             <a:endParaRPr lang="en-US" sz="1050" dirty="0"/>
           </a:p>
@@ -20769,7 +21393,7 @@
                 <a:ea typeface="Consolas" pitchFamily="34" charset="-122"/>
                 <a:cs typeface="Consolas" pitchFamily="34" charset="-120"/>
               </a:rPr>
-              <a:t>Portfolio value falls ~USD 9.12M on a 100 bp parallel rise in yields — provided the curve shifts parallel.</a:t>
+              <a:t>Portfolio value falls ~USD 9.12M on a 100 bp parallel rise — provided the shift really is parallel.</a:t>
             </a:r>
             <a:endParaRPr lang="en-US" sz="1150" dirty="0"/>
           </a:p>
@@ -20980,7 +21604,7 @@
                 <a:ea typeface="Calibri" pitchFamily="34" charset="-122"/>
                 <a:cs typeface="Calibri" pitchFamily="34" charset="-120"/>
               </a:rPr>
-              <a:t>Source: CFA Institute, Curriculum Vol 6, Learning Module 12, Self-assessment Q3–4, pp. 295–297.</a:t>
+              <a:t>Source: CFA Institute, Curriculum Vol 6, Learning Module 12, Learning Module Self-Assessment Q3 and Q4, pp. 295–296.</a:t>
             </a:r>
             <a:endParaRPr lang="en-US" sz="750" dirty="0"/>
           </a:p>
@@ -21325,7 +21949,7 @@
                 <a:ea typeface="Calibri" pitchFamily="34" charset="-122"/>
                 <a:cs typeface="Calibri" pitchFamily="34" charset="-120"/>
               </a:rPr>
-              <a:t>Combined estimate: +8.78%
+              <a:t>Combined estimate: +8.785%
 </a:t>
             </a:r>
             <a:pPr indent="0" marL="0">
@@ -21360,7 +21984,7 @@
                 <a:ea typeface="Calibri" pitchFamily="34" charset="-122"/>
                 <a:cs typeface="Calibri" pitchFamily="34" charset="-120"/>
               </a:rPr>
-              <a:t>MoneyDur = 8.376 × GBP 50,000,000 = GBP 418,800,000
+              <a:t>MoneyDur = 8.376 × GBP 50,000,000 = GBP 418,800,000 → duration leg = GBP 4,188,000
 </a:t>
             </a:r>
             <a:pPr indent="0" marL="0">
@@ -21492,7 +22116,7 @@
                 <a:ea typeface="Consolas" pitchFamily="34" charset="-122"/>
                 <a:cs typeface="Consolas" pitchFamily="34" charset="-120"/>
               </a:rPr>
-              <a:t>Total expected gain ≈ GBP 4.39M (duration) + GBP 204k (convexity) = GBP 4.59M on a −100 bp move.</a:t>
+              <a:t>GBP 4.188M (duration) + GBP 0.204M (convexity) = GBP 4.39M expected gain on −100 bp.</a:t>
             </a:r>
             <a:endParaRPr lang="en-US" sz="1150" dirty="0"/>
           </a:p>
@@ -21903,6 +22527,46 @@
         </p:nvSpPr>
         <p:spPr>
           <a:xfrm>
+            <a:off x="320040" y="4471416"/>
+            <a:ext cx="8503920" cy="192024"/>
+          </a:xfrm>
+          <a:prstGeom prst="rect">
+            <a:avLst/>
+          </a:prstGeom>
+          <a:noFill/>
+          <a:ln/>
+        </p:spPr>
+        <p:txBody>
+          <a:bodyPr wrap="square" lIns="254" tIns="254" rIns="254" bIns="254" rtlCol="0" anchor="t"/>
+          <a:lstStyle/>
+          <a:p>
+            <a:pPr indent="0" marL="0">
+              <a:buNone/>
+            </a:pPr>
+            <a:r>
+              <a:rPr lang="en-US" sz="1000" dirty="0">
+                <a:solidFill>
+                  <a:srgbClr val="6B7A8D"/>
+                </a:solidFill>
+                <a:latin typeface="Calibri" pitchFamily="34" charset="0"/>
+                <a:ea typeface="Calibri" pitchFamily="34" charset="-122"/>
+                <a:cs typeface="Calibri" pitchFamily="34" charset="-120"/>
+              </a:rPr>
+              <a:t>¹ A callable bond has no well-defined YTM — yield-to-worst prices just one of many rate paths, so MacDur and ModDur lose their meaning (LM 13, p. 321).
+</a:t>
+            </a:r>
+            <a:endParaRPr lang="en-US" sz="1000" dirty="0"/>
+          </a:p>
+        </p:txBody>
+      </p:sp>
+      <p:sp>
+        <p:nvSpPr>
+          <p:cNvPr id="8" name="Text 6"/>
+          <p:cNvSpPr txBox="1"/>
+          <p:nvPr/>
+        </p:nvSpPr>
+        <p:spPr>
+          <a:xfrm>
             <a:off x="320040" y="4663440"/>
             <a:ext cx="8503920" cy="201168"/>
           </a:xfrm>
@@ -21931,7 +22595,7 @@
                 <a:ea typeface="Calibri" pitchFamily="34" charset="-122"/>
                 <a:cs typeface="Calibri" pitchFamily="34" charset="-120"/>
               </a:rPr>
-              <a:t>Source: CFA Institute, Curriculum Vol 6, Learning Module 13, §2 "Curve-Based Interest Rate Risk Measures", pp. 320–326.</a:t>
+              <a:t>Source: CFA Institute, Curriculum Vol 6, Learning Module 13, §2 "Curve-Based Interest Rate Risk Measures", Exhibits 1–2, pp. 320–322.</a:t>
             </a:r>
             <a:endParaRPr lang="en-US" sz="750" dirty="0"/>
           </a:p>
@@ -21939,7 +22603,7 @@
       </p:sp>
       <p:sp>
         <p:nvSpPr>
-          <p:cNvPr id="8" name="Text 6"/>
+          <p:cNvPr id="9" name="Text 7"/>
           <p:cNvSpPr txBox="1"/>
           <p:nvPr/>
         </p:nvSpPr>
@@ -21981,14 +22645,14 @@
       </p:sp>
       <p:sp>
         <p:nvSpPr>
-          <p:cNvPr id="9" name="Shape 7"/>
+          <p:cNvPr id="10" name="Shape 8"/>
           <p:cNvSpPr/>
           <p:nvPr/>
         </p:nvSpPr>
         <p:spPr>
           <a:xfrm>
             <a:off x="320040" y="1143000"/>
-            <a:ext cx="2743200" cy="3246120"/>
+            <a:ext cx="2743200" cy="3200400"/>
           </a:xfrm>
           <a:prstGeom prst="rect">
             <a:avLst/>
@@ -22001,14 +22665,14 @@
       </p:sp>
       <p:sp>
         <p:nvSpPr>
-          <p:cNvPr id="10" name="Shape 8"/>
+          <p:cNvPr id="11" name="Shape 9"/>
           <p:cNvSpPr/>
           <p:nvPr/>
         </p:nvSpPr>
         <p:spPr>
           <a:xfrm>
             <a:off x="320040" y="1143000"/>
-            <a:ext cx="73152" cy="3246120"/>
+            <a:ext cx="73152" cy="3200400"/>
           </a:xfrm>
           <a:prstGeom prst="rect">
             <a:avLst/>
@@ -22021,7 +22685,7 @@
       </p:sp>
       <p:sp>
         <p:nvSpPr>
-          <p:cNvPr id="11" name="Text 9"/>
+          <p:cNvPr id="12" name="Text 10"/>
           <p:cNvSpPr txBox="1"/>
           <p:nvPr/>
         </p:nvSpPr>
@@ -22063,14 +22727,14 @@
       </p:sp>
       <p:sp>
         <p:nvSpPr>
-          <p:cNvPr id="12" name="Text 10"/>
+          <p:cNvPr id="13" name="Text 11"/>
           <p:cNvSpPr txBox="1"/>
           <p:nvPr/>
         </p:nvSpPr>
         <p:spPr>
           <a:xfrm>
             <a:off x="457200" y="1463040"/>
-            <a:ext cx="2514600" cy="2880360"/>
+            <a:ext cx="2514600" cy="2834640"/>
           </a:xfrm>
           <a:prstGeom prst="rect">
             <a:avLst/>
@@ -22128,14 +22792,14 @@
       </p:sp>
       <p:sp>
         <p:nvSpPr>
-          <p:cNvPr id="13" name="Shape 11"/>
+          <p:cNvPr id="14" name="Shape 12"/>
           <p:cNvSpPr/>
           <p:nvPr/>
         </p:nvSpPr>
         <p:spPr>
           <a:xfrm>
             <a:off x="3200400" y="1143000"/>
-            <a:ext cx="2743200" cy="3246120"/>
+            <a:ext cx="2743200" cy="3200400"/>
           </a:xfrm>
           <a:prstGeom prst="rect">
             <a:avLst/>
@@ -22148,14 +22812,14 @@
       </p:sp>
       <p:sp>
         <p:nvSpPr>
-          <p:cNvPr id="14" name="Shape 12"/>
+          <p:cNvPr id="15" name="Shape 13"/>
           <p:cNvSpPr/>
           <p:nvPr/>
         </p:nvSpPr>
         <p:spPr>
           <a:xfrm>
             <a:off x="3200400" y="1143000"/>
-            <a:ext cx="73152" cy="3246120"/>
+            <a:ext cx="73152" cy="3200400"/>
           </a:xfrm>
           <a:prstGeom prst="rect">
             <a:avLst/>
@@ -22168,7 +22832,7 @@
       </p:sp>
       <p:sp>
         <p:nvSpPr>
-          <p:cNvPr id="15" name="Text 13"/>
+          <p:cNvPr id="16" name="Text 14"/>
           <p:cNvSpPr txBox="1"/>
           <p:nvPr/>
         </p:nvSpPr>
@@ -22210,14 +22874,14 @@
       </p:sp>
       <p:sp>
         <p:nvSpPr>
-          <p:cNvPr id="16" name="Text 14"/>
+          <p:cNvPr id="17" name="Text 15"/>
           <p:cNvSpPr txBox="1"/>
           <p:nvPr/>
         </p:nvSpPr>
         <p:spPr>
           <a:xfrm>
             <a:off x="3337560" y="1463040"/>
-            <a:ext cx="2514600" cy="2880360"/>
+            <a:ext cx="2514600" cy="2834640"/>
           </a:xfrm>
           <a:prstGeom prst="rect">
             <a:avLst/>
@@ -22275,14 +22939,14 @@
       </p:sp>
       <p:sp>
         <p:nvSpPr>
-          <p:cNvPr id="17" name="Shape 15"/>
+          <p:cNvPr id="18" name="Shape 16"/>
           <p:cNvSpPr/>
           <p:nvPr/>
         </p:nvSpPr>
         <p:spPr>
           <a:xfrm>
             <a:off x="6080760" y="1143000"/>
-            <a:ext cx="2743200" cy="3246120"/>
+            <a:ext cx="2743200" cy="3200400"/>
           </a:xfrm>
           <a:prstGeom prst="rect">
             <a:avLst/>
@@ -22295,14 +22959,14 @@
       </p:sp>
       <p:sp>
         <p:nvSpPr>
-          <p:cNvPr id="18" name="Shape 16"/>
+          <p:cNvPr id="19" name="Shape 17"/>
           <p:cNvSpPr/>
           <p:nvPr/>
         </p:nvSpPr>
         <p:spPr>
           <a:xfrm>
             <a:off x="6080760" y="1143000"/>
-            <a:ext cx="73152" cy="3246120"/>
+            <a:ext cx="73152" cy="3200400"/>
           </a:xfrm>
           <a:prstGeom prst="rect">
             <a:avLst/>
@@ -22315,7 +22979,7 @@
       </p:sp>
       <p:sp>
         <p:nvSpPr>
-          <p:cNvPr id="19" name="Text 17"/>
+          <p:cNvPr id="20" name="Text 18"/>
           <p:cNvSpPr txBox="1"/>
           <p:nvPr/>
         </p:nvSpPr>
@@ -22357,14 +23021,14 @@
       </p:sp>
       <p:sp>
         <p:nvSpPr>
-          <p:cNvPr id="20" name="Text 18"/>
+          <p:cNvPr id="21" name="Text 19"/>
           <p:cNvSpPr txBox="1"/>
           <p:nvPr/>
         </p:nvSpPr>
         <p:spPr>
           <a:xfrm>
             <a:off x="6217920" y="1463040"/>
-            <a:ext cx="2514600" cy="2880360"/>
+            <a:ext cx="2514600" cy="2834640"/>
           </a:xfrm>
           <a:prstGeom prst="rect">
             <a:avLst/>
@@ -22597,6 +23261,46 @@
         </p:nvSpPr>
         <p:spPr>
           <a:xfrm>
+            <a:off x="320040" y="4471416"/>
+            <a:ext cx="8503920" cy="192024"/>
+          </a:xfrm>
+          <a:prstGeom prst="rect">
+            <a:avLst/>
+          </a:prstGeom>
+          <a:noFill/>
+          <a:ln/>
+        </p:spPr>
+        <p:txBody>
+          <a:bodyPr wrap="square" lIns="254" tIns="254" rIns="254" bIns="254" rtlCol="0" anchor="t"/>
+          <a:lstStyle/>
+          <a:p>
+            <a:pPr indent="0" marL="0">
+              <a:buNone/>
+            </a:pPr>
+            <a:r>
+              <a:rPr lang="en-US" sz="1000" dirty="0">
+                <a:solidFill>
+                  <a:srgbClr val="6B7A8D"/>
+                </a:solidFill>
+                <a:latin typeface="Calibri" pitchFamily="34" charset="0"/>
+                <a:ea typeface="Calibri" pitchFamily="34" charset="-122"/>
+                <a:cs typeface="Calibri" pitchFamily="34" charset="-120"/>
+              </a:rPr>
+              <a:t>¹ BRWA 5y, ±5 bp: a YTM bump gives ModDur 4.587 / Con 24.24; the same bump to the par CURVE gives EffDur 4.816 / EffCon 40.0 (LM 13, pp. 323–324).
+</a:t>
+            </a:r>
+            <a:endParaRPr lang="en-US" sz="1000" dirty="0"/>
+          </a:p>
+        </p:txBody>
+      </p:sp>
+      <p:sp>
+        <p:nvSpPr>
+          <p:cNvPr id="8" name="Text 6"/>
+          <p:cNvSpPr txBox="1"/>
+          <p:nvPr/>
+        </p:nvSpPr>
+        <p:spPr>
+          <a:xfrm>
             <a:off x="320040" y="4663440"/>
             <a:ext cx="8503920" cy="201168"/>
           </a:xfrm>
@@ -22625,7 +23329,7 @@
                 <a:ea typeface="Calibri" pitchFamily="34" charset="-122"/>
                 <a:cs typeface="Calibri" pitchFamily="34" charset="-120"/>
               </a:rPr>
-              <a:t>Source: CFA Institute, Curriculum Vol 6, Learning Module 13, §2 Equations 1–2, pp. 322–324.</a:t>
+              <a:t>Source: CFA Institute, Curriculum Vol 6, Learning Module 13, §2 Equations 1–2 and §3 Equation 3, pp. 322–327.</a:t>
             </a:r>
             <a:endParaRPr lang="en-US" sz="750" dirty="0"/>
           </a:p>
@@ -22633,7 +23337,7 @@
       </p:sp>
       <p:sp>
         <p:nvSpPr>
-          <p:cNvPr id="8" name="Text 6"/>
+          <p:cNvPr id="9" name="Text 7"/>
           <p:cNvSpPr txBox="1"/>
           <p:nvPr/>
         </p:nvSpPr>
@@ -22675,14 +23379,14 @@
       </p:sp>
       <p:sp>
         <p:nvSpPr>
-          <p:cNvPr id="9" name="Shape 7"/>
+          <p:cNvPr id="10" name="Shape 8"/>
           <p:cNvSpPr/>
           <p:nvPr/>
         </p:nvSpPr>
         <p:spPr>
           <a:xfrm>
-            <a:off x="320040" y="1188720"/>
-            <a:ext cx="8503920" cy="731520"/>
+            <a:off x="320040" y="1143000"/>
+            <a:ext cx="8503920" cy="658368"/>
           </a:xfrm>
           <a:prstGeom prst="rect">
             <a:avLst/>
@@ -22695,14 +23399,14 @@
       </p:sp>
       <p:sp>
         <p:nvSpPr>
-          <p:cNvPr id="10" name="Text 8"/>
+          <p:cNvPr id="11" name="Text 9"/>
           <p:cNvSpPr txBox="1"/>
           <p:nvPr/>
         </p:nvSpPr>
         <p:spPr>
           <a:xfrm>
-            <a:off x="411480" y="1188720"/>
-            <a:ext cx="8321040" cy="731520"/>
+            <a:off x="411480" y="1143000"/>
+            <a:ext cx="8321040" cy="658368"/>
           </a:xfrm>
           <a:prstGeom prst="rect">
             <a:avLst/>
@@ -22737,13 +23441,13 @@
       </p:sp>
       <p:sp>
         <p:nvSpPr>
-          <p:cNvPr id="11" name="Text 9"/>
+          <p:cNvPr id="12" name="Text 10"/>
           <p:cNvSpPr txBox="1"/>
           <p:nvPr/>
         </p:nvSpPr>
         <p:spPr>
           <a:xfrm>
-            <a:off x="320040" y="1947672"/>
+            <a:off x="320040" y="1828800"/>
             <a:ext cx="8503920" cy="256032"/>
           </a:xfrm>
           <a:prstGeom prst="rect">
@@ -22771,7 +23475,7 @@
                 <a:ea typeface="Calibri" pitchFamily="34" charset="-122"/>
                 <a:cs typeface="Calibri" pitchFamily="34" charset="-120"/>
               </a:rPr>
-              <a:t>where: ΔCurve = parallel shift of the benchmark (e.g. government par) curve. PV± re-priced with the full option-pricing model under the shifted curve.</a:t>
+              <a:t>where: ΔCurve = parallel shift of the benchmark (e.g. government par) curve. PV± come from an option-pricing model.</a:t>
             </a:r>
             <a:endParaRPr lang="en-US" sz="1100" dirty="0"/>
           </a:p>
@@ -22779,14 +23483,14 @@
       </p:sp>
       <p:sp>
         <p:nvSpPr>
-          <p:cNvPr id="12" name="Shape 10"/>
+          <p:cNvPr id="13" name="Shape 11"/>
           <p:cNvSpPr/>
           <p:nvPr/>
         </p:nvSpPr>
         <p:spPr>
           <a:xfrm>
-            <a:off x="320040" y="2103120"/>
-            <a:ext cx="8503920" cy="731520"/>
+            <a:off x="320040" y="2148840"/>
+            <a:ext cx="8503920" cy="658368"/>
           </a:xfrm>
           <a:prstGeom prst="rect">
             <a:avLst/>
@@ -22799,14 +23503,14 @@
       </p:sp>
       <p:sp>
         <p:nvSpPr>
-          <p:cNvPr id="13" name="Text 11"/>
+          <p:cNvPr id="14" name="Text 12"/>
           <p:cNvSpPr txBox="1"/>
           <p:nvPr/>
         </p:nvSpPr>
         <p:spPr>
           <a:xfrm>
-            <a:off x="411480" y="2103120"/>
-            <a:ext cx="8321040" cy="731520"/>
+            <a:off x="411480" y="2148840"/>
+            <a:ext cx="8321040" cy="658368"/>
           </a:xfrm>
           <a:prstGeom prst="rect">
             <a:avLst/>
@@ -22841,13 +23545,13 @@
       </p:sp>
       <p:sp>
         <p:nvSpPr>
-          <p:cNvPr id="14" name="Text 12"/>
+          <p:cNvPr id="15" name="Text 13"/>
           <p:cNvSpPr txBox="1"/>
           <p:nvPr/>
         </p:nvSpPr>
         <p:spPr>
           <a:xfrm>
-            <a:off x="320040" y="2862072"/>
+            <a:off x="320040" y="2834640"/>
             <a:ext cx="8503920" cy="256032"/>
           </a:xfrm>
           <a:prstGeom prst="rect">
@@ -22875,7 +23579,7 @@
                 <a:ea typeface="Calibri" pitchFamily="34" charset="-122"/>
                 <a:cs typeface="Calibri" pitchFamily="34" charset="-120"/>
               </a:rPr>
-              <a:t>where: Can be negative for callables / MBS. %ΔPV_full  =  −EffDur × ΔCurve  +  ½ × EffCon × (ΔCurve)².</a:t>
+              <a:t>where: Can be negative for callables / MBS. %ΔPV_full  ≈  −EffDur × ΔCurve  +  ½ × EffCon × (ΔCurve)².</a:t>
             </a:r>
             <a:endParaRPr lang="en-US" sz="1100" dirty="0"/>
           </a:p>
@@ -22883,14 +23587,14 @@
       </p:sp>
       <p:sp>
         <p:nvSpPr>
-          <p:cNvPr id="15" name="Shape 13"/>
+          <p:cNvPr id="16" name="Shape 14"/>
           <p:cNvSpPr/>
           <p:nvPr/>
         </p:nvSpPr>
         <p:spPr>
           <a:xfrm>
-            <a:off x="320040" y="3063240"/>
-            <a:ext cx="8503920" cy="1234440"/>
+            <a:off x="320040" y="3154680"/>
+            <a:ext cx="8503920" cy="1143000"/>
           </a:xfrm>
           <a:prstGeom prst="rect">
             <a:avLst/>
@@ -22903,14 +23607,14 @@
       </p:sp>
       <p:sp>
         <p:nvSpPr>
-          <p:cNvPr id="16" name="Shape 14"/>
+          <p:cNvPr id="17" name="Shape 15"/>
           <p:cNvSpPr/>
           <p:nvPr/>
         </p:nvSpPr>
         <p:spPr>
           <a:xfrm>
-            <a:off x="320040" y="3063240"/>
-            <a:ext cx="73152" cy="1234440"/>
+            <a:off x="320040" y="3154680"/>
+            <a:ext cx="73152" cy="1143000"/>
           </a:xfrm>
           <a:prstGeom prst="rect">
             <a:avLst/>
@@ -22923,13 +23627,13 @@
       </p:sp>
       <p:sp>
         <p:nvSpPr>
-          <p:cNvPr id="17" name="Text 15"/>
+          <p:cNvPr id="18" name="Text 16"/>
           <p:cNvSpPr txBox="1"/>
           <p:nvPr/>
         </p:nvSpPr>
         <p:spPr>
           <a:xfrm>
-            <a:off x="457200" y="3108960"/>
+            <a:off x="457200" y="3200400"/>
             <a:ext cx="8275320" cy="256032"/>
           </a:xfrm>
           <a:prstGeom prst="rect">
@@ -22965,14 +23669,14 @@
       </p:sp>
       <p:sp>
         <p:nvSpPr>
-          <p:cNvPr id="18" name="Text 16"/>
+          <p:cNvPr id="19" name="Text 17"/>
           <p:cNvSpPr txBox="1"/>
           <p:nvPr/>
         </p:nvSpPr>
         <p:spPr>
           <a:xfrm>
-            <a:off x="457200" y="3383280"/>
-            <a:ext cx="8275320" cy="868680"/>
+            <a:off x="457200" y="3474720"/>
+            <a:ext cx="8275320" cy="777240"/>
           </a:xfrm>
           <a:prstGeom prst="rect">
             <a:avLst/>
@@ -22999,7 +23703,7 @@
                 <a:ea typeface="Calibri" pitchFamily="34" charset="-122"/>
                 <a:cs typeface="Calibri" pitchFamily="34" charset="-120"/>
               </a:rPr>
-              <a:t>A parallel shift in the government PAR curve does not produce a parallel shift in the SPOT curve. The bond's own YTM moves by a slightly different amount than the par-curve bump. So EffDur and ModDur differ a little even for a plain bond. The gap shrinks when the yield curve is flatter, the maturity shorter, and the bond closer to par. Only a flat yield curve makes them identical.</a:t>
+              <a:t>A parallel shift in the government PAR curve does not produce a parallel shift in the SPOT curve, so the bond's own YTM moves by a slightly different amount than the par-curve bump. EffDur and ModDur therefore differ a little even for a plain bond. The gap narrows when the curve is flatter, the maturity shorter and the bond closer to par — and disappears only for a flat curve.</a:t>
             </a:r>
             <a:endParaRPr lang="en-US" sz="1200" dirty="0"/>
           </a:p>
@@ -23592,6 +24296,46 @@
         </p:nvSpPr>
         <p:spPr>
           <a:xfrm>
+            <a:off x="320040" y="4471416"/>
+            <a:ext cx="8503920" cy="192024"/>
+          </a:xfrm>
+          <a:prstGeom prst="rect">
+            <a:avLst/>
+          </a:prstGeom>
+          <a:noFill/>
+          <a:ln/>
+        </p:spPr>
+        <p:txBody>
+          <a:bodyPr wrap="square" lIns="254" tIns="254" rIns="254" bIns="254" rtlCol="0" anchor="t"/>
+          <a:lstStyle/>
+          <a:p>
+            <a:pPr indent="0" marL="0">
+              <a:buNone/>
+            </a:pPr>
+            <a:r>
+              <a:rPr lang="en-US" sz="1000" dirty="0">
+                <a:solidFill>
+                  <a:srgbClr val="6B7A8D"/>
+                </a:solidFill>
+                <a:latin typeface="Calibri" pitchFamily="34" charset="0"/>
+                <a:ea typeface="Calibri" pitchFamily="34" charset="-122"/>
+                <a:cs typeface="Calibri" pitchFamily="34" charset="-120"/>
+              </a:rPr>
+              <a:t>¹ Example 2, p. 328, at ±100 bp on the same bond: −7.601 × 0.01 + ½(−285.168)(0.01)² = −9.03%, while the same shift down gives only +6.17%.
+</a:t>
+            </a:r>
+            <a:endParaRPr lang="en-US" sz="1000" dirty="0"/>
+          </a:p>
+        </p:txBody>
+      </p:sp>
+      <p:sp>
+        <p:nvSpPr>
+          <p:cNvPr id="8" name="Text 6"/>
+          <p:cNvSpPr txBox="1"/>
+          <p:nvPr/>
+        </p:nvSpPr>
+        <p:spPr>
+          <a:xfrm>
             <a:off x="320040" y="4663440"/>
             <a:ext cx="8503920" cy="201168"/>
           </a:xfrm>
@@ -23620,7 +24364,7 @@
                 <a:ea typeface="Calibri" pitchFamily="34" charset="-122"/>
                 <a:cs typeface="Calibri" pitchFamily="34" charset="-120"/>
               </a:rPr>
-              <a:t>Source: CFA Institute, Curriculum Vol 6, Learning Module 13, Example 1 "Viviyu Inc. callable bond", pp. 324–325.</a:t>
+              <a:t>Source: CFA Institute, Curriculum Vol 6, Learning Module 13, Example 1 "Effective Duration and Convexity", p. 324; the ±100 bp asymmetry is Example 2, p. 328.</a:t>
             </a:r>
             <a:endParaRPr lang="en-US" sz="750" dirty="0"/>
           </a:p>
@@ -23628,7 +24372,7 @@
       </p:sp>
       <p:sp>
         <p:nvSpPr>
-          <p:cNvPr id="8" name="Text 6"/>
+          <p:cNvPr id="9" name="Text 7"/>
           <p:cNvSpPr txBox="1"/>
           <p:nvPr/>
         </p:nvSpPr>
@@ -23662,7 +24406,7 @@
                 <a:ea typeface="Calibri" pitchFamily="34" charset="-122"/>
                 <a:cs typeface="Calibri" pitchFamily="34" charset="-120"/>
               </a:rPr>
-              <a:t>PM targets duration between 7 and 8 with positive convexity. Callable bond passes the duration screen but fails on convexity — recommend not to buy.</a:t>
+              <a:t>PM targets duration between 7 and 8 with positive convexity. The bond passes the duration screen but fails on convexity — recommend not to buy.</a:t>
             </a:r>
             <a:endParaRPr lang="en-US" sz="1300" dirty="0"/>
           </a:p>
@@ -23864,7 +24608,7 @@
                           <a:ea typeface="Trebuchet MS" pitchFamily="34" charset="-122"/>
                           <a:cs typeface="Trebuchet MS" pitchFamily="34" charset="-120"/>
                         </a:rPr>
-                        <a:t>Computation</a:t>
+                        <a:t>From the model</a:t>
                       </a:r>
                       <a:endParaRPr lang="en-US" sz="1100" dirty="0">
                         <a:latin typeface="Trebuchet MS" charset="0"/>
@@ -24066,7 +24810,7 @@
                           <a:ea typeface="Consolas" pitchFamily="34" charset="-122"/>
                           <a:cs typeface="Consolas" pitchFamily="34" charset="-120"/>
                         </a:rPr>
-                        <a:t>PV_0 — observed market price</a:t>
+                        <a:t>PV_0 — observed price</a:t>
                       </a:r>
                       <a:endParaRPr lang="en-US" sz="1100" dirty="0">
                         <a:latin typeface="Consolas" charset="0"/>
@@ -24268,7 +25012,7 @@
                           <a:ea typeface="Consolas" pitchFamily="34" charset="-122"/>
                           <a:cs typeface="Consolas" pitchFamily="34" charset="-120"/>
                         </a:rPr>
-                        <a:t>PV+ — from option pricing model</a:t>
+                        <a:t>PV+ — option model</a:t>
                       </a:r>
                       <a:endParaRPr lang="en-US" sz="1100" dirty="0">
                         <a:latin typeface="Consolas" charset="0"/>
@@ -24470,7 +25214,7 @@
                           <a:ea typeface="Consolas" pitchFamily="34" charset="-122"/>
                           <a:cs typeface="Consolas" pitchFamily="34" charset="-120"/>
                         </a:rPr>
-                        <a:t>PV− — from option pricing model</a:t>
+                        <a:t>PV− — option model</a:t>
                       </a:r>
                       <a:endParaRPr lang="en-US" sz="1100" dirty="0">
                         <a:latin typeface="Consolas" charset="0"/>
@@ -24510,14 +25254,14 @@
       </p:graphicFrame>
       <p:sp>
         <p:nvSpPr>
-          <p:cNvPr id="10" name="Shape 7"/>
+          <p:cNvPr id="11" name="Shape 8"/>
           <p:cNvSpPr/>
           <p:nvPr/>
         </p:nvSpPr>
         <p:spPr>
           <a:xfrm>
-            <a:off x="320040" y="2560320"/>
-            <a:ext cx="8503920" cy="1737360"/>
+            <a:off x="320040" y="2331720"/>
+            <a:ext cx="8503920" cy="1965960"/>
           </a:xfrm>
           <a:prstGeom prst="rect">
             <a:avLst/>
@@ -24535,13 +25279,13 @@
       </p:sp>
       <p:sp>
         <p:nvSpPr>
-          <p:cNvPr id="11" name="Text 8"/>
+          <p:cNvPr id="12" name="Text 9"/>
           <p:cNvSpPr txBox="1"/>
           <p:nvPr/>
         </p:nvSpPr>
         <p:spPr>
           <a:xfrm>
-            <a:off x="457200" y="2606040"/>
+            <a:off x="457200" y="2377440"/>
             <a:ext cx="8229600" cy="256032"/>
           </a:xfrm>
           <a:prstGeom prst="rect">
@@ -24577,13 +25321,13 @@
       </p:sp>
       <p:sp>
         <p:nvSpPr>
-          <p:cNvPr id="12" name="Text 9"/>
+          <p:cNvPr id="13" name="Text 10"/>
           <p:cNvSpPr txBox="1"/>
           <p:nvPr/>
         </p:nvSpPr>
         <p:spPr>
           <a:xfrm>
-            <a:off x="457200" y="2898648"/>
+            <a:off x="457200" y="2670048"/>
             <a:ext cx="8229600" cy="457200"/>
           </a:xfrm>
           <a:prstGeom prst="rect">
@@ -24619,14 +25363,14 @@
       </p:sp>
       <p:sp>
         <p:nvSpPr>
-          <p:cNvPr id="13" name="Text 10"/>
+          <p:cNvPr id="14" name="Text 11"/>
           <p:cNvSpPr txBox="1"/>
           <p:nvPr/>
         </p:nvSpPr>
         <p:spPr>
           <a:xfrm>
-            <a:off x="457200" y="3410712"/>
-            <a:ext cx="8229600" cy="374904"/>
+            <a:off x="457200" y="3182112"/>
+            <a:ext cx="8229600" cy="603504"/>
           </a:xfrm>
           <a:prstGeom prst="rect">
             <a:avLst/>
@@ -24648,7 +25392,7 @@
               <a:buNone/>
             </a:pPr>
             <a:r>
-              <a:rPr lang="en-US" sz="1050" b="1" dirty="0">
+              <a:rPr lang="en-US" sz="1100" b="1" dirty="0">
                 <a:solidFill>
                   <a:srgbClr val="1B2A4A"/>
                 </a:solidFill>
@@ -24665,7 +25409,7 @@
               <a:buNone/>
             </a:pPr>
             <a:r>
-              <a:rPr lang="en-US" sz="1050" dirty="0">
+              <a:rPr lang="en-US" sz="1100" dirty="0">
                 <a:solidFill>
                   <a:srgbClr val="334155"/>
                 </a:solidFill>
@@ -24673,7 +25417,7 @@
                 <a:ea typeface="Calibri" pitchFamily="34" charset="-122"/>
                 <a:cs typeface="Calibri" pitchFamily="34" charset="-120"/>
               </a:rPr>
-              <a:t>EffDur = (102.891 − 99.050) / (2 × 0.0025 × 101.060)  =  3.841 / 0.5053  =  7.601
+              <a:t>EffDur = (102.891 − 99.050) / (2 × 0.0025 × 101.060) = 3.841 / 0.5053 = 7.601
 </a:t>
             </a:r>
             <a:pPr indent="0" marL="0">
@@ -24683,7 +25427,7 @@
               <a:buNone/>
             </a:pPr>
             <a:r>
-              <a:rPr lang="en-US" sz="1050" b="1" dirty="0">
+              <a:rPr lang="en-US" sz="1100" b="1" dirty="0">
                 <a:solidFill>
                   <a:srgbClr val="1B2A4A"/>
                 </a:solidFill>
@@ -24700,7 +25444,7 @@
               <a:buNone/>
             </a:pPr>
             <a:r>
-              <a:rPr lang="en-US" sz="1050" dirty="0">
+              <a:rPr lang="en-US" sz="1100" dirty="0">
                 <a:solidFill>
                   <a:srgbClr val="334155"/>
                 </a:solidFill>
@@ -24708,7 +25452,7 @@
                 <a:ea typeface="Calibri" pitchFamily="34" charset="-122"/>
                 <a:cs typeface="Calibri" pitchFamily="34" charset="-120"/>
               </a:rPr>
-              <a:t>EffCon = (102.891 + 99.050 − 2 × 101.060) / [(0.0025)² × 101.060]
+              <a:t>EffCon = (102.891 + 99.050 − 202.120) / [(0.0025)² × 101.060] = −0.179 / 0.00063163 = −283.4
 </a:t>
             </a:r>
             <a:pPr indent="0" marL="0">
@@ -24718,7 +25462,7 @@
               <a:buNone/>
             </a:pPr>
             <a:r>
-              <a:rPr lang="en-US" sz="1050" b="1" dirty="0">
+              <a:rPr lang="en-US" sz="1100" b="1" dirty="0">
                 <a:solidFill>
                   <a:srgbClr val="1B2A4A"/>
                 </a:solidFill>
@@ -24735,7 +25479,7 @@
               <a:buNone/>
             </a:pPr>
             <a:r>
-              <a:rPr lang="en-US" sz="1050" dirty="0">
+              <a:rPr lang="en-US" sz="1100" dirty="0">
                 <a:solidFill>
                   <a:srgbClr val="334155"/>
                 </a:solidFill>
@@ -24743,50 +25487,15 @@
                 <a:ea typeface="Calibri" pitchFamily="34" charset="-122"/>
                 <a:cs typeface="Calibri" pitchFamily="34" charset="-120"/>
               </a:rPr>
-              <a:t>       = (−0.179) / 0.000631625  =  −283.4
-</a:t>
-            </a:r>
-            <a:pPr indent="0" marL="0">
-              <a:spcAft>
-                <a:spcPts val="200"/>
-              </a:spcAft>
-              <a:buNone/>
-            </a:pPr>
-            <a:r>
-              <a:rPr lang="en-US" sz="1050" b="1" dirty="0">
-                <a:solidFill>
-                  <a:srgbClr val="1B2A4A"/>
-                </a:solidFill>
-                <a:latin typeface="Calibri" pitchFamily="34" charset="0"/>
-                <a:ea typeface="Calibri" pitchFamily="34" charset="-122"/>
-                <a:cs typeface="Calibri" pitchFamily="34" charset="-120"/>
-              </a:rPr>
-              <a:t>4. </a:t>
-            </a:r>
-            <a:pPr indent="0" marL="0">
-              <a:spcAft>
-                <a:spcPts val="200"/>
-              </a:spcAft>
-              <a:buNone/>
-            </a:pPr>
-            <a:r>
-              <a:rPr lang="en-US" sz="1050" dirty="0">
-                <a:solidFill>
-                  <a:srgbClr val="334155"/>
-                </a:solidFill>
-                <a:latin typeface="Calibri" pitchFamily="34" charset="0"/>
-                <a:ea typeface="Calibri" pitchFamily="34" charset="-122"/>
-                <a:cs typeface="Calibri" pitchFamily="34" charset="-120"/>
-              </a:rPr>
-              <a:t>Interpretation: duration is in the PM's 7–8 range, but negative convexity means a falling-rate rally delivers LESS than duration suggests. Decline.</a:t>
-            </a:r>
-            <a:endParaRPr lang="en-US" sz="1050" dirty="0"/>
-          </a:p>
-        </p:txBody>
-      </p:sp>
-      <p:sp>
-        <p:nvSpPr>
-          <p:cNvPr id="14" name="Shape 11"/>
+              <a:t>Duration clears the 7–8 screen; negative convexity means a rally delivers LESS than duration suggests</a:t>
+            </a:r>
+            <a:endParaRPr lang="en-US" sz="1100" dirty="0"/>
+          </a:p>
+        </p:txBody>
+      </p:sp>
+      <p:sp>
+        <p:nvSpPr>
+          <p:cNvPr id="15" name="Shape 12"/>
           <p:cNvSpPr/>
           <p:nvPr/>
         </p:nvSpPr>
@@ -24806,7 +25515,7 @@
       </p:sp>
       <p:sp>
         <p:nvSpPr>
-          <p:cNvPr id="15" name="Text 12"/>
+          <p:cNvPr id="16" name="Text 13"/>
           <p:cNvSpPr txBox="1"/>
           <p:nvPr/>
         </p:nvSpPr>
@@ -24840,7 +25549,7 @@
                 <a:ea typeface="Consolas" pitchFamily="34" charset="-122"/>
                 <a:cs typeface="Consolas" pitchFamily="34" charset="-120"/>
               </a:rPr>
-              <a:t>EffDur = 7.60, EffCon = −283. Negative convexity — skip.</a:t>
+              <a:t>EffDur 7.60, EffCon −283. At ±100 bp: −9.03% down vs only +6.17% up. Decline.</a:t>
             </a:r>
             <a:endParaRPr lang="en-US" sz="1150" dirty="0"/>
           </a:p>
@@ -25023,6 +25732,46 @@
         </p:nvSpPr>
         <p:spPr>
           <a:xfrm>
+            <a:off x="320040" y="4471416"/>
+            <a:ext cx="8503920" cy="192024"/>
+          </a:xfrm>
+          <a:prstGeom prst="rect">
+            <a:avLst/>
+          </a:prstGeom>
+          <a:noFill/>
+          <a:ln/>
+        </p:spPr>
+        <p:txBody>
+          <a:bodyPr wrap="square" lIns="254" tIns="254" rIns="254" bIns="254" rtlCol="0" anchor="t"/>
+          <a:lstStyle/>
+          <a:p>
+            <a:pPr indent="0" marL="0">
+              <a:buNone/>
+            </a:pPr>
+            <a:r>
+              <a:rPr lang="en-US" sz="1000" dirty="0">
+                <a:solidFill>
+                  <a:srgbClr val="6B7A8D"/>
+                </a:solidFill>
+                <a:latin typeface="Calibri" pitchFamily="34" charset="0"/>
+                <a:ea typeface="Calibri" pitchFamily="34" charset="-122"/>
+                <a:cs typeface="Calibri" pitchFamily="34" charset="-120"/>
+              </a:rPr>
+              <a:t>¹ USD 100M par of each zero → MV 99.0 / 94.0 / 84.0M, weights 35.7 / 33.9 / 30.3%. Portfolio KRD at a tenor = that bond's MV weight × its own duration.
+</a:t>
+            </a:r>
+            <a:endParaRPr lang="en-US" sz="1000" dirty="0"/>
+          </a:p>
+        </p:txBody>
+      </p:sp>
+      <p:sp>
+        <p:nvSpPr>
+          <p:cNvPr id="8" name="Text 6"/>
+          <p:cNvSpPr txBox="1"/>
+          <p:nvPr/>
+        </p:nvSpPr>
+        <p:spPr>
+          <a:xfrm>
             <a:off x="320040" y="4663440"/>
             <a:ext cx="8503920" cy="201168"/>
           </a:xfrm>
@@ -25051,7 +25800,7 @@
                 <a:ea typeface="Calibri" pitchFamily="34" charset="-122"/>
                 <a:cs typeface="Calibri" pitchFamily="34" charset="-120"/>
               </a:rPr>
-              <a:t>Source: CFA Institute, Curriculum Vol 6, Learning Module 13, §4 "Key Rate Duration", pp. 329–333.</a:t>
+              <a:t>Source: CFA Institute, Curriculum Vol 6, Learning Module 13, §4 "Key Rate Duration as a Measure of Yield Curve Risk", Equations 4–6 and Exhibit 5, pp. 329–331.</a:t>
             </a:r>
             <a:endParaRPr lang="en-US" sz="750" dirty="0"/>
           </a:p>
@@ -25059,7 +25808,7 @@
       </p:sp>
       <p:sp>
         <p:nvSpPr>
-          <p:cNvPr id="8" name="Text 6"/>
+          <p:cNvPr id="9" name="Text 7"/>
           <p:cNvSpPr txBox="1"/>
           <p:nvPr/>
         </p:nvSpPr>
@@ -25101,14 +25850,14 @@
       </p:sp>
       <p:sp>
         <p:nvSpPr>
-          <p:cNvPr id="9" name="Shape 7"/>
+          <p:cNvPr id="10" name="Shape 8"/>
           <p:cNvSpPr/>
           <p:nvPr/>
         </p:nvSpPr>
         <p:spPr>
           <a:xfrm>
-            <a:off x="320040" y="1188720"/>
-            <a:ext cx="8503920" cy="731520"/>
+            <a:off x="320040" y="1143000"/>
+            <a:ext cx="8503920" cy="658368"/>
           </a:xfrm>
           <a:prstGeom prst="rect">
             <a:avLst/>
@@ -25121,14 +25870,14 @@
       </p:sp>
       <p:sp>
         <p:nvSpPr>
-          <p:cNvPr id="10" name="Text 8"/>
+          <p:cNvPr id="11" name="Text 9"/>
           <p:cNvSpPr txBox="1"/>
           <p:nvPr/>
         </p:nvSpPr>
         <p:spPr>
           <a:xfrm>
-            <a:off x="411480" y="1188720"/>
-            <a:ext cx="8321040" cy="731520"/>
+            <a:off x="411480" y="1143000"/>
+            <a:ext cx="8321040" cy="658368"/>
           </a:xfrm>
           <a:prstGeom prst="rect">
             <a:avLst/>
@@ -25155,21 +25904,38 @@
                 <a:ea typeface="Consolas" pitchFamily="34" charset="-122"/>
                 <a:cs typeface="Consolas" pitchFamily="34" charset="-120"/>
               </a:rPr>
-              <a:t>KeyRateDur_k  =  −(1 / PV) × (∂PV / ∂r_k)        Σₖ KeyRateDur_k  =  EffDur</a:t>
+              <a:t>KeyRateDur_k  =  −(1 / PV) × (∂PV / ∂r_k)</a:t>
             </a:r>
             <a:endParaRPr lang="en-US" sz="1800" dirty="0"/>
           </a:p>
-        </p:txBody>
-      </p:sp>
-      <p:sp>
-        <p:nvSpPr>
-          <p:cNvPr id="11" name="Text 9"/>
+          <a:p>
+            <a:pPr algn="ctr" indent="0" marL="0">
+              <a:buNone/>
+            </a:pPr>
+            <a:r>
+              <a:rPr lang="en-US" sz="1800" b="1" dirty="0">
+                <a:solidFill>
+                  <a:srgbClr val="FFFFFF"/>
+                </a:solidFill>
+                <a:latin typeface="Consolas" pitchFamily="34" charset="0"/>
+                <a:ea typeface="Consolas" pitchFamily="34" charset="-122"/>
+                <a:cs typeface="Consolas" pitchFamily="34" charset="-120"/>
+              </a:rPr>
+              <a:t>Σₖ KeyRateDur_k  =  EffDur</a:t>
+            </a:r>
+            <a:endParaRPr lang="en-US" sz="1800" dirty="0"/>
+          </a:p>
+        </p:txBody>
+      </p:sp>
+      <p:sp>
+        <p:nvSpPr>
+          <p:cNvPr id="12" name="Text 10"/>
           <p:cNvSpPr txBox="1"/>
           <p:nvPr/>
         </p:nvSpPr>
         <p:spPr>
           <a:xfrm>
-            <a:off x="320040" y="1947672"/>
+            <a:off x="320040" y="1828800"/>
             <a:ext cx="8503920" cy="256032"/>
           </a:xfrm>
           <a:prstGeom prst="rect">
@@ -25197,7 +25963,7 @@
                 <a:ea typeface="Calibri" pitchFamily="34" charset="-122"/>
                 <a:cs typeface="Calibri" pitchFamily="34" charset="-120"/>
               </a:rPr>
-              <a:t>where: r_k = benchmark yield at the kth key maturity (e.g. 2y, 5y, 10y, 30y). Sum of key rate durations across the curve = effective duration (parallel shift).</a:t>
+              <a:t>where: r_k = benchmark yield at the kth key maturity (2y, 5y, 10y, 30y…). Summed across the curve, key rate durations give back effective duration.</a:t>
             </a:r>
             <a:endParaRPr lang="en-US" sz="1100" dirty="0"/>
           </a:p>
@@ -25218,7 +25984,7 @@
           </p:nvPr>
         </p:nvGraphicFramePr>
         <p:xfrm>
-          <a:off x="320040" y="2148840"/>
+          <a:off x="320040" y="2240280"/>
           <a:ext cx="8503920" cy="914400"/>
         </p:xfrm>
         <a:graphic>
@@ -25227,10 +25993,10 @@
               <a:tblPr/>
               <a:tblGrid>
                 <a:gridCol w="2103120"/>
-                <a:gridCol w="1600200"/>
-                <a:gridCol w="1600200"/>
-                <a:gridCol w="1600200"/>
-                <a:gridCol w="1600200"/>
+                <a:gridCol w="1463040"/>
+                <a:gridCol w="1463040"/>
+                <a:gridCol w="1554480"/>
+                <a:gridCol w="1920240"/>
               </a:tblGrid>
               <a:tr h="274320">
                 <a:tc>
@@ -25450,7 +26216,7 @@
                           <a:ea typeface="Trebuchet MS" pitchFamily="34" charset="-122"/>
                           <a:cs typeface="Trebuchet MS" pitchFamily="34" charset="-120"/>
                         </a:rPr>
-                        <a:t>Portfolio (EW)</a:t>
+                        <a:t>Portfolio (MV wts)</a:t>
                       </a:r>
                       <a:endParaRPr lang="en-US" sz="1100" dirty="0">
                         <a:latin typeface="Trebuchet MS" charset="0"/>
@@ -26498,14 +27264,14 @@
       </p:graphicFrame>
       <p:sp>
         <p:nvSpPr>
-          <p:cNvPr id="13" name="Shape 10"/>
+          <p:cNvPr id="14" name="Shape 11"/>
           <p:cNvSpPr/>
           <p:nvPr/>
         </p:nvSpPr>
         <p:spPr>
           <a:xfrm>
-            <a:off x="320040" y="3840480"/>
-            <a:ext cx="8503920" cy="502920"/>
+            <a:off x="320040" y="3794760"/>
+            <a:ext cx="8503920" cy="548640"/>
           </a:xfrm>
           <a:prstGeom prst="rect">
             <a:avLst/>
@@ -26518,14 +27284,14 @@
       </p:sp>
       <p:sp>
         <p:nvSpPr>
-          <p:cNvPr id="14" name="Shape 11"/>
+          <p:cNvPr id="15" name="Shape 12"/>
           <p:cNvSpPr/>
           <p:nvPr/>
         </p:nvSpPr>
         <p:spPr>
           <a:xfrm>
-            <a:off x="320040" y="3840480"/>
-            <a:ext cx="73152" cy="502920"/>
+            <a:off x="320040" y="3794760"/>
+            <a:ext cx="73152" cy="548640"/>
           </a:xfrm>
           <a:prstGeom prst="rect">
             <a:avLst/>
@@ -26538,13 +27304,13 @@
       </p:sp>
       <p:sp>
         <p:nvSpPr>
-          <p:cNvPr id="15" name="Text 12"/>
+          <p:cNvPr id="16" name="Text 13"/>
           <p:cNvSpPr txBox="1"/>
           <p:nvPr/>
         </p:nvSpPr>
         <p:spPr>
           <a:xfrm>
-            <a:off x="457200" y="3886200"/>
+            <a:off x="457200" y="3840480"/>
             <a:ext cx="8275320" cy="256032"/>
           </a:xfrm>
           <a:prstGeom prst="rect">
@@ -26580,14 +27346,14 @@
       </p:sp>
       <p:sp>
         <p:nvSpPr>
-          <p:cNvPr id="16" name="Text 13"/>
+          <p:cNvPr id="17" name="Text 14"/>
           <p:cNvSpPr txBox="1"/>
           <p:nvPr/>
         </p:nvSpPr>
         <p:spPr>
           <a:xfrm>
-            <a:off x="457200" y="4160520"/>
-            <a:ext cx="8275320" cy="137160"/>
+            <a:off x="457200" y="4114800"/>
+            <a:ext cx="8275320" cy="182880"/>
           </a:xfrm>
           <a:prstGeom prst="rect">
             <a:avLst/>
@@ -26614,7 +27380,7 @@
                 <a:ea typeface="Calibri" pitchFamily="34" charset="-122"/>
                 <a:cs typeface="Calibri" pitchFamily="34" charset="-120"/>
               </a:rPr>
-              <a:t>With a steepening view, over-weight short-KRD bonds and under-weight long-KRD bonds; the portfolio loses less (or gains more) than a pure duration-matched index.</a:t>
+              <a:t>Expect the long end to sell off? Cut 10y key rate duration and add at the front. A single portfolio duration cannot express that trade.</a:t>
             </a:r>
             <a:endParaRPr lang="en-US" sz="1200" dirty="0"/>
           </a:p>
@@ -26713,7 +27479,7 @@
               <a:buNone/>
             </a:pPr>
             <a:r>
-              <a:rPr lang="en-US" sz="1600" b="1" dirty="0">
+              <a:rPr lang="en-US" sz="1700" b="1" dirty="0">
                 <a:solidFill>
                   <a:srgbClr val="FFFFFF"/>
                 </a:solidFill>
@@ -26721,9 +27487,9 @@
                 <a:ea typeface="Trebuchet MS" pitchFamily="34" charset="-122"/>
                 <a:cs typeface="Trebuchet MS" pitchFamily="34" charset="-120"/>
               </a:rPr>
-              <a:t>Key rate duration worked example — a portfolio of two bonds facing a curve steepening: sell the bond whose key tenor suffers the most</a:t>
-            </a:r>
-            <a:endParaRPr lang="en-US" sz="1600" dirty="0"/>
+              <a:t>Key rate duration worked example — under a bear steepening BOTH bonds lose, but the 10-year loses roughly twice as much</a:t>
+            </a:r>
+            <a:endParaRPr lang="en-US" sz="1700" dirty="0"/>
           </a:p>
         </p:txBody>
       </p:sp>
@@ -26825,7 +27591,7 @@
                 <a:ea typeface="Calibri" pitchFamily="34" charset="-122"/>
                 <a:cs typeface="Calibri" pitchFamily="34" charset="-120"/>
               </a:rPr>
-              <a:t>Source: CFA Institute, Curriculum Vol 6, Learning Module 13, §4 Question Set, pp. 332–333.</a:t>
+              <a:t>Source: CFA Institute, Curriculum Vol 6, Learning Module 13, §4 Question Set, Questions 1–3, pp. 332–333.</a:t>
             </a:r>
             <a:endParaRPr lang="en-US" sz="750" dirty="0"/>
           </a:p>
@@ -26867,7 +27633,7 @@
                 <a:ea typeface="Calibri" pitchFamily="34" charset="-122"/>
                 <a:cs typeface="Calibri" pitchFamily="34" charset="-120"/>
               </a:rPr>
-              <a:t>Curve steepens: short rates up 100 bp, 5y up 150 bp, 10y up 200 bp, 20y up 250 bp, 30y up 300 bp. Equal-weight portfolio of two bonds — keep one, sell the other.</a:t>
+              <a:t>Bear steepener: 1y up 100 bp, 5y up 150 bp, 10y up 200 bp, 20y up 250 bp, 30y up 300 bp. Equal positions in two bonds — what do you do?</a:t>
             </a:r>
             <a:endParaRPr lang="en-US" sz="1300" dirty="0"/>
           </a:p>
@@ -26896,11 +27662,11 @@
             <a:tbl>
               <a:tblPr/>
               <a:tblGrid>
-                <a:gridCol w="1371600"/>
-                <a:gridCol w="1737360"/>
-                <a:gridCol w="1554480"/>
-                <a:gridCol w="1920240"/>
-                <a:gridCol w="1920240"/>
+                <a:gridCol w="1280160"/>
+                <a:gridCol w="1463040"/>
+                <a:gridCol w="1463040"/>
+                <a:gridCol w="1828800"/>
+                <a:gridCol w="2468880"/>
               </a:tblGrid>
               <a:tr h="274320">
                 <a:tc>
@@ -27670,8 +28436,8 @@
         </p:nvSpPr>
         <p:spPr>
           <a:xfrm>
-            <a:off x="320040" y="2514600"/>
-            <a:ext cx="8503920" cy="1828800"/>
+            <a:off x="320040" y="2240280"/>
+            <a:ext cx="8503920" cy="2057400"/>
           </a:xfrm>
           <a:prstGeom prst="rect">
             <a:avLst/>
@@ -27695,7 +28461,7 @@
         </p:nvSpPr>
         <p:spPr>
           <a:xfrm>
-            <a:off x="457200" y="2560320"/>
+            <a:off x="457200" y="2286000"/>
             <a:ext cx="8229600" cy="256032"/>
           </a:xfrm>
           <a:prstGeom prst="rect">
@@ -27723,7 +28489,7 @@
                 <a:ea typeface="Trebuchet MS" pitchFamily="34" charset="-122"/>
                 <a:cs typeface="Trebuchet MS" pitchFamily="34" charset="-120"/>
               </a:rPr>
-              <a:t>DECISION — WHICH BOND TO SELL</a:t>
+              <a:t>DECISION — WHAT THE KRDs ACTUALLY TELL YOU</a:t>
             </a:r>
             <a:endParaRPr lang="en-US" sz="1100" dirty="0"/>
           </a:p>
@@ -27737,7 +28503,7 @@
         </p:nvSpPr>
         <p:spPr>
           <a:xfrm>
-            <a:off x="457200" y="2852928"/>
+            <a:off x="457200" y="2578608"/>
             <a:ext cx="8229600" cy="457200"/>
           </a:xfrm>
           <a:prstGeom prst="rect">
@@ -27765,7 +28531,7 @@
                 <a:ea typeface="Calibri" pitchFamily="34" charset="-122"/>
                 <a:cs typeface="Calibri" pitchFamily="34" charset="-120"/>
               </a:rPr>
-              <a:t>Both bonds lose under the steepener; the question is magnitude. Use KRD × shift at each bond's key tenor.</a:t>
+              <a:t>Multiply each bond's key rate duration by the forecast shift AT ITS OWN TENOR — not by a single parallel number.</a:t>
             </a:r>
             <a:endParaRPr lang="en-US" sz="1200" dirty="0"/>
           </a:p>
@@ -27779,8 +28545,8 @@
         </p:nvSpPr>
         <p:spPr>
           <a:xfrm>
-            <a:off x="457200" y="3364992"/>
-            <a:ext cx="8229600" cy="466344"/>
+            <a:off x="457200" y="3090672"/>
+            <a:ext cx="8229600" cy="694944"/>
           </a:xfrm>
           <a:prstGeom prst="rect">
             <a:avLst/>
@@ -27802,7 +28568,7 @@
               <a:buNone/>
             </a:pPr>
             <a:r>
-              <a:rPr lang="en-US" sz="1050" b="1" dirty="0">
+              <a:rPr lang="en-US" sz="1150" b="1" dirty="0">
                 <a:solidFill>
                   <a:srgbClr val="1B2A4A"/>
                 </a:solidFill>
@@ -27819,7 +28585,7 @@
               <a:buNone/>
             </a:pPr>
             <a:r>
-              <a:rPr lang="en-US" sz="1050" dirty="0">
+              <a:rPr lang="en-US" sz="1150" dirty="0">
                 <a:solidFill>
                   <a:srgbClr val="334155"/>
                 </a:solidFill>
@@ -27827,7 +28593,7 @@
                 <a:ea typeface="Calibri" pitchFamily="34" charset="-122"/>
                 <a:cs typeface="Calibri" pitchFamily="34" charset="-120"/>
               </a:rPr>
-              <a:t>Bond A: −2.702 × 0.0150 = −4.05%
+              <a:t>Bond A: −2.702 × 0.0150 = −4.05%.   Bond B: −3.953 × 0.0200 = −7.91%
 </a:t>
             </a:r>
             <a:pPr indent="0" marL="0">
@@ -27837,7 +28603,7 @@
               <a:buNone/>
             </a:pPr>
             <a:r>
-              <a:rPr lang="en-US" sz="1050" b="1" dirty="0">
+              <a:rPr lang="en-US" sz="1150" b="1" dirty="0">
                 <a:solidFill>
                   <a:srgbClr val="1B2A4A"/>
                 </a:solidFill>
@@ -27854,7 +28620,7 @@
               <a:buNone/>
             </a:pPr>
             <a:r>
-              <a:rPr lang="en-US" sz="1050" dirty="0">
+              <a:rPr lang="en-US" sz="1150" dirty="0">
                 <a:solidFill>
                   <a:srgbClr val="334155"/>
                 </a:solidFill>
@@ -27862,7 +28628,7 @@
                 <a:ea typeface="Calibri" pitchFamily="34" charset="-122"/>
                 <a:cs typeface="Calibri" pitchFamily="34" charset="-120"/>
               </a:rPr>
-              <a:t>Bond B: −3.953 × 0.0200 = −7.91%
+              <a:t>CFA answer: sell BOTH — every tenor is forecast higher, so both positions lose
 </a:t>
             </a:r>
             <a:pPr indent="0" marL="0">
@@ -27872,7 +28638,7 @@
               <a:buNone/>
             </a:pPr>
             <a:r>
-              <a:rPr lang="en-US" sz="1050" b="1" dirty="0">
+              <a:rPr lang="en-US" sz="1150" b="1" dirty="0">
                 <a:solidFill>
                   <a:srgbClr val="1B2A4A"/>
                 </a:solidFill>
@@ -27889,7 +28655,7 @@
               <a:buNone/>
             </a:pPr>
             <a:r>
-              <a:rPr lang="en-US" sz="1050" dirty="0">
+              <a:rPr lang="en-US" sz="1150" dirty="0">
                 <a:solidFill>
                   <a:srgbClr val="334155"/>
                 </a:solidFill>
@@ -27897,44 +28663,9 @@
                 <a:ea typeface="Calibri" pitchFamily="34" charset="-122"/>
                 <a:cs typeface="Calibri" pitchFamily="34" charset="-120"/>
               </a:rPr>
-              <a:t>Bond B's losses are ≈ 2× Bond A's — sell Bond B first.
-</a:t>
-            </a:r>
-            <a:pPr indent="0" marL="0">
-              <a:spcAft>
-                <a:spcPts val="200"/>
-              </a:spcAft>
-              <a:buNone/>
-            </a:pPr>
-            <a:r>
-              <a:rPr lang="en-US" sz="1050" b="1" dirty="0">
-                <a:solidFill>
-                  <a:srgbClr val="1B2A4A"/>
-                </a:solidFill>
-                <a:latin typeface="Calibri" pitchFamily="34" charset="0"/>
-                <a:ea typeface="Calibri" pitchFamily="34" charset="-122"/>
-                <a:cs typeface="Calibri" pitchFamily="34" charset="-120"/>
-              </a:rPr>
-              <a:t>4. </a:t>
-            </a:r>
-            <a:pPr indent="0" marL="0">
-              <a:spcAft>
-                <a:spcPts val="200"/>
-              </a:spcAft>
-              <a:buNone/>
-            </a:pPr>
-            <a:r>
-              <a:rPr lang="en-US" sz="1050" dirty="0">
-                <a:solidFill>
-                  <a:srgbClr val="334155"/>
-                </a:solidFill>
-                <a:latin typeface="Calibri" pitchFamily="34" charset="0"/>
-                <a:ea typeface="Calibri" pitchFamily="34" charset="-122"/>
-                <a:cs typeface="Calibri" pitchFamily="34" charset="-120"/>
-              </a:rPr>
-              <a:t>Alternative action: pair-trade the steepener — receive 5y (long Bond A), pay 10y (short Bond B).</a:t>
-            </a:r>
-            <a:endParaRPr lang="en-US" sz="1050" dirty="0"/>
+              <a:t>If only one can go, it is Bond B: the bigger KRD is hit by the bigger shift, ≈ 2× the loss</a:t>
+            </a:r>
+            <a:endParaRPr lang="en-US" sz="1150" dirty="0"/>
           </a:p>
         </p:txBody>
       </p:sp>
@@ -27946,7 +28677,7 @@
         </p:nvSpPr>
         <p:spPr>
           <a:xfrm>
-            <a:off x="411480" y="3904488"/>
+            <a:off x="411480" y="3858768"/>
             <a:ext cx="8321040" cy="365760"/>
           </a:xfrm>
           <a:prstGeom prst="rect">
@@ -27966,7 +28697,7 @@
         </p:nvSpPr>
         <p:spPr>
           <a:xfrm>
-            <a:off x="457200" y="3904488"/>
+            <a:off x="457200" y="3858768"/>
             <a:ext cx="8229600" cy="365760"/>
           </a:xfrm>
           <a:prstGeom prst="rect">
@@ -27994,7 +28725,7 @@
                 <a:ea typeface="Consolas" pitchFamily="34" charset="-122"/>
                 <a:cs typeface="Consolas" pitchFamily="34" charset="-120"/>
               </a:rPr>
-              <a:t>Sell Bond B. KRD isolates the bond's exposure to the specific tenor that's moving most.</a:t>
+              <a:t>Both bonds lose. Sell both; if forced to choose one, Bond B at −7.91%.</a:t>
             </a:r>
             <a:endParaRPr lang="en-US" sz="1150" dirty="0"/>
           </a:p>
@@ -28205,7 +28936,7 @@
                 <a:ea typeface="Calibri" pitchFamily="34" charset="-122"/>
                 <a:cs typeface="Calibri" pitchFamily="34" charset="-120"/>
               </a:rPr>
-              <a:t>Source: CFA Institute, Curriculum Vol 6, Learning Module 13, §5 "Empirical Duration", pp. 333–336.</a:t>
+              <a:t>Source: CFA Institute, Curriculum Vol 6, Learning Module 13, §5 "Empirical Duration", Exhibits 6–7 and Example 4, pp. 333–336.</a:t>
             </a:r>
             <a:endParaRPr lang="en-US" sz="750" dirty="0"/>
           </a:p>
@@ -28262,7 +28993,7 @@
         <p:spPr>
           <a:xfrm>
             <a:off x="320040" y="1143000"/>
-            <a:ext cx="4160520" cy="3200400"/>
+            <a:ext cx="4160520" cy="2331720"/>
           </a:xfrm>
           <a:prstGeom prst="rect">
             <a:avLst/>
@@ -28282,7 +29013,7 @@
         <p:spPr>
           <a:xfrm>
             <a:off x="320040" y="1143000"/>
-            <a:ext cx="73152" cy="3200400"/>
+            <a:ext cx="73152" cy="2331720"/>
           </a:xfrm>
           <a:prstGeom prst="rect">
             <a:avLst/>
@@ -28344,7 +29075,7 @@
         <p:spPr>
           <a:xfrm>
             <a:off x="457200" y="1463040"/>
-            <a:ext cx="3931920" cy="2834640"/>
+            <a:ext cx="3931920" cy="1965960"/>
           </a:xfrm>
           <a:prstGeom prst="rect">
             <a:avLst/>
@@ -28371,7 +29102,7 @@
                 <a:ea typeface="Calibri" pitchFamily="34" charset="-122"/>
                 <a:cs typeface="Calibri" pitchFamily="34" charset="-120"/>
               </a:rPr>
-              <a:t>Formula-based from a bond's own cash flows or an OAS model. Assumes spreads uncorrelated with the benchmark.</a:t>
+              <a:t>Formula-based from a bond's own cash flows or an OAS model. Assumes spreads are uncorrelated with the benchmark.</a:t>
             </a:r>
             <a:endParaRPr lang="en-US" sz="1200" dirty="0"/>
           </a:p>
@@ -28417,7 +29148,7 @@
                 <a:ea typeface="Calibri" pitchFamily="34" charset="-122"/>
                 <a:cs typeface="Calibri" pitchFamily="34" charset="-120"/>
               </a:rPr>
-              <a:t>Fails when: credit spreads widen as benchmarks rally (e.g. Mar 2020 — the COVID flight-to-quality episode).</a:t>
+              <a:t>Fails when: credit spreads widen as benchmarks rally — late Feb to Mar 2020, the COVID flight-to-quality episode.</a:t>
             </a:r>
             <a:endParaRPr lang="en-US" sz="1200" dirty="0"/>
           </a:p>
@@ -28432,7 +29163,7 @@
         <p:spPr>
           <a:xfrm>
             <a:off x="4663440" y="1143000"/>
-            <a:ext cx="4160520" cy="3200400"/>
+            <a:ext cx="4160520" cy="2331720"/>
           </a:xfrm>
           <a:prstGeom prst="rect">
             <a:avLst/>
@@ -28452,7 +29183,7 @@
         <p:spPr>
           <a:xfrm>
             <a:off x="4663440" y="1143000"/>
-            <a:ext cx="73152" cy="3200400"/>
+            <a:ext cx="73152" cy="2331720"/>
           </a:xfrm>
           <a:prstGeom prst="rect">
             <a:avLst/>
@@ -28514,7 +29245,7 @@
         <p:spPr>
           <a:xfrm>
             <a:off x="4800600" y="1463040"/>
-            <a:ext cx="3931920" cy="2834640"/>
+            <a:ext cx="3931920" cy="1965960"/>
           </a:xfrm>
           <a:prstGeom prst="rect">
             <a:avLst/>
@@ -28601,8 +29332,8 @@
         </p:nvSpPr>
         <p:spPr>
           <a:xfrm>
-            <a:off x="320040" y="4434840"/>
-            <a:ext cx="8503920" cy="0"/>
+            <a:off x="320040" y="3584448"/>
+            <a:ext cx="8503920" cy="804672"/>
           </a:xfrm>
           <a:prstGeom prst="rect">
             <a:avLst/>
@@ -28621,8 +29352,8 @@
         </p:nvSpPr>
         <p:spPr>
           <a:xfrm>
-            <a:off x="320040" y="4434840"/>
-            <a:ext cx="73152" cy="0"/>
+            <a:off x="320040" y="3584448"/>
+            <a:ext cx="73152" cy="804672"/>
           </a:xfrm>
           <a:prstGeom prst="rect">
             <a:avLst/>
@@ -28632,6 +29363,90 @@
           </a:solidFill>
           <a:ln/>
         </p:spPr>
+      </p:sp>
+      <p:sp>
+        <p:nvSpPr>
+          <p:cNvPr id="19" name="Text 17"/>
+          <p:cNvSpPr txBox="1"/>
+          <p:nvPr/>
+        </p:nvSpPr>
+        <p:spPr>
+          <a:xfrm>
+            <a:off x="457200" y="3630168"/>
+            <a:ext cx="8275320" cy="256032"/>
+          </a:xfrm>
+          <a:prstGeom prst="rect">
+            <a:avLst/>
+          </a:prstGeom>
+          <a:noFill/>
+          <a:ln/>
+        </p:spPr>
+        <p:txBody>
+          <a:bodyPr wrap="square" lIns="508" tIns="508" rIns="508" bIns="508" rtlCol="0" anchor="ctr">
+            <a:normAutofit/>
+            <a:spAutoFit/>
+          </a:bodyPr>
+          <a:lstStyle/>
+          <a:p>
+            <a:pPr algn="l" indent="0" marL="0">
+              <a:buNone/>
+            </a:pPr>
+            <a:r>
+              <a:rPr lang="en-US" sz="1100" b="1" spc="400" kern="0" dirty="0">
+                <a:solidFill>
+                  <a:srgbClr val="E8600A"/>
+                </a:solidFill>
+                <a:latin typeface="Trebuchet MS" pitchFamily="34" charset="0"/>
+                <a:ea typeface="Trebuchet MS" pitchFamily="34" charset="-122"/>
+                <a:cs typeface="Trebuchet MS" pitchFamily="34" charset="-120"/>
+              </a:rPr>
+              <a:t>HOW TO CHOOSE — IT IS A CORRELATION QUESTION, NOT A MATHS ONE</a:t>
+            </a:r>
+            <a:endParaRPr lang="en-US" sz="1100" dirty="0"/>
+          </a:p>
+        </p:txBody>
+      </p:sp>
+      <p:sp>
+        <p:nvSpPr>
+          <p:cNvPr id="20" name="Text 18"/>
+          <p:cNvSpPr txBox="1"/>
+          <p:nvPr/>
+        </p:nvSpPr>
+        <p:spPr>
+          <a:xfrm>
+            <a:off x="457200" y="3904488"/>
+            <a:ext cx="8275320" cy="438912"/>
+          </a:xfrm>
+          <a:prstGeom prst="rect">
+            <a:avLst/>
+          </a:prstGeom>
+          <a:noFill/>
+          <a:ln/>
+        </p:spPr>
+        <p:txBody>
+          <a:bodyPr wrap="square" lIns="508" tIns="508" rIns="508" bIns="508" rtlCol="0" anchor="t">
+            <a:normAutofit/>
+            <a:spAutoFit/>
+          </a:bodyPr>
+          <a:lstStyle/>
+          <a:p>
+            <a:pPr algn="l" indent="0" marL="0">
+              <a:buNone/>
+            </a:pPr>
+            <a:r>
+              <a:rPr lang="en-US" sz="1200" dirty="0">
+                <a:solidFill>
+                  <a:srgbClr val="334155"/>
+                </a:solidFill>
+                <a:latin typeface="Calibri" pitchFamily="34" charset="0"/>
+                <a:ea typeface="Calibri" pitchFamily="34" charset="-122"/>
+                <a:cs typeface="Calibri" pitchFamily="34" charset="-120"/>
+              </a:rPr>
+              <a:t>If benchmark yields and the bond's spread are effectively uncorrelated — governments, high-grade credit, calm markets — analytical duration is fine. Where they move against each other — high yield, stressed markets — empirical duration is the more accurate forecast of the price change.</a:t>
+            </a:r>
+            <a:endParaRPr lang="en-US" sz="1200" dirty="0"/>
+          </a:p>
+        </p:txBody>
       </p:sp>
     </p:spTree>
   </p:cSld>
@@ -28858,7 +29673,7 @@
                 <a:ea typeface="Calibri" pitchFamily="34" charset="-122"/>
                 <a:cs typeface="Calibri" pitchFamily="34" charset="-120"/>
               </a:rPr>
-              <a:t>Bond total return = coupon + reinvested-coupon income + capital gain/loss on sale. Reinvestment and price risks are inverse in rate direction.</a:t>
+              <a:t>Total return = coupons + reinvestment income + capital gain/loss on sale. Reinvestment and price risk move in OPPOSITE directions with rates.</a:t>
             </a:r>
             <a:endParaRPr lang="en-US" sz="1150" dirty="0"/>
           </a:p>
@@ -28940,7 +29755,7 @@
                 <a:ea typeface="Calibri" pitchFamily="34" charset="-122"/>
                 <a:cs typeface="Calibri" pitchFamily="34" charset="-120"/>
               </a:rPr>
-              <a:t>Duration gap = MacDur − horizon. Negative → falling-rate risk. Positive → rising-rate risk. Zero → nearly immunised against one-time parallel shifts.</a:t>
+              <a:t>Duration gap = MacDur − horizon. Positive → price risk, fear rising rates. Negative → reinvestment risk, fear falling rates. Zero → nearly immunised.</a:t>
             </a:r>
             <a:endParaRPr lang="en-US" sz="1150" dirty="0"/>
           </a:p>
@@ -29022,7 +29837,7 @@
                 <a:ea typeface="Calibri" pitchFamily="34" charset="-122"/>
                 <a:cs typeface="Calibri" pitchFamily="34" charset="-120"/>
               </a:rPr>
-              <a:t>Duration family: MacDur (time, in years) → ModDur = MacDur / (1+r) (% per Δy) → MoneyDur = ModDur × PV_full (currency per Δy) → PVBP = MoneyDur × 0.0001 (currency per 1 bp).</a:t>
+              <a:t>The chain: MacDur in PERIODS → ÷(1+r per period) → ÷m → AnnModDur (% per Δy) → ×PV_full → MoneyDur (currency) → ×0.0001 → PVBP (currency per bp).</a:t>
             </a:r>
             <a:endParaRPr lang="en-US" sz="1150" dirty="0"/>
           </a:p>
@@ -29104,7 +29919,7 @@
                 <a:ea typeface="Calibri" pitchFamily="34" charset="-122"/>
                 <a:cs typeface="Calibri" pitchFamily="34" charset="-120"/>
               </a:rPr>
-              <a:t>Duration drivers: lower coupon, lower yield, longer maturity → higher duration. Durations are reliable rankings without a calculator once those rules are internalised.</a:t>
+              <a:t>Duration is quoted POSITIVE; the minus lives in the formula: %ΔPV ≈ −ModDur × Δy. Lower coupon, lower yield, longer maturity → higher duration.</a:t>
             </a:r>
             <a:endParaRPr lang="en-US" sz="1150" dirty="0"/>
           </a:p>
@@ -29186,7 +30001,7 @@
                 <a:ea typeface="Calibri" pitchFamily="34" charset="-122"/>
                 <a:cs typeface="Calibri" pitchFamily="34" charset="-120"/>
               </a:rPr>
-              <a:t>Convexity adjustment %ΔPV ≈ −MD·Δy + ½·C·Δy² closes the residual linearisation error; for BRWA at 100 bp it cuts the 12 bp duration-only error down to &lt;0.3 bp.</a:t>
+              <a:t>Convexity adjustment %ΔPV ≈ −MD·Δy + ½·C·Δy². On BRWA at 100 bp it cuts a 12 bp duration-only error to under 0.3 bp — and it is positive both ways.</a:t>
             </a:r>
             <a:endParaRPr lang="en-US" sz="1150" dirty="0"/>
           </a:p>
@@ -29268,7 +30083,7 @@
                 <a:ea typeface="Calibri" pitchFamily="34" charset="-122"/>
                 <a:cs typeface="Calibri" pitchFamily="34" charset="-120"/>
               </a:rPr>
-              <a:t>Portfolio duration/convexity = MV-weighted averages. Fast and practical but implicitly assumes a PARALLEL curve shift — mask steepening / twisting risk.</a:t>
+              <a:t>Portfolio duration and convexity are MARKET-VALUE-weighted averages. Fast, standard, and silently assuming a PARALLEL shift — which masks steepening risk.</a:t>
             </a:r>
             <a:endParaRPr lang="en-US" sz="1150" dirty="0"/>
           </a:p>
@@ -29350,7 +30165,7 @@
                 <a:ea typeface="Calibri" pitchFamily="34" charset="-122"/>
                 <a:cs typeface="Calibri" pitchFamily="34" charset="-120"/>
               </a:rPr>
-              <a:t>Effective duration / convexity are curve-based and valid for callables, puttables, MBS. Callables can go NEGATIVELY CONVEX when rates fall (Viviyu EffDur = 7.60, EffCon = −283).</a:t>
+              <a:t>Bonds with embedded options need EFFECTIVE duration: bump the benchmark CURVE, reprice with an option model. Callables can go negatively convex (EffDur 7.60, EffCon −283).</a:t>
             </a:r>
             <a:endParaRPr lang="en-US" sz="1150" dirty="0"/>
           </a:p>
@@ -29432,7 +30247,7 @@
                 <a:ea typeface="Calibri" pitchFamily="34" charset="-122"/>
                 <a:cs typeface="Calibri" pitchFamily="34" charset="-120"/>
               </a:rPr>
-              <a:t>Key rate duration isolates exposure to individual tenors (sum = EffDur) and drives steepener/flattener trades. Empirical duration is the correct measure for credit-risky bonds in stress — yields and spreads become negatively correlated.</a:t>
+              <a:t>Key rate durations split exposure by tenor and sum back to EffDur. Empirical duration beats analytical for credit-risky bonds in stress, where spreads and benchmark yields move opposite ways.</a:t>
             </a:r>
             <a:endParaRPr lang="en-US" sz="1150" dirty="0"/>
           </a:p>
@@ -29913,7 +30728,7 @@
                 <a:ea typeface="Calibri" pitchFamily="34" charset="-122"/>
                 <a:cs typeface="Calibri" pitchFamily="34" charset="-120"/>
               </a:rPr>
-              <a:t>Source: CFA Institute, Curriculum Vol 6, Learning Module 10, "Sources of Return from Investing in a Fixed-Rate Bond", pp. 235–244.</a:t>
+              <a:t>Source: CFA Institute, Curriculum Vol 6, Learning Module 10, §2 "Sources of Return from Investing in a Fixed-Rate Bond", pp. 239–244.</a:t>
             </a:r>
             <a:endParaRPr lang="en-US" sz="750" dirty="0"/>
           </a:p>
@@ -30017,7 +30832,7 @@
                 <a:ea typeface="Consolas" pitchFamily="34" charset="-122"/>
                 <a:cs typeface="Consolas" pitchFamily="34" charset="-120"/>
               </a:rPr>
-              <a:t>r_horizon  =  [ (FV_coupons + Sale_price)  /  Purchase_price ]^(1/T)  −  1</a:t>
+              <a:t>r_horizon  =  [ (FV_coupons + Sale_price) / Purchase_price ]^(1/T)  −  1</a:t>
             </a:r>
             <a:endParaRPr lang="en-US" sz="1800" dirty="0"/>
           </a:p>
@@ -30059,7 +30874,7 @@
                 <a:ea typeface="Calibri" pitchFamily="34" charset="-122"/>
                 <a:cs typeface="Calibri" pitchFamily="34" charset="-120"/>
               </a:rPr>
-              <a:t>where: FV_coupons = future value of reinvested coupons at the reinvestment rate; Sale_price = bond price at horizon; T = years held.</a:t>
+              <a:t>where: FV_coupons = future value of reinvested coupons; Sale_price = price at horizon (or par at maturity); T = years held.</a:t>
             </a:r>
             <a:endParaRPr lang="en-US" sz="1100" dirty="0"/>
           </a:p>
@@ -30073,8 +30888,8 @@
         </p:nvSpPr>
         <p:spPr>
           <a:xfrm>
-            <a:off x="320040" y="2057400"/>
-            <a:ext cx="8503920" cy="658368"/>
+            <a:off x="320040" y="2240280"/>
+            <a:ext cx="8503920" cy="640080"/>
           </a:xfrm>
           <a:prstGeom prst="rect">
             <a:avLst/>
@@ -30093,8 +30908,8 @@
         </p:nvSpPr>
         <p:spPr>
           <a:xfrm>
-            <a:off x="320040" y="2057400"/>
-            <a:ext cx="91440" cy="658368"/>
+            <a:off x="320040" y="2240280"/>
+            <a:ext cx="91440" cy="640080"/>
           </a:xfrm>
           <a:prstGeom prst="rect">
             <a:avLst/>
@@ -30113,8 +30928,8 @@
         </p:nvSpPr>
         <p:spPr>
           <a:xfrm>
-            <a:off x="502920" y="2057400"/>
-            <a:ext cx="365760" cy="658368"/>
+            <a:off x="502920" y="2240280"/>
+            <a:ext cx="365760" cy="640080"/>
           </a:xfrm>
           <a:prstGeom prst="rect">
             <a:avLst/>
@@ -30155,8 +30970,8 @@
         </p:nvSpPr>
         <p:spPr>
           <a:xfrm>
-            <a:off x="868680" y="2093976"/>
-            <a:ext cx="7863840" cy="296266"/>
+            <a:off x="868680" y="2276856"/>
+            <a:ext cx="7863840" cy="288036"/>
           </a:xfrm>
           <a:prstGeom prst="rect">
             <a:avLst/>
@@ -30197,8 +31012,8 @@
         </p:nvSpPr>
         <p:spPr>
           <a:xfrm>
-            <a:off x="868680" y="2353666"/>
-            <a:ext cx="7863840" cy="362102"/>
+            <a:off x="868680" y="2528316"/>
+            <a:ext cx="7863840" cy="352044"/>
           </a:xfrm>
           <a:prstGeom prst="rect">
             <a:avLst/>
@@ -30239,8 +31054,8 @@
         </p:nvSpPr>
         <p:spPr>
           <a:xfrm>
-            <a:off x="320040" y="2788920"/>
-            <a:ext cx="8503920" cy="658368"/>
+            <a:off x="320040" y="2944368"/>
+            <a:ext cx="8503920" cy="640080"/>
           </a:xfrm>
           <a:prstGeom prst="rect">
             <a:avLst/>
@@ -30259,8 +31074,8 @@
         </p:nvSpPr>
         <p:spPr>
           <a:xfrm>
-            <a:off x="320040" y="2788920"/>
-            <a:ext cx="91440" cy="658368"/>
+            <a:off x="320040" y="2944368"/>
+            <a:ext cx="91440" cy="640080"/>
           </a:xfrm>
           <a:prstGeom prst="rect">
             <a:avLst/>
@@ -30279,8 +31094,8 @@
         </p:nvSpPr>
         <p:spPr>
           <a:xfrm>
-            <a:off x="502920" y="2788920"/>
-            <a:ext cx="365760" cy="658368"/>
+            <a:off x="502920" y="2944368"/>
+            <a:ext cx="365760" cy="640080"/>
           </a:xfrm>
           <a:prstGeom prst="rect">
             <a:avLst/>
@@ -30321,8 +31136,8 @@
         </p:nvSpPr>
         <p:spPr>
           <a:xfrm>
-            <a:off x="868680" y="2825496"/>
-            <a:ext cx="7863840" cy="296266"/>
+            <a:off x="868680" y="2980944"/>
+            <a:ext cx="7863840" cy="288036"/>
           </a:xfrm>
           <a:prstGeom prst="rect">
             <a:avLst/>
@@ -30363,8 +31178,8 @@
         </p:nvSpPr>
         <p:spPr>
           <a:xfrm>
-            <a:off x="868680" y="3085186"/>
-            <a:ext cx="7863840" cy="362102"/>
+            <a:off x="868680" y="3232404"/>
+            <a:ext cx="7863840" cy="352044"/>
           </a:xfrm>
           <a:prstGeom prst="rect">
             <a:avLst/>
@@ -30405,8 +31220,8 @@
         </p:nvSpPr>
         <p:spPr>
           <a:xfrm>
-            <a:off x="320040" y="3520440"/>
-            <a:ext cx="8503920" cy="658368"/>
+            <a:off x="320040" y="3648456"/>
+            <a:ext cx="8503920" cy="640080"/>
           </a:xfrm>
           <a:prstGeom prst="rect">
             <a:avLst/>
@@ -30425,8 +31240,8 @@
         </p:nvSpPr>
         <p:spPr>
           <a:xfrm>
-            <a:off x="320040" y="3520440"/>
-            <a:ext cx="91440" cy="658368"/>
+            <a:off x="320040" y="3648456"/>
+            <a:ext cx="91440" cy="640080"/>
           </a:xfrm>
           <a:prstGeom prst="rect">
             <a:avLst/>
@@ -30445,8 +31260,8 @@
         </p:nvSpPr>
         <p:spPr>
           <a:xfrm>
-            <a:off x="502920" y="3520440"/>
-            <a:ext cx="365760" cy="658368"/>
+            <a:off x="502920" y="3648456"/>
+            <a:ext cx="365760" cy="640080"/>
           </a:xfrm>
           <a:prstGeom prst="rect">
             <a:avLst/>
@@ -30487,8 +31302,8 @@
         </p:nvSpPr>
         <p:spPr>
           <a:xfrm>
-            <a:off x="868680" y="3557016"/>
-            <a:ext cx="7863840" cy="296266"/>
+            <a:off x="868680" y="3685032"/>
+            <a:ext cx="7863840" cy="288036"/>
           </a:xfrm>
           <a:prstGeom prst="rect">
             <a:avLst/>
@@ -30529,8 +31344,8 @@
         </p:nvSpPr>
         <p:spPr>
           <a:xfrm>
-            <a:off x="868680" y="3816706"/>
-            <a:ext cx="7863840" cy="362102"/>
+            <a:off x="868680" y="3936492"/>
+            <a:ext cx="7863840" cy="352044"/>
           </a:xfrm>
           <a:prstGeom prst="rect">
             <a:avLst/>
@@ -30740,6 +31555,46 @@
         </p:nvSpPr>
         <p:spPr>
           <a:xfrm>
+            <a:off x="320040" y="4471416"/>
+            <a:ext cx="8503920" cy="192024"/>
+          </a:xfrm>
+          <a:prstGeom prst="rect">
+            <a:avLst/>
+          </a:prstGeom>
+          <a:noFill/>
+          <a:ln/>
+        </p:spPr>
+        <p:txBody>
+          <a:bodyPr wrap="square" lIns="254" tIns="254" rIns="254" bIns="254" rtlCol="0" anchor="t"/>
+          <a:lstStyle/>
+          <a:p>
+            <a:pPr indent="0" marL="0">
+              <a:buNone/>
+            </a:pPr>
+            <a:r>
+              <a:rPr lang="en-US" sz="1000" dirty="0">
+                <a:solidFill>
+                  <a:srgbClr val="6B7A8D"/>
+                </a:solidFill>
+                <a:latin typeface="Calibri" pitchFamily="34" charset="0"/>
+                <a:ea typeface="Calibri" pitchFamily="34" charset="-122"/>
+                <a:cs typeface="Calibri" pitchFamily="34" charset="-120"/>
+              </a:rPr>
+              <a:t>¹ Total coupons received = 62.0 (10 × 6.2). In the base case the FV is 82.493 — the extra 20.493 is pure interest-on-interest.
+</a:t>
+            </a:r>
+            <a:endParaRPr lang="en-US" sz="1000" dirty="0"/>
+          </a:p>
+        </p:txBody>
+      </p:sp>
+      <p:sp>
+        <p:nvSpPr>
+          <p:cNvPr id="8" name="Text 6"/>
+          <p:cNvSpPr txBox="1"/>
+          <p:nvPr/>
+        </p:nvSpPr>
+        <p:spPr>
+          <a:xfrm>
             <a:off x="320040" y="4663440"/>
             <a:ext cx="8503920" cy="201168"/>
           </a:xfrm>
@@ -30768,7 +31623,7 @@
                 <a:ea typeface="Calibri" pitchFamily="34" charset="-122"/>
                 <a:cs typeface="Calibri" pitchFamily="34" charset="-120"/>
               </a:rPr>
-              <a:t>Source: CFA Institute, Curriculum Vol 6, Learning Module 10, Examples 1–3 (VFO), pp. 239–242.</a:t>
+              <a:t>Source: CFA Institute, Curriculum Vol 6, Learning Module 10, Examples 1 and 3 plus the Knowledge Check (VFO), pp. 239–242.</a:t>
             </a:r>
             <a:endParaRPr lang="en-US" sz="750" dirty="0"/>
           </a:p>
@@ -30776,7 +31631,7 @@
       </p:sp>
       <p:sp>
         <p:nvSpPr>
-          <p:cNvPr id="8" name="Text 6"/>
+          <p:cNvPr id="9" name="Text 7"/>
           <p:cNvSpPr txBox="1"/>
           <p:nvPr/>
         </p:nvSpPr>
@@ -31658,14 +32513,14 @@
       </p:graphicFrame>
       <p:sp>
         <p:nvSpPr>
-          <p:cNvPr id="10" name="Shape 7"/>
+          <p:cNvPr id="11" name="Shape 8"/>
           <p:cNvSpPr/>
           <p:nvPr/>
         </p:nvSpPr>
         <p:spPr>
           <a:xfrm>
-            <a:off x="320040" y="2560320"/>
-            <a:ext cx="8503920" cy="1737360"/>
+            <a:off x="320040" y="2423160"/>
+            <a:ext cx="8503920" cy="1874520"/>
           </a:xfrm>
           <a:prstGeom prst="rect">
             <a:avLst/>
@@ -31683,13 +32538,13 @@
       </p:sp>
       <p:sp>
         <p:nvSpPr>
-          <p:cNvPr id="11" name="Text 8"/>
+          <p:cNvPr id="12" name="Text 9"/>
           <p:cNvSpPr txBox="1"/>
           <p:nvPr/>
         </p:nvSpPr>
         <p:spPr>
           <a:xfrm>
-            <a:off x="457200" y="2606040"/>
+            <a:off x="457200" y="2468880"/>
             <a:ext cx="8229600" cy="256032"/>
           </a:xfrm>
           <a:prstGeom prst="rect">
@@ -31725,13 +32580,13 @@
       </p:sp>
       <p:sp>
         <p:nvSpPr>
-          <p:cNvPr id="12" name="Text 9"/>
+          <p:cNvPr id="13" name="Text 10"/>
           <p:cNvSpPr txBox="1"/>
           <p:nvPr/>
         </p:nvSpPr>
         <p:spPr>
           <a:xfrm>
-            <a:off x="457200" y="2898648"/>
+            <a:off x="457200" y="2761488"/>
             <a:ext cx="8229600" cy="457200"/>
           </a:xfrm>
           <a:prstGeom prst="rect">
@@ -31767,14 +32622,14 @@
       </p:sp>
       <p:sp>
         <p:nvSpPr>
-          <p:cNvPr id="13" name="Text 10"/>
+          <p:cNvPr id="14" name="Text 11"/>
           <p:cNvSpPr txBox="1"/>
           <p:nvPr/>
         </p:nvSpPr>
         <p:spPr>
           <a:xfrm>
-            <a:off x="457200" y="3410712"/>
-            <a:ext cx="8229600" cy="374904"/>
+            <a:off x="457200" y="3273552"/>
+            <a:ext cx="8229600" cy="512064"/>
           </a:xfrm>
           <a:prstGeom prst="rect">
             <a:avLst/>
@@ -31796,7 +32651,7 @@
               <a:buNone/>
             </a:pPr>
             <a:r>
-              <a:rPr lang="en-US" sz="1050" b="1" dirty="0">
+              <a:rPr lang="en-US" sz="1100" b="1" dirty="0">
                 <a:solidFill>
                   <a:srgbClr val="1B2A4A"/>
                 </a:solidFill>
@@ -31813,7 +32668,7 @@
               <a:buNone/>
             </a:pPr>
             <a:r>
-              <a:rPr lang="en-US" sz="1050" dirty="0">
+              <a:rPr lang="en-US" sz="1100" dirty="0">
                 <a:solidFill>
                   <a:srgbClr val="334155"/>
                 </a:solidFill>
@@ -31831,7 +32686,7 @@
               <a:buNone/>
             </a:pPr>
             <a:r>
-              <a:rPr lang="en-US" sz="1050" b="1" dirty="0">
+              <a:rPr lang="en-US" sz="1100" b="1" dirty="0">
                 <a:solidFill>
                   <a:srgbClr val="1B2A4A"/>
                 </a:solidFill>
@@ -31848,7 +32703,7 @@
               <a:buNone/>
             </a:pPr>
             <a:r>
-              <a:rPr lang="en-US" sz="1050" dirty="0">
+              <a:rPr lang="en-US" sz="1100" dirty="0">
                 <a:solidFill>
                   <a:srgbClr val="334155"/>
                 </a:solidFill>
@@ -31866,7 +32721,7 @@
               <a:buNone/>
             </a:pPr>
             <a:r>
-              <a:rPr lang="en-US" sz="1050" b="1" dirty="0">
+              <a:rPr lang="en-US" sz="1100" b="1" dirty="0">
                 <a:solidFill>
                   <a:srgbClr val="1B2A4A"/>
                 </a:solidFill>
@@ -31883,7 +32738,7 @@
               <a:buNone/>
             </a:pPr>
             <a:r>
-              <a:rPr lang="en-US" sz="1050" dirty="0">
+              <a:rPr lang="en-US" sz="1100" dirty="0">
                 <a:solidFill>
                   <a:srgbClr val="334155"/>
                 </a:solidFill>
@@ -31893,13 +32748,13 @@
               </a:rPr>
               <a:t>Horizon yield: (186.475 / 100)^(1/10) − 1 = 6.43%</a:t>
             </a:r>
-            <a:endParaRPr lang="en-US" sz="1050" dirty="0"/>
-          </a:p>
-        </p:txBody>
-      </p:sp>
-      <p:sp>
-        <p:nvSpPr>
-          <p:cNvPr id="14" name="Shape 11"/>
+            <a:endParaRPr lang="en-US" sz="1100" dirty="0"/>
+          </a:p>
+        </p:txBody>
+      </p:sp>
+      <p:sp>
+        <p:nvSpPr>
+          <p:cNvPr id="15" name="Shape 12"/>
           <p:cNvSpPr/>
           <p:nvPr/>
         </p:nvSpPr>
@@ -31919,7 +32774,7 @@
       </p:sp>
       <p:sp>
         <p:nvSpPr>
-          <p:cNvPr id="15" name="Text 12"/>
+          <p:cNvPr id="16" name="Text 13"/>
           <p:cNvSpPr txBox="1"/>
           <p:nvPr/>
         </p:nvSpPr>
@@ -32164,7 +33019,7 @@
                 <a:ea typeface="Calibri" pitchFamily="34" charset="-122"/>
                 <a:cs typeface="Calibri" pitchFamily="34" charset="-120"/>
               </a:rPr>
-              <a:t>Source: CFA Institute, Curriculum Vol 6, Learning Module 10, Examples 2 &amp; 4 (Baywhite), pp. 240–242.</a:t>
+              <a:t>Source: CFA Institute, Curriculum Vol 6, Learning Module 10, Examples 2 and 4 plus the Knowledge Check (Baywhite), pp. 240–243.</a:t>
             </a:r>
             <a:endParaRPr lang="en-US" sz="750" dirty="0"/>
           </a:p>
@@ -32235,10 +33090,10 @@
             <a:tbl>
               <a:tblPr/>
               <a:tblGrid>
-                <a:gridCol w="4206240"/>
-                <a:gridCol w="1737360"/>
-                <a:gridCol w="1371600"/>
-                <a:gridCol w="1188720"/>
+                <a:gridCol w="3931920"/>
+                <a:gridCol w="1645920"/>
+                <a:gridCol w="1645920"/>
+                <a:gridCol w="1280160"/>
               </a:tblGrid>
               <a:tr h="274320">
                 <a:tc>
@@ -33060,8 +33915,8 @@
         </p:nvSpPr>
         <p:spPr>
           <a:xfrm>
-            <a:off x="320040" y="2560320"/>
-            <a:ext cx="8503920" cy="1737360"/>
+            <a:off x="320040" y="2423160"/>
+            <a:ext cx="8503920" cy="1874520"/>
           </a:xfrm>
           <a:prstGeom prst="rect">
             <a:avLst/>
@@ -33085,7 +33940,7 @@
         </p:nvSpPr>
         <p:spPr>
           <a:xfrm>
-            <a:off x="457200" y="2606040"/>
+            <a:off x="457200" y="2468880"/>
             <a:ext cx="8229600" cy="256032"/>
           </a:xfrm>
           <a:prstGeom prst="rect">
@@ -33127,7 +33982,7 @@
         </p:nvSpPr>
         <p:spPr>
           <a:xfrm>
-            <a:off x="457200" y="2898648"/>
+            <a:off x="457200" y="2761488"/>
             <a:ext cx="8229600" cy="457200"/>
           </a:xfrm>
           <a:prstGeom prst="rect">
@@ -33169,8 +34024,8 @@
         </p:nvSpPr>
         <p:spPr>
           <a:xfrm>
-            <a:off x="457200" y="3410712"/>
-            <a:ext cx="8229600" cy="374904"/>
+            <a:off x="457200" y="3273552"/>
+            <a:ext cx="8229600" cy="512064"/>
           </a:xfrm>
           <a:prstGeom prst="rect">
             <a:avLst/>
@@ -33192,7 +34047,7 @@
               <a:buNone/>
             </a:pPr>
             <a:r>
-              <a:rPr lang="en-US" sz="1050" b="1" dirty="0">
+              <a:rPr lang="en-US" sz="1100" b="1" dirty="0">
                 <a:solidFill>
                   <a:srgbClr val="1B2A4A"/>
                 </a:solidFill>
@@ -33209,7 +34064,7 @@
               <a:buNone/>
             </a:pPr>
             <a:r>
-              <a:rPr lang="en-US" sz="1050" dirty="0">
+              <a:rPr lang="en-US" sz="1100" dirty="0">
                 <a:solidFill>
                   <a:srgbClr val="334155"/>
                 </a:solidFill>
@@ -33227,7 +34082,7 @@
               <a:buNone/>
             </a:pPr>
             <a:r>
-              <a:rPr lang="en-US" sz="1050" b="1" dirty="0">
+              <a:rPr lang="en-US" sz="1100" b="1" dirty="0">
                 <a:solidFill>
                   <a:srgbClr val="1B2A4A"/>
                 </a:solidFill>
@@ -33244,7 +34099,7 @@
               <a:buNone/>
             </a:pPr>
             <a:r>
-              <a:rPr lang="en-US" sz="1050" dirty="0">
+              <a:rPr lang="en-US" sz="1100" dirty="0">
                 <a:solidFill>
                   <a:srgbClr val="334155"/>
                 </a:solidFill>
@@ -33262,7 +34117,7 @@
               <a:buNone/>
             </a:pPr>
             <a:r>
-              <a:rPr lang="en-US" sz="1050" b="1" dirty="0">
+              <a:rPr lang="en-US" sz="1100" b="1" dirty="0">
                 <a:solidFill>
                   <a:srgbClr val="1B2A4A"/>
                 </a:solidFill>
@@ -33279,7 +34134,7 @@
               <a:buNone/>
             </a:pPr>
             <a:r>
-              <a:rPr lang="en-US" sz="1050" dirty="0">
+              <a:rPr lang="en-US" sz="1100" dirty="0">
                 <a:solidFill>
                   <a:srgbClr val="334155"/>
                 </a:solidFill>
@@ -33289,7 +34144,7 @@
               </a:rPr>
               <a:t>Horizon yield: (122.872 / 100)^(1/4) − 1 = 5.28%</a:t>
             </a:r>
-            <a:endParaRPr lang="en-US" sz="1050" dirty="0"/>
+            <a:endParaRPr lang="en-US" sz="1100" dirty="0"/>
           </a:p>
         </p:txBody>
       </p:sp>
@@ -33532,6 +34387,46 @@
         </p:nvSpPr>
         <p:spPr>
           <a:xfrm>
+            <a:off x="320040" y="4471416"/>
+            <a:ext cx="8503920" cy="192024"/>
+          </a:xfrm>
+          <a:prstGeom prst="rect">
+            <a:avLst/>
+          </a:prstGeom>
+          <a:noFill/>
+          <a:ln/>
+        </p:spPr>
+        <p:txBody>
+          <a:bodyPr wrap="square" lIns="254" tIns="254" rIns="254" bIns="254" rtlCol="0" anchor="t"/>
+          <a:lstStyle/>
+          <a:p>
+            <a:pPr indent="0" marL="0">
+              <a:buNone/>
+            </a:pPr>
+            <a:r>
+              <a:rPr lang="en-US" sz="1000" dirty="0">
+                <a:solidFill>
+                  <a:srgbClr val="6B7A8D"/>
+                </a:solidFill>
+                <a:latin typeface="Calibri" pitchFamily="34" charset="0"/>
+                <a:ea typeface="Calibri" pitchFamily="34" charset="-122"/>
+                <a:cs typeface="Calibri" pitchFamily="34" charset="-120"/>
+              </a:rPr>
+              <a:t>¹ Hightest's realised 8y horizon yield: 6.20% stable, 6.24% at +100 bp, 6.17% at −100 bp — near-identical because horizon ≈ MacDur 7.74y.
+</a:t>
+            </a:r>
+            <a:endParaRPr lang="en-US" sz="1000" dirty="0"/>
+          </a:p>
+        </p:txBody>
+      </p:sp>
+      <p:sp>
+        <p:nvSpPr>
+          <p:cNvPr id="8" name="Text 6"/>
+          <p:cNvSpPr txBox="1"/>
+          <p:nvPr/>
+        </p:nvSpPr>
+        <p:spPr>
+          <a:xfrm>
             <a:off x="320040" y="4663440"/>
             <a:ext cx="8503920" cy="201168"/>
           </a:xfrm>
@@ -33560,7 +34455,7 @@
                 <a:ea typeface="Calibri" pitchFamily="34" charset="-122"/>
                 <a:cs typeface="Calibri" pitchFamily="34" charset="-120"/>
               </a:rPr>
-              <a:t>Source: CFA Institute, Curriculum Vol 6, Learning Module 10, §3 "Investment Horizon &amp; Interest Rate Risk", pp. 244–250.</a:t>
+              <a:t>Source: CFA Institute, Curriculum Vol 6, Learning Module 10, §3 "Investment Horizon and Interest Rate Risk", Exhibit 3 and Equation 1, pp. 245–250.</a:t>
             </a:r>
             <a:endParaRPr lang="en-US" sz="750" dirty="0"/>
           </a:p>
@@ -33568,7 +34463,7 @@
       </p:sp>
       <p:sp>
         <p:nvSpPr>
-          <p:cNvPr id="8" name="Text 6"/>
+          <p:cNvPr id="9" name="Text 7"/>
           <p:cNvSpPr txBox="1"/>
           <p:nvPr/>
         </p:nvSpPr>
@@ -33610,7 +34505,7 @@
       </p:sp>
       <p:sp>
         <p:nvSpPr>
-          <p:cNvPr id="9" name="Shape 7"/>
+          <p:cNvPr id="10" name="Shape 8"/>
           <p:cNvSpPr/>
           <p:nvPr/>
         </p:nvSpPr>
@@ -33630,7 +34525,7 @@
       </p:sp>
       <p:sp>
         <p:nvSpPr>
-          <p:cNvPr id="10" name="Text 8"/>
+          <p:cNvPr id="11" name="Text 9"/>
           <p:cNvSpPr txBox="1"/>
           <p:nvPr/>
         </p:nvSpPr>
@@ -33672,7 +34567,7 @@
       </p:sp>
       <p:sp>
         <p:nvSpPr>
-          <p:cNvPr id="11" name="Text 9"/>
+          <p:cNvPr id="12" name="Text 10"/>
           <p:cNvSpPr txBox="1"/>
           <p:nvPr/>
         </p:nvSpPr>
@@ -33706,7 +34601,7 @@
                 <a:ea typeface="Calibri" pitchFamily="34" charset="-122"/>
                 <a:cs typeface="Calibri" pitchFamily="34" charset="-120"/>
               </a:rPr>
-              <a:t>where: Gap &gt; 0 → price risk dominates (rising rates hurt). Gap &lt; 0 → reinvestment risk dominates (falling rates hurt). Gap = 0 → nearly hedged.</a:t>
+              <a:t>where: Gap &gt; 0 → price risk dominates (rising rates hurt). Gap &lt; 0 → reinvestment risk dominates. Gap = 0 → nearly hedged.</a:t>
             </a:r>
             <a:endParaRPr lang="en-US" sz="1100" dirty="0"/>
           </a:p>
@@ -33727,7 +34622,7 @@
           </p:nvPr>
         </p:nvGraphicFramePr>
         <p:xfrm>
-          <a:off x="320040" y="2057400"/>
+          <a:off x="320040" y="2194560"/>
           <a:ext cx="8503920" cy="914400"/>
         </p:xfrm>
         <a:graphic>
@@ -33735,11 +34630,11 @@
             <a:tbl>
               <a:tblPr/>
               <a:tblGrid>
-                <a:gridCol w="2194560"/>
-                <a:gridCol w="1371600"/>
-                <a:gridCol w="1828800"/>
-                <a:gridCol w="1371600"/>
-                <a:gridCol w="1737360"/>
+                <a:gridCol w="2011680"/>
+                <a:gridCol w="1005840"/>
+                <a:gridCol w="1280160"/>
+                <a:gridCol w="1554480"/>
+                <a:gridCol w="2651760"/>
               </a:tblGrid>
               <a:tr h="274320">
                 <a:tc>
@@ -34161,7 +35056,7 @@
                           <a:ea typeface="Consolas" pitchFamily="34" charset="-122"/>
                           <a:cs typeface="Consolas" pitchFamily="34" charset="-120"/>
                         </a:rPr>
-                        <a:t>−2.26 (negative)</a:t>
+                        <a:t>−2.26 (neg.)</a:t>
                       </a:r>
                       <a:endParaRPr lang="en-US" sz="1100" dirty="0">
                         <a:latin typeface="Consolas" charset="0"/>
@@ -34413,7 +35308,7 @@
                           <a:ea typeface="Consolas" pitchFamily="34" charset="-122"/>
                           <a:cs typeface="Consolas" pitchFamily="34" charset="-120"/>
                         </a:rPr>
-                        <a:t>−0.26 (near zero)</a:t>
+                        <a:t>−0.26 (≈ 0)</a:t>
                       </a:r>
                       <a:endParaRPr lang="en-US" sz="1100" dirty="0">
                         <a:latin typeface="Consolas" charset="0"/>
@@ -34665,7 +35560,7 @@
                           <a:ea typeface="Consolas" pitchFamily="34" charset="-122"/>
                           <a:cs typeface="Consolas" pitchFamily="34" charset="-120"/>
                         </a:rPr>
-                        <a:t>+3.74 (positive)</a:t>
+                        <a:t>+3.74 (pos.)</a:t>
                       </a:r>
                       <a:endParaRPr lang="en-US" sz="1100" dirty="0">
                         <a:latin typeface="Consolas" charset="0"/>
@@ -34755,14 +35650,14 @@
       </p:graphicFrame>
       <p:sp>
         <p:nvSpPr>
-          <p:cNvPr id="13" name="Shape 10"/>
+          <p:cNvPr id="14" name="Shape 11"/>
           <p:cNvSpPr/>
           <p:nvPr/>
         </p:nvSpPr>
         <p:spPr>
           <a:xfrm>
-            <a:off x="320040" y="3794760"/>
-            <a:ext cx="8503920" cy="548640"/>
+            <a:off x="320040" y="3611880"/>
+            <a:ext cx="8503920" cy="594360"/>
           </a:xfrm>
           <a:prstGeom prst="rect">
             <a:avLst/>
@@ -34775,14 +35670,14 @@
       </p:sp>
       <p:sp>
         <p:nvSpPr>
-          <p:cNvPr id="14" name="Shape 11"/>
+          <p:cNvPr id="15" name="Shape 12"/>
           <p:cNvSpPr/>
           <p:nvPr/>
         </p:nvSpPr>
         <p:spPr>
           <a:xfrm>
-            <a:off x="320040" y="3794760"/>
-            <a:ext cx="73152" cy="548640"/>
+            <a:off x="320040" y="3611880"/>
+            <a:ext cx="73152" cy="594360"/>
           </a:xfrm>
           <a:prstGeom prst="rect">
             <a:avLst/>
@@ -34795,13 +35690,13 @@
       </p:sp>
       <p:sp>
         <p:nvSpPr>
-          <p:cNvPr id="15" name="Text 12"/>
+          <p:cNvPr id="16" name="Text 13"/>
           <p:cNvSpPr txBox="1"/>
           <p:nvPr/>
         </p:nvSpPr>
         <p:spPr>
           <a:xfrm>
-            <a:off x="457200" y="3840480"/>
+            <a:off x="457200" y="3657600"/>
             <a:ext cx="8275320" cy="256032"/>
           </a:xfrm>
           <a:prstGeom prst="rect">
@@ -34837,14 +35732,14 @@
       </p:sp>
       <p:sp>
         <p:nvSpPr>
-          <p:cNvPr id="16" name="Text 13"/>
+          <p:cNvPr id="17" name="Text 14"/>
           <p:cNvSpPr txBox="1"/>
           <p:nvPr/>
         </p:nvSpPr>
         <p:spPr>
           <a:xfrm>
-            <a:off x="457200" y="4114800"/>
-            <a:ext cx="8275320" cy="182880"/>
+            <a:off x="457200" y="3931920"/>
+            <a:ext cx="8275320" cy="228600"/>
           </a:xfrm>
           <a:prstGeom prst="rect">
             <a:avLst/>
